--- a/decks/the-bro-code-lesson-v2.pptx
+++ b/decks/the-bro-code-lesson-v2.pptx
@@ -17,6 +17,7 @@
     <p:sldId id="265" r:id="rId17"/>
     <p:sldId id="266" r:id="rId18"/>
     <p:sldId id="267" r:id="rId19"/>
+    <p:sldId id="268" r:id="rId20"/>
   </p:sldIdLst>
   <p:sldSz cx="12192000" cy="6858000" type="screen4x3"/>
   <p:notesSz cx="6858000" cy="9144000"/>
@@ -513,7 +514,77 @@
           <a:lstStyle/>
           <a:p>
             <a:r>
-              <a:t>This page and the next three are hidden. They stay in the deck for you and are skipped when you present.</a:t>
+              <a:t>This page is hidden and skipped when you present. The full plan, care notes and research are on the hidden pages at the end of the deck, if you want them.</a:t>
+            </a:r>
+          </a:p>
+        </p:txBody>
+      </p:sp>
+      <p:sp>
+        <p:nvSpPr>
+          <p:cNvPr id="4" name="Slide Number Placeholder 3"/>
+          <p:cNvSpPr>
+            <a:spLocks noGrp="1"/>
+          </p:cNvSpPr>
+          <p:nvPr>
+            <p:ph type="sldNum" idx="5" sz="quarter"/>
+          </p:nvPr>
+        </p:nvSpPr>
+        <p:spPr/>
+      </p:sp>
+    </p:spTree>
+  </p:cSld>
+  <p:clrMapOvr>
+    <a:masterClrMapping/>
+  </p:clrMapOvr>
+</p:notes>
+</file>
+
+<file path=ppt/notesSlides/notesSlide10.xml><?xml version="1.0" encoding="utf-8"?>
+<p:notes xmlns:a="http://schemas.openxmlformats.org/drawingml/2006/main" xmlns:p="http://schemas.openxmlformats.org/presentationml/2006/main" xmlns:r="http://schemas.openxmlformats.org/officeDocument/2006/relationships">
+  <p:cSld>
+    <p:spTree>
+      <p:nvGrpSpPr>
+        <p:cNvPr id="1" name=""/>
+        <p:cNvGrpSpPr/>
+        <p:nvPr/>
+      </p:nvGrpSpPr>
+      <p:grpSpPr>
+        <a:xfrm>
+          <a:off x="0" y="0"/>
+          <a:ext cx="0" cy="0"/>
+          <a:chOff x="0" y="0"/>
+          <a:chExt cx="0" cy="0"/>
+        </a:xfrm>
+      </p:grpSpPr>
+      <p:sp>
+        <p:nvSpPr>
+          <p:cNvPr id="2" name="Slide Image Placeholder 1"/>
+          <p:cNvSpPr>
+            <a:spLocks noGrp="1"/>
+          </p:cNvSpPr>
+          <p:nvPr>
+            <p:ph type="sldImg" idx="2"/>
+          </p:nvPr>
+        </p:nvSpPr>
+        <p:spPr/>
+      </p:sp>
+      <p:sp>
+        <p:nvSpPr>
+          <p:cNvPr id="3" name="Notes Placeholder 2"/>
+          <p:cNvSpPr>
+            <a:spLocks noGrp="1"/>
+          </p:cNvSpPr>
+          <p:nvPr>
+            <p:ph type="body" idx="3" sz="quarter"/>
+          </p:nvPr>
+        </p:nvSpPr>
+        <p:spPr/>
+        <p:txBody>
+          <a:bodyPr/>
+          <a:lstStyle/>
+          <a:p>
+            <a:r>
+              <a:t>If you want more: this page and the next three are hidden and skipped when you present.</a:t>
             </a:r>
           </a:p>
         </p:txBody>
@@ -4165,7 +4236,7 @@
                 </a:solidFill>
                 <a:latin typeface="Inter Tight"/>
               </a:rPr>
-              <a:t>TEACHER PAGE  ·  skipped when you present  ·  Lesson plan</a:t>
+              <a:t>TEACHER PAGE  ·  skipped when you present  ·  Before you start</a:t>
             </a:r>
           </a:p>
         </p:txBody>
@@ -4256,8 +4327,8 @@
         </p:nvSpPr>
         <p:spPr>
           <a:xfrm>
-            <a:off x="548640" y="1828800"/>
-            <a:ext cx="5120640" cy="4389120"/>
+            <a:off x="548640" y="2011680"/>
+            <a:ext cx="11064240" cy="4206240"/>
           </a:xfrm>
           <a:prstGeom prst="rect">
             <a:avLst/>
@@ -4272,43 +4343,43 @@
           <a:p>
             <a:pPr algn="l">
               <a:spcAft>
-                <a:spcPts val="675"/>
-              </a:spcAft>
-            </a:pPr>
-            <a:r>
-              <a:rPr sz="1100" b="1" i="0">
+                <a:spcPts val="900"/>
+              </a:spcAft>
+            </a:pPr>
+            <a:r>
+              <a:rPr sz="1200" b="1" i="0">
                 <a:solidFill>
                   <a:srgbClr val="0B2D5B"/>
                 </a:solidFill>
                 <a:latin typeface="Inter Tight"/>
               </a:rPr>
-              <a:t>GOAL</a:t>
-            </a:r>
-          </a:p>
-          <a:p>
-            <a:pPr algn="l">
-              <a:spcAft>
-                <a:spcPts val="675"/>
-              </a:spcAft>
-            </a:pPr>
-            <a:r>
-              <a:rPr sz="1500" b="0" i="0">
+              <a:t>BEFORE YOU START</a:t>
+            </a:r>
+          </a:p>
+          <a:p>
+            <a:pPr algn="l">
+              <a:spcAft>
+                <a:spcPts val="900"/>
+              </a:spcAft>
+            </a:pPr>
+            <a:r>
+              <a:rPr sz="2000" b="0" i="0">
                 <a:solidFill>
                   <a:srgbClr val="1C1B19"/>
                 </a:solidFill>
                 <a:latin typeface="Source Serif 4"/>
               </a:rPr>
-              <a:t>Students can explain how a feed drifts toward "alpha" and anti-women content, test three of its claims against the research, and name one low-key move for when a joke in the group goes too far. Wanting confidence and respect is treated as fair; nobody is shamed for what their feed shows them.</a:t>
-            </a:r>
-          </a:p>
-          <a:p>
-            <a:pPr algn="l">
-              <a:spcAft>
-                <a:spcPts val="675"/>
-              </a:spcAft>
-            </a:pPr>
-            <a:r>
-              <a:rPr sz="1500" b="0" i="0">
+              <a:t>Students learn how a feed drifts toward "alpha" content, test three of its claims against research, and name one low-key move for when a joke goes too far. Describe the content without playing clips, respect the want for confidence and respect, and keep any student who seems angry and alone for a quiet check-in after.</a:t>
+            </a:r>
+          </a:p>
+          <a:p>
+            <a:pPr algn="l">
+              <a:spcAft>
+                <a:spcPts val="900"/>
+              </a:spcAft>
+            </a:pPr>
+            <a:r>
+              <a:rPr sz="2000" b="0" i="0">
                 <a:solidFill>
                   <a:srgbClr val="1C1B19"/>
                 </a:solidFill>
@@ -4320,327 +4391,33 @@
           <a:p>
             <a:pPr algn="l">
               <a:spcAft>
-                <a:spcPts val="675"/>
-              </a:spcAft>
-            </a:pPr>
-            <a:r>
-              <a:rPr sz="1100" b="1" i="0">
+                <a:spcPts val="900"/>
+              </a:spcAft>
+            </a:pPr>
+            <a:r>
+              <a:rPr sz="1200" b="1" i="0">
                 <a:solidFill>
                   <a:srgbClr val="0B2D5B"/>
                 </a:solidFill>
                 <a:latin typeface="Inter Tight"/>
               </a:rPr>
-              <a:t>MATERIALS</a:t>
-            </a:r>
-          </a:p>
-          <a:p>
-            <a:pPr algn="l">
-              <a:spcAft>
-                <a:spcPts val="675"/>
-              </a:spcAft>
-            </a:pPr>
-            <a:r>
-              <a:rPr sz="1500" b="0" i="0">
+              <a:t>EVERY STUDENT IN THE ROOM</a:t>
+            </a:r>
+          </a:p>
+          <a:p>
+            <a:pPr algn="l">
+              <a:spcAft>
+                <a:spcPts val="900"/>
+              </a:spcAft>
+            </a:pPr>
+            <a:r>
+              <a:rPr sz="2000" b="0" i="0">
                 <a:solidFill>
                   <a:srgbClr val="1C1B19"/>
                 </a:solidFill>
                 <a:latin typeface="Source Serif 4"/>
               </a:rPr>
-              <a:t>Scraps of paper for the opening guess and the anonymous agree/disagree cards</a:t>
-            </a:r>
-          </a:p>
-          <a:p>
-            <a:pPr algn="l">
-              <a:spcAft>
-                <a:spcPts val="675"/>
-              </a:spcAft>
-            </a:pPr>
-            <a:r>
-              <a:rPr sz="1500" b="0" i="0">
-                <a:solidFill>
-                  <a:srgbClr val="1C1B19"/>
-                </a:solidFill>
-                <a:latin typeface="Source Serif 4"/>
-              </a:rPr>
-              <a:t>Index cards or notebooks for the private exit question</a:t>
-            </a:r>
-          </a:p>
-          <a:p>
-            <a:pPr algn="l">
-              <a:spcAft>
-                <a:spcPts val="675"/>
-              </a:spcAft>
-            </a:pPr>
-            <a:r>
-              <a:rPr sz="1500" b="0" i="0">
-                <a:solidFill>
-                  <a:srgbClr val="1C1B19"/>
-                </a:solidFill>
-                <a:latin typeface="Source Serif 4"/>
-              </a:rPr>
-              <a:t>The student page link (last slide) to share after advisory</a:t>
-            </a:r>
-          </a:p>
-        </p:txBody>
-      </p:sp>
-      <p:sp>
-        <p:nvSpPr>
-          <p:cNvPr id="7" name="TextBox 6"/>
-          <p:cNvSpPr txBox="1"/>
-          <p:nvPr/>
-        </p:nvSpPr>
-        <p:spPr>
-          <a:xfrm>
-            <a:off x="6126480" y="1828800"/>
-            <a:ext cx="5486400" cy="4389120"/>
-          </a:xfrm>
-          <a:prstGeom prst="rect">
-            <a:avLst/>
-          </a:prstGeom>
-          <a:noFill/>
-        </p:spPr>
-        <p:txBody>
-          <a:bodyPr wrap="square" anchor="t" lIns="0" rIns="0" tIns="0" bIns="0">
-            <a:spAutoFit/>
-          </a:bodyPr>
-          <a:lstStyle/>
-          <a:p>
-            <a:pPr algn="l">
-              <a:spcAft>
-                <a:spcPts val="630"/>
-              </a:spcAft>
-            </a:pPr>
-            <a:r>
-              <a:rPr sz="1100" b="1" i="0">
-                <a:solidFill>
-                  <a:srgbClr val="0B2D5B"/>
-                </a:solidFill>
-                <a:latin typeface="Inter Tight"/>
-              </a:rPr>
-              <a:t>FLOW</a:t>
-            </a:r>
-          </a:p>
-          <a:p>
-            <a:pPr algn="l">
-              <a:spcAft>
-                <a:spcPts val="630"/>
-              </a:spcAft>
-            </a:pPr>
-            <a:r>
-              <a:rPr sz="1300" b="1" i="0">
-                <a:solidFill>
-                  <a:srgbClr val="F47B20"/>
-                </a:solidFill>
-                <a:latin typeface="Inter Tight"/>
-              </a:rPr>
-              <a:t>2 min   </a:t>
-            </a:r>
-            <a:r>
-              <a:rPr sz="1400" b="0" i="0">
-                <a:solidFill>
-                  <a:srgbClr val="1C1B19"/>
-                </a:solidFill>
-                <a:latin typeface="Source Serif 4"/>
-              </a:rPr>
-              <a:t>Open: you didn't search for it</a:t>
-            </a:r>
-          </a:p>
-          <a:p>
-            <a:pPr algn="l">
-              <a:spcAft>
-                <a:spcPts val="630"/>
-              </a:spcAft>
-            </a:pPr>
-            <a:r>
-              <a:rPr sz="1300" b="1" i="0">
-                <a:solidFill>
-                  <a:srgbClr val="F47B20"/>
-                </a:solidFill>
-                <a:latin typeface="Inter Tight"/>
-              </a:rPr>
-              <a:t>3 min   </a:t>
-            </a:r>
-            <a:r>
-              <a:rPr sz="1400" b="0" i="0">
-                <a:solidFill>
-                  <a:srgbClr val="1C1B19"/>
-                </a:solidFill>
-                <a:latin typeface="Source Serif 4"/>
-              </a:rPr>
-              <a:t>How fast does a feed drift? (written guess)</a:t>
-            </a:r>
-          </a:p>
-          <a:p>
-            <a:pPr algn="l">
-              <a:spcAft>
-                <a:spcPts val="630"/>
-              </a:spcAft>
-            </a:pPr>
-            <a:r>
-              <a:rPr sz="1300" b="1" i="0">
-                <a:solidFill>
-                  <a:srgbClr val="F47B20"/>
-                </a:solidFill>
-                <a:latin typeface="Inter Tight"/>
-              </a:rPr>
-              <a:t>4 min   </a:t>
-            </a:r>
-            <a:r>
-              <a:rPr sz="1400" b="0" i="0">
-                <a:solidFill>
-                  <a:srgbClr val="1C1B19"/>
-                </a:solidFill>
-                <a:latin typeface="Source Serif 4"/>
-              </a:rPr>
-              <a:t>Claims vs. the research (stand up, sit down)</a:t>
-            </a:r>
-          </a:p>
-          <a:p>
-            <a:pPr algn="l">
-              <a:spcAft>
-                <a:spcPts val="630"/>
-              </a:spcAft>
-            </a:pPr>
-            <a:r>
-              <a:rPr sz="1300" b="1" i="0">
-                <a:solidFill>
-                  <a:srgbClr val="F47B20"/>
-                </a:solidFill>
-                <a:latin typeface="Inter Tight"/>
-              </a:rPr>
-              <a:t>3 min   </a:t>
-            </a:r>
-            <a:r>
-              <a:rPr sz="1400" b="0" i="0">
-                <a:solidFill>
-                  <a:srgbClr val="1C1B19"/>
-                </a:solidFill>
-                <a:latin typeface="Source Serif 4"/>
-              </a:rPr>
-              <a:t>What most guys think (anonymous cards)</a:t>
-            </a:r>
-          </a:p>
-          <a:p>
-            <a:pPr algn="l">
-              <a:spcAft>
-                <a:spcPts val="630"/>
-              </a:spcAft>
-            </a:pPr>
-            <a:r>
-              <a:rPr sz="1300" b="1" i="0">
-                <a:solidFill>
-                  <a:srgbClr val="F47B20"/>
-                </a:solidFill>
-                <a:latin typeface="Inter Tight"/>
-              </a:rPr>
-              <a:t>2 min   </a:t>
-            </a:r>
-            <a:r>
-              <a:rPr sz="1400" b="0" i="0">
-                <a:solidFill>
-                  <a:srgbClr val="1C1B19"/>
-                </a:solidFill>
-                <a:latin typeface="Source Serif 4"/>
-              </a:rPr>
-              <a:t>Silence sounds like agreement</a:t>
-            </a:r>
-          </a:p>
-          <a:p>
-            <a:pPr algn="l">
-              <a:spcAft>
-                <a:spcPts val="630"/>
-              </a:spcAft>
-            </a:pPr>
-            <a:r>
-              <a:rPr sz="1300" b="1" i="0">
-                <a:solidFill>
-                  <a:srgbClr val="F47B20"/>
-                </a:solidFill>
-                <a:latin typeface="Inter Tight"/>
-              </a:rPr>
-              <a:t>4 min   </a:t>
-            </a:r>
-            <a:r>
-              <a:rPr sz="1400" b="0" i="0">
-                <a:solidFill>
-                  <a:srgbClr val="1C1B19"/>
-                </a:solidFill>
-                <a:latin typeface="Source Serif 4"/>
-              </a:rPr>
-              <a:t>Three moments (pairs)</a:t>
-            </a:r>
-          </a:p>
-          <a:p>
-            <a:pPr algn="l">
-              <a:spcAft>
-                <a:spcPts val="630"/>
-              </a:spcAft>
-            </a:pPr>
-            <a:r>
-              <a:rPr sz="1300" b="1" i="0">
-                <a:solidFill>
-                  <a:srgbClr val="F47B20"/>
-                </a:solidFill>
-                <a:latin typeface="Inter Tight"/>
-              </a:rPr>
-              <a:t>2 min   </a:t>
-            </a:r>
-            <a:r>
-              <a:rPr sz="1400" b="0" i="0">
-                <a:solidFill>
-                  <a:srgbClr val="1C1B19"/>
-                </a:solidFill>
-                <a:latin typeface="Source Serif 4"/>
-              </a:rPr>
-              <a:t>What you want to keep (private) and the student page</a:t>
-            </a:r>
-          </a:p>
-          <a:p>
-            <a:pPr algn="l">
-              <a:spcAft>
-                <a:spcPts val="630"/>
-              </a:spcAft>
-            </a:pPr>
-            <a:r>
-              <a:rPr sz="1400" b="0" i="0">
-                <a:solidFill>
-                  <a:srgbClr val="1C1B19"/>
-                </a:solidFill>
-                <a:latin typeface="Source Serif 4"/>
-              </a:rPr>
-              <a:t/>
-            </a:r>
-          </a:p>
-          <a:p>
-            <a:pPr algn="l">
-              <a:spcAft>
-                <a:spcPts val="630"/>
-              </a:spcAft>
-            </a:pPr>
-            <a:r>
-              <a:rPr sz="1100" b="1" i="0">
-                <a:solidFill>
-                  <a:srgbClr val="0B2D5B"/>
-                </a:solidFill>
-                <a:latin typeface="Inter Tight"/>
-              </a:rPr>
-              <a:t>SHORT ON TIME (10-MINUTE CHECK-IN)</a:t>
-            </a:r>
-          </a:p>
-          <a:p>
-            <a:pPr algn="l">
-              <a:spcAft>
-                <a:spcPts val="630"/>
-              </a:spcAft>
-            </a:pPr>
-            <a:r>
-              <a:rPr sz="1400" b="0" i="0">
-                <a:solidFill>
-                  <a:srgbClr val="1C1B19"/>
-                </a:solidFill>
-                <a:latin typeface="Source Serif 4"/>
-              </a:rPr>
-              <a:t>The feed guess (3), anonymous agree/disagree cards (3), the low-key moves and one moment in pairs (3), the student page link (1). The student page has the claims, the feed settings and when to get an adult.</a:t>
+              <a:t>Don't make the boys the problem and the girls the audience, and remember that family and faith shape what "being a man" means without that being contempt for women.</a:t>
             </a:r>
           </a:p>
         </p:txBody>
@@ -4654,6 +4431,2244 @@
 </file>
 
 <file path=ppt/slides/slide10.xml><?xml version="1.0" encoding="utf-8"?>
+<p:sld xmlns:a="http://schemas.openxmlformats.org/drawingml/2006/main" xmlns:p="http://schemas.openxmlformats.org/presentationml/2006/main" xmlns:r="http://schemas.openxmlformats.org/officeDocument/2006/relationships" show="0">
+  <p:cSld>
+    <p:bg>
+      <p:bgPr>
+        <a:solidFill>
+          <a:srgbClr val="EEEBE4"/>
+        </a:solidFill>
+        <a:effectLst/>
+      </p:bgPr>
+    </p:bg>
+    <p:spTree>
+      <p:nvGrpSpPr>
+        <p:cNvPr id="1" name=""/>
+        <p:cNvGrpSpPr/>
+        <p:nvPr/>
+      </p:nvGrpSpPr>
+      <p:grpSpPr/>
+      <p:sp>
+        <p:nvSpPr>
+          <p:cNvPr id="2" name="Rectangle 1"/>
+          <p:cNvSpPr/>
+          <p:nvPr/>
+        </p:nvSpPr>
+        <p:spPr>
+          <a:xfrm>
+            <a:off x="0" y="0"/>
+            <a:ext cx="12191695" cy="384048"/>
+          </a:xfrm>
+          <a:prstGeom prst="rect">
+            <a:avLst/>
+          </a:prstGeom>
+          <a:solidFill>
+            <a:srgbClr val="0B2D5B"/>
+          </a:solidFill>
+          <a:ln>
+            <a:noFill/>
+          </a:ln>
+          <a:effectLst/>
+        </p:spPr>
+        <p:style>
+          <a:lnRef idx="1">
+            <a:schemeClr val="accent1"/>
+          </a:lnRef>
+          <a:fillRef idx="3">
+            <a:schemeClr val="accent1"/>
+          </a:fillRef>
+          <a:effectRef idx="2">
+            <a:schemeClr val="accent1"/>
+          </a:effectRef>
+          <a:fontRef idx="minor">
+            <a:schemeClr val="lt1"/>
+          </a:fontRef>
+        </p:style>
+        <p:txBody>
+          <a:bodyPr rtlCol="0" anchor="ctr"/>
+          <a:lstStyle/>
+          <a:p>
+            <a:pPr algn="ctr"/>
+          </a:p>
+        </p:txBody>
+      </p:sp>
+      <p:sp>
+        <p:nvSpPr>
+          <p:cNvPr id="3" name="TextBox 2"/>
+          <p:cNvSpPr txBox="1"/>
+          <p:nvPr/>
+        </p:nvSpPr>
+        <p:spPr>
+          <a:xfrm>
+            <a:off x="548640" y="100584"/>
+            <a:ext cx="10972800" cy="274320"/>
+          </a:xfrm>
+          <a:prstGeom prst="rect">
+            <a:avLst/>
+          </a:prstGeom>
+          <a:noFill/>
+        </p:spPr>
+        <p:txBody>
+          <a:bodyPr wrap="square" anchor="t" lIns="0" rIns="0" tIns="0" bIns="0">
+            <a:spAutoFit/>
+          </a:bodyPr>
+          <a:lstStyle/>
+          <a:p>
+            <a:pPr algn="l">
+              <a:spcAft>
+                <a:spcPts val="495"/>
+              </a:spcAft>
+            </a:pPr>
+            <a:r>
+              <a:rPr sz="1100" b="1" i="0">
+                <a:solidFill>
+                  <a:srgbClr val="FFFFFF"/>
+                </a:solidFill>
+                <a:latin typeface="Inter Tight"/>
+              </a:rPr>
+              <a:t>TEACHER PAGE  ·  skipped when you present  ·  Lesson plan</a:t>
+            </a:r>
+          </a:p>
+        </p:txBody>
+      </p:sp>
+      <p:sp>
+        <p:nvSpPr>
+          <p:cNvPr id="4" name="TextBox 3"/>
+          <p:cNvSpPr txBox="1"/>
+          <p:nvPr/>
+        </p:nvSpPr>
+        <p:spPr>
+          <a:xfrm>
+            <a:off x="548640" y="685800"/>
+            <a:ext cx="10972800" cy="731520"/>
+          </a:xfrm>
+          <a:prstGeom prst="rect">
+            <a:avLst/>
+          </a:prstGeom>
+          <a:noFill/>
+        </p:spPr>
+        <p:txBody>
+          <a:bodyPr wrap="square" anchor="t" lIns="0" rIns="0" tIns="0" bIns="0">
+            <a:spAutoFit/>
+          </a:bodyPr>
+          <a:lstStyle/>
+          <a:p>
+            <a:pPr algn="l">
+              <a:spcAft>
+                <a:spcPts val="1530"/>
+              </a:spcAft>
+            </a:pPr>
+            <a:r>
+              <a:rPr sz="3400" b="1" i="0">
+                <a:solidFill>
+                  <a:srgbClr val="1C1B19"/>
+                </a:solidFill>
+                <a:latin typeface="Source Serif 4"/>
+              </a:rPr>
+              <a:t>The Bro Code</a:t>
+            </a:r>
+          </a:p>
+        </p:txBody>
+      </p:sp>
+      <p:sp>
+        <p:nvSpPr>
+          <p:cNvPr id="5" name="TextBox 4"/>
+          <p:cNvSpPr txBox="1"/>
+          <p:nvPr/>
+        </p:nvSpPr>
+        <p:spPr>
+          <a:xfrm>
+            <a:off x="548640" y="1325880"/>
+            <a:ext cx="10972800" cy="365760"/>
+          </a:xfrm>
+          <a:prstGeom prst="rect">
+            <a:avLst/>
+          </a:prstGeom>
+          <a:noFill/>
+        </p:spPr>
+        <p:txBody>
+          <a:bodyPr wrap="square" anchor="t" lIns="0" rIns="0" tIns="0" bIns="0">
+            <a:spAutoFit/>
+          </a:bodyPr>
+          <a:lstStyle/>
+          <a:p>
+            <a:pPr algn="l">
+              <a:spcAft>
+                <a:spcPts val="630"/>
+              </a:spcAft>
+            </a:pPr>
+            <a:r>
+              <a:rPr sz="1400" b="0" i="0">
+                <a:solidFill>
+                  <a:srgbClr val="5D5A54"/>
+                </a:solidFill>
+                <a:latin typeface="Inter Tight"/>
+              </a:rPr>
+              <a:t>Upper School  ·  20 minutes (fits a 30-minute advisory, with time for your opening check-in; 10-minute version below)  ·  Any grade</a:t>
+            </a:r>
+          </a:p>
+        </p:txBody>
+      </p:sp>
+      <p:sp>
+        <p:nvSpPr>
+          <p:cNvPr id="6" name="TextBox 5"/>
+          <p:cNvSpPr txBox="1"/>
+          <p:nvPr/>
+        </p:nvSpPr>
+        <p:spPr>
+          <a:xfrm>
+            <a:off x="548640" y="1828800"/>
+            <a:ext cx="5120640" cy="4389120"/>
+          </a:xfrm>
+          <a:prstGeom prst="rect">
+            <a:avLst/>
+          </a:prstGeom>
+          <a:noFill/>
+        </p:spPr>
+        <p:txBody>
+          <a:bodyPr wrap="square" anchor="t" lIns="0" rIns="0" tIns="0" bIns="0">
+            <a:spAutoFit/>
+          </a:bodyPr>
+          <a:lstStyle/>
+          <a:p>
+            <a:pPr algn="l">
+              <a:spcAft>
+                <a:spcPts val="675"/>
+              </a:spcAft>
+            </a:pPr>
+            <a:r>
+              <a:rPr sz="1100" b="1" i="0">
+                <a:solidFill>
+                  <a:srgbClr val="0B2D5B"/>
+                </a:solidFill>
+                <a:latin typeface="Inter Tight"/>
+              </a:rPr>
+              <a:t>GOAL</a:t>
+            </a:r>
+          </a:p>
+          <a:p>
+            <a:pPr algn="l">
+              <a:spcAft>
+                <a:spcPts val="675"/>
+              </a:spcAft>
+            </a:pPr>
+            <a:r>
+              <a:rPr sz="1500" b="0" i="0">
+                <a:solidFill>
+                  <a:srgbClr val="1C1B19"/>
+                </a:solidFill>
+                <a:latin typeface="Source Serif 4"/>
+              </a:rPr>
+              <a:t>Students can explain how a feed drifts toward "alpha" and anti-women content, test three of its claims against the research, and name one low-key move for when a joke in the group goes too far. Wanting confidence and respect is treated as fair; nobody is shamed for what their feed shows them.</a:t>
+            </a:r>
+          </a:p>
+          <a:p>
+            <a:pPr algn="l">
+              <a:spcAft>
+                <a:spcPts val="675"/>
+              </a:spcAft>
+            </a:pPr>
+            <a:r>
+              <a:rPr sz="1500" b="0" i="0">
+                <a:solidFill>
+                  <a:srgbClr val="1C1B19"/>
+                </a:solidFill>
+                <a:latin typeface="Source Serif 4"/>
+              </a:rPr>
+              <a:t/>
+            </a:r>
+          </a:p>
+          <a:p>
+            <a:pPr algn="l">
+              <a:spcAft>
+                <a:spcPts val="675"/>
+              </a:spcAft>
+            </a:pPr>
+            <a:r>
+              <a:rPr sz="1100" b="1" i="0">
+                <a:solidFill>
+                  <a:srgbClr val="0B2D5B"/>
+                </a:solidFill>
+                <a:latin typeface="Inter Tight"/>
+              </a:rPr>
+              <a:t>MATERIALS</a:t>
+            </a:r>
+          </a:p>
+          <a:p>
+            <a:pPr algn="l">
+              <a:spcAft>
+                <a:spcPts val="675"/>
+              </a:spcAft>
+            </a:pPr>
+            <a:r>
+              <a:rPr sz="1500" b="0" i="0">
+                <a:solidFill>
+                  <a:srgbClr val="1C1B19"/>
+                </a:solidFill>
+                <a:latin typeface="Source Serif 4"/>
+              </a:rPr>
+              <a:t>Scraps of paper for the opening guess and the anonymous agree/disagree cards</a:t>
+            </a:r>
+          </a:p>
+          <a:p>
+            <a:pPr algn="l">
+              <a:spcAft>
+                <a:spcPts val="675"/>
+              </a:spcAft>
+            </a:pPr>
+            <a:r>
+              <a:rPr sz="1500" b="0" i="0">
+                <a:solidFill>
+                  <a:srgbClr val="1C1B19"/>
+                </a:solidFill>
+                <a:latin typeface="Source Serif 4"/>
+              </a:rPr>
+              <a:t>Index cards or notebooks for the private exit question</a:t>
+            </a:r>
+          </a:p>
+          <a:p>
+            <a:pPr algn="l">
+              <a:spcAft>
+                <a:spcPts val="675"/>
+              </a:spcAft>
+            </a:pPr>
+            <a:r>
+              <a:rPr sz="1500" b="0" i="0">
+                <a:solidFill>
+                  <a:srgbClr val="1C1B19"/>
+                </a:solidFill>
+                <a:latin typeface="Source Serif 4"/>
+              </a:rPr>
+              <a:t>The student page link (last slide) to share after advisory</a:t>
+            </a:r>
+          </a:p>
+        </p:txBody>
+      </p:sp>
+      <p:sp>
+        <p:nvSpPr>
+          <p:cNvPr id="7" name="TextBox 6"/>
+          <p:cNvSpPr txBox="1"/>
+          <p:nvPr/>
+        </p:nvSpPr>
+        <p:spPr>
+          <a:xfrm>
+            <a:off x="6126480" y="1828800"/>
+            <a:ext cx="5486400" cy="4389120"/>
+          </a:xfrm>
+          <a:prstGeom prst="rect">
+            <a:avLst/>
+          </a:prstGeom>
+          <a:noFill/>
+        </p:spPr>
+        <p:txBody>
+          <a:bodyPr wrap="square" anchor="t" lIns="0" rIns="0" tIns="0" bIns="0">
+            <a:spAutoFit/>
+          </a:bodyPr>
+          <a:lstStyle/>
+          <a:p>
+            <a:pPr algn="l">
+              <a:spcAft>
+                <a:spcPts val="630"/>
+              </a:spcAft>
+            </a:pPr>
+            <a:r>
+              <a:rPr sz="1100" b="1" i="0">
+                <a:solidFill>
+                  <a:srgbClr val="0B2D5B"/>
+                </a:solidFill>
+                <a:latin typeface="Inter Tight"/>
+              </a:rPr>
+              <a:t>FLOW</a:t>
+            </a:r>
+          </a:p>
+          <a:p>
+            <a:pPr algn="l">
+              <a:spcAft>
+                <a:spcPts val="630"/>
+              </a:spcAft>
+            </a:pPr>
+            <a:r>
+              <a:rPr sz="1300" b="1" i="0">
+                <a:solidFill>
+                  <a:srgbClr val="F47B20"/>
+                </a:solidFill>
+                <a:latin typeface="Inter Tight"/>
+              </a:rPr>
+              <a:t>2 min   </a:t>
+            </a:r>
+            <a:r>
+              <a:rPr sz="1400" b="0" i="0">
+                <a:solidFill>
+                  <a:srgbClr val="1C1B19"/>
+                </a:solidFill>
+                <a:latin typeface="Source Serif 4"/>
+              </a:rPr>
+              <a:t>Open: you didn't search for it</a:t>
+            </a:r>
+          </a:p>
+          <a:p>
+            <a:pPr algn="l">
+              <a:spcAft>
+                <a:spcPts val="630"/>
+              </a:spcAft>
+            </a:pPr>
+            <a:r>
+              <a:rPr sz="1300" b="1" i="0">
+                <a:solidFill>
+                  <a:srgbClr val="F47B20"/>
+                </a:solidFill>
+                <a:latin typeface="Inter Tight"/>
+              </a:rPr>
+              <a:t>3 min   </a:t>
+            </a:r>
+            <a:r>
+              <a:rPr sz="1400" b="0" i="0">
+                <a:solidFill>
+                  <a:srgbClr val="1C1B19"/>
+                </a:solidFill>
+                <a:latin typeface="Source Serif 4"/>
+              </a:rPr>
+              <a:t>How fast does a feed drift? (written guess)</a:t>
+            </a:r>
+          </a:p>
+          <a:p>
+            <a:pPr algn="l">
+              <a:spcAft>
+                <a:spcPts val="630"/>
+              </a:spcAft>
+            </a:pPr>
+            <a:r>
+              <a:rPr sz="1300" b="1" i="0">
+                <a:solidFill>
+                  <a:srgbClr val="F47B20"/>
+                </a:solidFill>
+                <a:latin typeface="Inter Tight"/>
+              </a:rPr>
+              <a:t>4 min   </a:t>
+            </a:r>
+            <a:r>
+              <a:rPr sz="1400" b="0" i="0">
+                <a:solidFill>
+                  <a:srgbClr val="1C1B19"/>
+                </a:solidFill>
+                <a:latin typeface="Source Serif 4"/>
+              </a:rPr>
+              <a:t>Claims vs. the research (stand up, sit down)</a:t>
+            </a:r>
+          </a:p>
+          <a:p>
+            <a:pPr algn="l">
+              <a:spcAft>
+                <a:spcPts val="630"/>
+              </a:spcAft>
+            </a:pPr>
+            <a:r>
+              <a:rPr sz="1300" b="1" i="0">
+                <a:solidFill>
+                  <a:srgbClr val="F47B20"/>
+                </a:solidFill>
+                <a:latin typeface="Inter Tight"/>
+              </a:rPr>
+              <a:t>3 min   </a:t>
+            </a:r>
+            <a:r>
+              <a:rPr sz="1400" b="0" i="0">
+                <a:solidFill>
+                  <a:srgbClr val="1C1B19"/>
+                </a:solidFill>
+                <a:latin typeface="Source Serif 4"/>
+              </a:rPr>
+              <a:t>What most guys think (anonymous cards)</a:t>
+            </a:r>
+          </a:p>
+          <a:p>
+            <a:pPr algn="l">
+              <a:spcAft>
+                <a:spcPts val="630"/>
+              </a:spcAft>
+            </a:pPr>
+            <a:r>
+              <a:rPr sz="1300" b="1" i="0">
+                <a:solidFill>
+                  <a:srgbClr val="F47B20"/>
+                </a:solidFill>
+                <a:latin typeface="Inter Tight"/>
+              </a:rPr>
+              <a:t>2 min   </a:t>
+            </a:r>
+            <a:r>
+              <a:rPr sz="1400" b="0" i="0">
+                <a:solidFill>
+                  <a:srgbClr val="1C1B19"/>
+                </a:solidFill>
+                <a:latin typeface="Source Serif 4"/>
+              </a:rPr>
+              <a:t>Silence sounds like agreement</a:t>
+            </a:r>
+          </a:p>
+          <a:p>
+            <a:pPr algn="l">
+              <a:spcAft>
+                <a:spcPts val="630"/>
+              </a:spcAft>
+            </a:pPr>
+            <a:r>
+              <a:rPr sz="1300" b="1" i="0">
+                <a:solidFill>
+                  <a:srgbClr val="F47B20"/>
+                </a:solidFill>
+                <a:latin typeface="Inter Tight"/>
+              </a:rPr>
+              <a:t>4 min   </a:t>
+            </a:r>
+            <a:r>
+              <a:rPr sz="1400" b="0" i="0">
+                <a:solidFill>
+                  <a:srgbClr val="1C1B19"/>
+                </a:solidFill>
+                <a:latin typeface="Source Serif 4"/>
+              </a:rPr>
+              <a:t>Three moments (pairs)</a:t>
+            </a:r>
+          </a:p>
+          <a:p>
+            <a:pPr algn="l">
+              <a:spcAft>
+                <a:spcPts val="630"/>
+              </a:spcAft>
+            </a:pPr>
+            <a:r>
+              <a:rPr sz="1300" b="1" i="0">
+                <a:solidFill>
+                  <a:srgbClr val="F47B20"/>
+                </a:solidFill>
+                <a:latin typeface="Inter Tight"/>
+              </a:rPr>
+              <a:t>2 min   </a:t>
+            </a:r>
+            <a:r>
+              <a:rPr sz="1400" b="0" i="0">
+                <a:solidFill>
+                  <a:srgbClr val="1C1B19"/>
+                </a:solidFill>
+                <a:latin typeface="Source Serif 4"/>
+              </a:rPr>
+              <a:t>What you want to keep (private) and the student page</a:t>
+            </a:r>
+          </a:p>
+          <a:p>
+            <a:pPr algn="l">
+              <a:spcAft>
+                <a:spcPts val="630"/>
+              </a:spcAft>
+            </a:pPr>
+            <a:r>
+              <a:rPr sz="1400" b="0" i="0">
+                <a:solidFill>
+                  <a:srgbClr val="1C1B19"/>
+                </a:solidFill>
+                <a:latin typeface="Source Serif 4"/>
+              </a:rPr>
+              <a:t/>
+            </a:r>
+          </a:p>
+          <a:p>
+            <a:pPr algn="l">
+              <a:spcAft>
+                <a:spcPts val="630"/>
+              </a:spcAft>
+            </a:pPr>
+            <a:r>
+              <a:rPr sz="1100" b="1" i="0">
+                <a:solidFill>
+                  <a:srgbClr val="0B2D5B"/>
+                </a:solidFill>
+                <a:latin typeface="Inter Tight"/>
+              </a:rPr>
+              <a:t>SHORT ON TIME (10-MINUTE CHECK-IN)</a:t>
+            </a:r>
+          </a:p>
+          <a:p>
+            <a:pPr algn="l">
+              <a:spcAft>
+                <a:spcPts val="630"/>
+              </a:spcAft>
+            </a:pPr>
+            <a:r>
+              <a:rPr sz="1400" b="0" i="0">
+                <a:solidFill>
+                  <a:srgbClr val="1C1B19"/>
+                </a:solidFill>
+                <a:latin typeface="Source Serif 4"/>
+              </a:rPr>
+              <a:t>The feed guess (3), anonymous agree/disagree cards (3), the low-key moves and one moment in pairs (3), the student page link (1). The student page has the claims, the feed settings and when to get an adult.</a:t>
+            </a:r>
+          </a:p>
+        </p:txBody>
+      </p:sp>
+    </p:spTree>
+  </p:cSld>
+  <p:clrMapOvr>
+    <a:masterClrMapping/>
+  </p:clrMapOvr>
+</p:sld>
+</file>
+
+<file path=ppt/slides/slide11.xml><?xml version="1.0" encoding="utf-8"?>
+<p:sld xmlns:a="http://schemas.openxmlformats.org/drawingml/2006/main" xmlns:p="http://schemas.openxmlformats.org/presentationml/2006/main" xmlns:r="http://schemas.openxmlformats.org/officeDocument/2006/relationships" show="0">
+  <p:cSld>
+    <p:bg>
+      <p:bgPr>
+        <a:solidFill>
+          <a:srgbClr val="EEEBE4"/>
+        </a:solidFill>
+        <a:effectLst/>
+      </p:bgPr>
+    </p:bg>
+    <p:spTree>
+      <p:nvGrpSpPr>
+        <p:cNvPr id="1" name=""/>
+        <p:cNvGrpSpPr/>
+        <p:nvPr/>
+      </p:nvGrpSpPr>
+      <p:grpSpPr/>
+      <p:sp>
+        <p:nvSpPr>
+          <p:cNvPr id="2" name="Rectangle 1"/>
+          <p:cNvSpPr/>
+          <p:nvPr/>
+        </p:nvSpPr>
+        <p:spPr>
+          <a:xfrm>
+            <a:off x="0" y="0"/>
+            <a:ext cx="12191695" cy="384048"/>
+          </a:xfrm>
+          <a:prstGeom prst="rect">
+            <a:avLst/>
+          </a:prstGeom>
+          <a:solidFill>
+            <a:srgbClr val="0B2D5B"/>
+          </a:solidFill>
+          <a:ln>
+            <a:noFill/>
+          </a:ln>
+          <a:effectLst/>
+        </p:spPr>
+        <p:style>
+          <a:lnRef idx="1">
+            <a:schemeClr val="accent1"/>
+          </a:lnRef>
+          <a:fillRef idx="3">
+            <a:schemeClr val="accent1"/>
+          </a:fillRef>
+          <a:effectRef idx="2">
+            <a:schemeClr val="accent1"/>
+          </a:effectRef>
+          <a:fontRef idx="minor">
+            <a:schemeClr val="lt1"/>
+          </a:fontRef>
+        </p:style>
+        <p:txBody>
+          <a:bodyPr rtlCol="0" anchor="ctr"/>
+          <a:lstStyle/>
+          <a:p>
+            <a:pPr algn="ctr"/>
+          </a:p>
+        </p:txBody>
+      </p:sp>
+      <p:sp>
+        <p:nvSpPr>
+          <p:cNvPr id="3" name="TextBox 2"/>
+          <p:cNvSpPr txBox="1"/>
+          <p:nvPr/>
+        </p:nvSpPr>
+        <p:spPr>
+          <a:xfrm>
+            <a:off x="548640" y="100584"/>
+            <a:ext cx="10972800" cy="274320"/>
+          </a:xfrm>
+          <a:prstGeom prst="rect">
+            <a:avLst/>
+          </a:prstGeom>
+          <a:noFill/>
+        </p:spPr>
+        <p:txBody>
+          <a:bodyPr wrap="square" anchor="t" lIns="0" rIns="0" tIns="0" bIns="0">
+            <a:spAutoFit/>
+          </a:bodyPr>
+          <a:lstStyle/>
+          <a:p>
+            <a:pPr algn="l">
+              <a:spcAft>
+                <a:spcPts val="495"/>
+              </a:spcAft>
+            </a:pPr>
+            <a:r>
+              <a:rPr sz="1100" b="1" i="0">
+                <a:solidFill>
+                  <a:srgbClr val="FFFFFF"/>
+                </a:solidFill>
+                <a:latin typeface="Inter Tight"/>
+              </a:rPr>
+              <a:t>TEACHER PAGE  ·  skipped when you present  ·  Before you teach</a:t>
+            </a:r>
+          </a:p>
+        </p:txBody>
+      </p:sp>
+      <p:sp>
+        <p:nvSpPr>
+          <p:cNvPr id="4" name="TextBox 3"/>
+          <p:cNvSpPr txBox="1"/>
+          <p:nvPr/>
+        </p:nvSpPr>
+        <p:spPr>
+          <a:xfrm>
+            <a:off x="548640" y="685800"/>
+            <a:ext cx="10972800" cy="640080"/>
+          </a:xfrm>
+          <a:prstGeom prst="rect">
+            <a:avLst/>
+          </a:prstGeom>
+          <a:noFill/>
+        </p:spPr>
+        <p:txBody>
+          <a:bodyPr wrap="square" anchor="t" lIns="0" rIns="0" tIns="0" bIns="0">
+            <a:spAutoFit/>
+          </a:bodyPr>
+          <a:lstStyle/>
+          <a:p>
+            <a:pPr algn="l">
+              <a:spcAft>
+                <a:spcPts val="1350"/>
+              </a:spcAft>
+            </a:pPr>
+            <a:r>
+              <a:rPr sz="3000" b="1" i="0">
+                <a:solidFill>
+                  <a:srgbClr val="1C1B19"/>
+                </a:solidFill>
+                <a:latin typeface="Source Serif 4"/>
+              </a:rPr>
+              <a:t>Before you teach</a:t>
+            </a:r>
+          </a:p>
+        </p:txBody>
+      </p:sp>
+      <p:sp>
+        <p:nvSpPr>
+          <p:cNvPr id="5" name="TextBox 4"/>
+          <p:cNvSpPr txBox="1"/>
+          <p:nvPr/>
+        </p:nvSpPr>
+        <p:spPr>
+          <a:xfrm>
+            <a:off x="548640" y="1463040"/>
+            <a:ext cx="5394960" cy="4937760"/>
+          </a:xfrm>
+          <a:prstGeom prst="rect">
+            <a:avLst/>
+          </a:prstGeom>
+          <a:noFill/>
+        </p:spPr>
+        <p:txBody>
+          <a:bodyPr wrap="square" anchor="t" lIns="0" rIns="0" tIns="0" bIns="0">
+            <a:spAutoFit/>
+          </a:bodyPr>
+          <a:lstStyle/>
+          <a:p>
+            <a:pPr algn="l">
+              <a:spcAft>
+                <a:spcPts val="585"/>
+              </a:spcAft>
+            </a:pPr>
+            <a:r>
+              <a:rPr sz="1500" b="1" i="0">
+                <a:solidFill>
+                  <a:srgbClr val="1C1B19"/>
+                </a:solidFill>
+                <a:latin typeface="Source Serif 4"/>
+              </a:rPr>
+              <a:t>Respect the want.</a:t>
+            </a:r>
+          </a:p>
+          <a:p>
+            <a:pPr algn="l">
+              <a:spcAft>
+                <a:spcPts val="585"/>
+              </a:spcAft>
+            </a:pPr>
+            <a:r>
+              <a:rPr sz="1300" b="0" i="0">
+                <a:solidFill>
+                  <a:srgbClr val="1C1B19"/>
+                </a:solidFill>
+                <a:latin typeface="Source Serif 4"/>
+              </a:rPr>
+              <a:t>Confidence, strength, money, respect and not being lonely are good things to want, and that's how this content gets in. If a student gets defensive or quotes a creator, stay steady: "Wanting confidence and respect makes total sense. The question is what gets you there." Students who feel lectured stop listening.</a:t>
+            </a:r>
+          </a:p>
+          <a:p>
+            <a:pPr algn="l">
+              <a:spcAft>
+                <a:spcPts val="585"/>
+              </a:spcAft>
+            </a:pPr>
+            <a:r>
+              <a:rPr sz="1300" b="0" i="0">
+                <a:solidFill>
+                  <a:srgbClr val="1C1B19"/>
+                </a:solidFill>
+                <a:latin typeface="Source Serif 4"/>
+              </a:rPr>
+              <a:t/>
+            </a:r>
+          </a:p>
+          <a:p>
+            <a:pPr algn="l">
+              <a:spcAft>
+                <a:spcPts val="585"/>
+              </a:spcAft>
+            </a:pPr>
+            <a:r>
+              <a:rPr sz="1500" b="1" i="0">
+                <a:solidFill>
+                  <a:srgbClr val="1C1B19"/>
+                </a:solidFill>
+                <a:latin typeface="Source Serif 4"/>
+              </a:rPr>
+              <a:t>Don't play clips in class.</a:t>
+            </a:r>
+          </a:p>
+          <a:p>
+            <a:pPr algn="l">
+              <a:spcAft>
+                <a:spcPts val="585"/>
+              </a:spcAft>
+            </a:pPr>
+            <a:r>
+              <a:rPr sz="1300" b="0" i="0">
+                <a:solidFill>
+                  <a:srgbClr val="1C1B19"/>
+                </a:solidFill>
+                <a:latin typeface="Source Serif 4"/>
+              </a:rPr>
+              <a:t>Describe the content; don't show it. Keep the talk about content and situations, never named students. Some students in the circle follow these creators, and some have friends who do.</a:t>
+            </a:r>
+          </a:p>
+          <a:p>
+            <a:pPr algn="l">
+              <a:spcAft>
+                <a:spcPts val="585"/>
+              </a:spcAft>
+            </a:pPr>
+            <a:r>
+              <a:rPr sz="1300" b="0" i="0">
+                <a:solidFill>
+                  <a:srgbClr val="1C1B19"/>
+                </a:solidFill>
+                <a:latin typeface="Source Serif 4"/>
+              </a:rPr>
+              <a:t/>
+            </a:r>
+          </a:p>
+          <a:p>
+            <a:pPr algn="l">
+              <a:spcAft>
+                <a:spcPts val="585"/>
+              </a:spcAft>
+            </a:pPr>
+            <a:r>
+              <a:rPr sz="1500" b="1" i="0">
+                <a:solidFill>
+                  <a:srgbClr val="1C1B19"/>
+                </a:solidFill>
+                <a:latin typeface="Source Serif 4"/>
+              </a:rPr>
+              <a:t>Girls and students of every gender are in the room.</a:t>
+            </a:r>
+          </a:p>
+          <a:p>
+            <a:pPr algn="l">
+              <a:spcAft>
+                <a:spcPts val="585"/>
+              </a:spcAft>
+            </a:pPr>
+            <a:r>
+              <a:rPr sz="1300" b="0" i="0">
+                <a:solidFill>
+                  <a:srgbClr val="1C1B19"/>
+                </a:solidFill>
+                <a:latin typeface="Source Serif 4"/>
+              </a:rPr>
+              <a:t>This content is about many of them. Don't ask girls to explain how it feels or to debate a guy who repeats it. Say plainly that muting and blocking are always okay, and that nobody owes anyone a debate.</a:t>
+            </a:r>
+          </a:p>
+          <a:p>
+            <a:pPr algn="l">
+              <a:spcAft>
+                <a:spcPts val="585"/>
+              </a:spcAft>
+            </a:pPr>
+            <a:r>
+              <a:rPr sz="1300" b="0" i="0">
+                <a:solidFill>
+                  <a:srgbClr val="1C1B19"/>
+                </a:solidFill>
+                <a:latin typeface="Source Serif 4"/>
+              </a:rPr>
+              <a:t/>
+            </a:r>
+          </a:p>
+        </p:txBody>
+      </p:sp>
+      <p:sp>
+        <p:nvSpPr>
+          <p:cNvPr id="6" name="TextBox 5"/>
+          <p:cNvSpPr txBox="1"/>
+          <p:nvPr/>
+        </p:nvSpPr>
+        <p:spPr>
+          <a:xfrm>
+            <a:off x="6217920" y="1463040"/>
+            <a:ext cx="5394960" cy="4937760"/>
+          </a:xfrm>
+          <a:prstGeom prst="rect">
+            <a:avLst/>
+          </a:prstGeom>
+          <a:noFill/>
+        </p:spPr>
+        <p:txBody>
+          <a:bodyPr wrap="square" anchor="t" lIns="0" rIns="0" tIns="0" bIns="0">
+            <a:spAutoFit/>
+          </a:bodyPr>
+          <a:lstStyle/>
+          <a:p>
+            <a:pPr algn="l">
+              <a:spcAft>
+                <a:spcPts val="585"/>
+              </a:spcAft>
+            </a:pPr>
+            <a:r>
+              <a:rPr sz="1500" b="1" i="0">
+                <a:solidFill>
+                  <a:srgbClr val="1C1B19"/>
+                </a:solidFill>
+                <a:latin typeface="Source Serif 4"/>
+              </a:rPr>
+              <a:t>Know what goes to an adult the same day.</a:t>
+            </a:r>
+          </a:p>
+          <a:p>
+            <a:pPr algn="l">
+              <a:spcAft>
+                <a:spcPts val="585"/>
+              </a:spcAft>
+            </a:pPr>
+            <a:r>
+              <a:rPr sz="1300" b="0" i="0">
+                <a:solidFill>
+                  <a:srgbClr val="1C1B19"/>
+                </a:solidFill>
+                <a:latin typeface="Source Serif 4"/>
+              </a:rPr>
+              <a:t>Someone sharing photos of a real person, real or AI-made. Threats. Talk about a girl that turns into a plan to hurt, follow or embarrass her. Don't ask about these in the circle. Know your dean's and counselor's protocol before advisory, and follow up that day.</a:t>
+            </a:r>
+          </a:p>
+          <a:p>
+            <a:pPr algn="l">
+              <a:spcAft>
+                <a:spcPts val="585"/>
+              </a:spcAft>
+            </a:pPr>
+            <a:r>
+              <a:rPr sz="1300" b="0" i="0">
+                <a:solidFill>
+                  <a:srgbClr val="1C1B19"/>
+                </a:solidFill>
+                <a:latin typeface="Source Serif 4"/>
+              </a:rPr>
+              <a:t/>
+            </a:r>
+          </a:p>
+          <a:p>
+            <a:pPr algn="l">
+              <a:spcAft>
+                <a:spcPts val="585"/>
+              </a:spcAft>
+            </a:pPr>
+            <a:r>
+              <a:rPr sz="1500" b="1" i="0">
+                <a:solidFill>
+                  <a:srgbClr val="1C1B19"/>
+                </a:solidFill>
+                <a:latin typeface="Source Serif 4"/>
+              </a:rPr>
+              <a:t>Watch for the student who seems alone.</a:t>
+            </a:r>
+          </a:p>
+          <a:p>
+            <a:pPr algn="l">
+              <a:spcAft>
+                <a:spcPts val="585"/>
+              </a:spcAft>
+            </a:pPr>
+            <a:r>
+              <a:rPr sz="1300" b="0" i="0">
+                <a:solidFill>
+                  <a:srgbClr val="1C1B19"/>
+                </a:solidFill>
+                <a:latin typeface="Source Serif 4"/>
+              </a:rPr>
+              <a:t>A student who seems much angrier lately, or who says these videos are the only place that gets him, may need a counselor more than a debate. Check in privately afterward. Don't ask self-harm questions in the circle; any disclosure goes to a counselor, and 988 (call or text) is open any time.</a:t>
+            </a:r>
+          </a:p>
+          <a:p>
+            <a:pPr algn="l">
+              <a:spcAft>
+                <a:spcPts val="585"/>
+              </a:spcAft>
+            </a:pPr>
+            <a:r>
+              <a:rPr sz="1300" b="0" i="0">
+                <a:solidFill>
+                  <a:srgbClr val="1C1B19"/>
+                </a:solidFill>
+                <a:latin typeface="Source Serif 4"/>
+              </a:rPr>
+              <a:t/>
+            </a:r>
+          </a:p>
+          <a:p>
+            <a:pPr algn="l">
+              <a:spcAft>
+                <a:spcPts val="585"/>
+              </a:spcAft>
+            </a:pPr>
+            <a:r>
+              <a:rPr sz="1500" b="1" i="0">
+                <a:solidFill>
+                  <a:srgbClr val="1C1B19"/>
+                </a:solidFill>
+                <a:latin typeface="Source Serif 4"/>
+              </a:rPr>
+              <a:t>Stay out of party politics.</a:t>
+            </a:r>
+          </a:p>
+          <a:p>
+            <a:pPr algn="l">
+              <a:spcAft>
+                <a:spcPts val="585"/>
+              </a:spcAft>
+            </a:pPr>
+            <a:r>
+              <a:rPr sz="1300" b="0" i="0">
+                <a:solidFill>
+                  <a:srgbClr val="1C1B19"/>
+                </a:solidFill>
+                <a:latin typeface="Source Serif 4"/>
+              </a:rPr>
+              <a:t>Families hold a wide range of views about men's and women's roles, often rooted in faith or culture. Keep the conversation on how feeds work and what the research says about specific claims, and leave room for students to respect the adults who raised them.</a:t>
+            </a:r>
+          </a:p>
+          <a:p>
+            <a:pPr algn="l">
+              <a:spcAft>
+                <a:spcPts val="585"/>
+              </a:spcAft>
+            </a:pPr>
+            <a:r>
+              <a:rPr sz="1300" b="0" i="0">
+                <a:solidFill>
+                  <a:srgbClr val="1C1B19"/>
+                </a:solidFill>
+                <a:latin typeface="Source Serif 4"/>
+              </a:rPr>
+              <a:t/>
+            </a:r>
+          </a:p>
+        </p:txBody>
+      </p:sp>
+    </p:spTree>
+  </p:cSld>
+  <p:clrMapOvr>
+    <a:masterClrMapping/>
+  </p:clrMapOvr>
+</p:sld>
+</file>
+
+<file path=ppt/slides/slide12.xml><?xml version="1.0" encoding="utf-8"?>
+<p:sld xmlns:a="http://schemas.openxmlformats.org/drawingml/2006/main" xmlns:p="http://schemas.openxmlformats.org/presentationml/2006/main" xmlns:r="http://schemas.openxmlformats.org/officeDocument/2006/relationships" show="0">
+  <p:cSld>
+    <p:bg>
+      <p:bgPr>
+        <a:solidFill>
+          <a:srgbClr val="EEEBE4"/>
+        </a:solidFill>
+        <a:effectLst/>
+      </p:bgPr>
+    </p:bg>
+    <p:spTree>
+      <p:nvGrpSpPr>
+        <p:cNvPr id="1" name=""/>
+        <p:cNvGrpSpPr/>
+        <p:nvPr/>
+      </p:nvGrpSpPr>
+      <p:grpSpPr/>
+      <p:sp>
+        <p:nvSpPr>
+          <p:cNvPr id="2" name="Rectangle 1"/>
+          <p:cNvSpPr/>
+          <p:nvPr/>
+        </p:nvSpPr>
+        <p:spPr>
+          <a:xfrm>
+            <a:off x="0" y="0"/>
+            <a:ext cx="12191695" cy="384048"/>
+          </a:xfrm>
+          <a:prstGeom prst="rect">
+            <a:avLst/>
+          </a:prstGeom>
+          <a:solidFill>
+            <a:srgbClr val="0B2D5B"/>
+          </a:solidFill>
+          <a:ln>
+            <a:noFill/>
+          </a:ln>
+          <a:effectLst/>
+        </p:spPr>
+        <p:style>
+          <a:lnRef idx="1">
+            <a:schemeClr val="accent1"/>
+          </a:lnRef>
+          <a:fillRef idx="3">
+            <a:schemeClr val="accent1"/>
+          </a:fillRef>
+          <a:effectRef idx="2">
+            <a:schemeClr val="accent1"/>
+          </a:effectRef>
+          <a:fontRef idx="minor">
+            <a:schemeClr val="lt1"/>
+          </a:fontRef>
+        </p:style>
+        <p:txBody>
+          <a:bodyPr rtlCol="0" anchor="ctr"/>
+          <a:lstStyle/>
+          <a:p>
+            <a:pPr algn="ctr"/>
+          </a:p>
+        </p:txBody>
+      </p:sp>
+      <p:sp>
+        <p:nvSpPr>
+          <p:cNvPr id="3" name="TextBox 2"/>
+          <p:cNvSpPr txBox="1"/>
+          <p:nvPr/>
+        </p:nvSpPr>
+        <p:spPr>
+          <a:xfrm>
+            <a:off x="548640" y="100584"/>
+            <a:ext cx="10972800" cy="274320"/>
+          </a:xfrm>
+          <a:prstGeom prst="rect">
+            <a:avLst/>
+          </a:prstGeom>
+          <a:noFill/>
+        </p:spPr>
+        <p:txBody>
+          <a:bodyPr wrap="square" anchor="t" lIns="0" rIns="0" tIns="0" bIns="0">
+            <a:spAutoFit/>
+          </a:bodyPr>
+          <a:lstStyle/>
+          <a:p>
+            <a:pPr algn="l">
+              <a:spcAft>
+                <a:spcPts val="495"/>
+              </a:spcAft>
+            </a:pPr>
+            <a:r>
+              <a:rPr sz="1100" b="1" i="0">
+                <a:solidFill>
+                  <a:srgbClr val="FFFFFF"/>
+                </a:solidFill>
+                <a:latin typeface="Inter Tight"/>
+              </a:rPr>
+              <a:t>TEACHER PAGE  ·  skipped when you present  ·  Every student in the room</a:t>
+            </a:r>
+          </a:p>
+        </p:txBody>
+      </p:sp>
+      <p:sp>
+        <p:nvSpPr>
+          <p:cNvPr id="4" name="TextBox 3"/>
+          <p:cNvSpPr txBox="1"/>
+          <p:nvPr/>
+        </p:nvSpPr>
+        <p:spPr>
+          <a:xfrm>
+            <a:off x="548640" y="685800"/>
+            <a:ext cx="10972800" cy="640080"/>
+          </a:xfrm>
+          <a:prstGeom prst="rect">
+            <a:avLst/>
+          </a:prstGeom>
+          <a:noFill/>
+        </p:spPr>
+        <p:txBody>
+          <a:bodyPr wrap="square" anchor="t" lIns="0" rIns="0" tIns="0" bIns="0">
+            <a:spAutoFit/>
+          </a:bodyPr>
+          <a:lstStyle/>
+          <a:p>
+            <a:pPr algn="l">
+              <a:spcAft>
+                <a:spcPts val="1350"/>
+              </a:spcAft>
+            </a:pPr>
+            <a:r>
+              <a:rPr sz="3000" b="1" i="0">
+                <a:solidFill>
+                  <a:srgbClr val="1C1B19"/>
+                </a:solidFill>
+                <a:latin typeface="Source Serif 4"/>
+              </a:rPr>
+              <a:t>Every student in the room</a:t>
+            </a:r>
+          </a:p>
+        </p:txBody>
+      </p:sp>
+      <p:sp>
+        <p:nvSpPr>
+          <p:cNvPr id="5" name="TextBox 4"/>
+          <p:cNvSpPr txBox="1"/>
+          <p:nvPr/>
+        </p:nvSpPr>
+        <p:spPr>
+          <a:xfrm>
+            <a:off x="548640" y="1325880"/>
+            <a:ext cx="10972800" cy="365760"/>
+          </a:xfrm>
+          <a:prstGeom prst="rect">
+            <a:avLst/>
+          </a:prstGeom>
+          <a:noFill/>
+        </p:spPr>
+        <p:txBody>
+          <a:bodyPr wrap="square" anchor="t" lIns="0" rIns="0" tIns="0" bIns="0">
+            <a:spAutoFit/>
+          </a:bodyPr>
+          <a:lstStyle/>
+          <a:p>
+            <a:pPr algn="l">
+              <a:spcAft>
+                <a:spcPts val="630"/>
+              </a:spcAft>
+            </a:pPr>
+            <a:r>
+              <a:rPr sz="1400" b="0" i="0">
+                <a:solidFill>
+                  <a:srgbClr val="5D5A54"/>
+                </a:solidFill>
+                <a:latin typeface="Inter Tight"/>
+              </a:rPr>
+              <a:t>Culture, family, identity, ability and money: what to keep in mind for this topic.</a:t>
+            </a:r>
+          </a:p>
+        </p:txBody>
+      </p:sp>
+      <p:sp>
+        <p:nvSpPr>
+          <p:cNvPr id="6" name="TextBox 5"/>
+          <p:cNvSpPr txBox="1"/>
+          <p:nvPr/>
+        </p:nvSpPr>
+        <p:spPr>
+          <a:xfrm>
+            <a:off x="548640" y="1828800"/>
+            <a:ext cx="5394960" cy="4572000"/>
+          </a:xfrm>
+          <a:prstGeom prst="rect">
+            <a:avLst/>
+          </a:prstGeom>
+          <a:noFill/>
+        </p:spPr>
+        <p:txBody>
+          <a:bodyPr wrap="square" anchor="t" lIns="0" rIns="0" tIns="0" bIns="0">
+            <a:spAutoFit/>
+          </a:bodyPr>
+          <a:lstStyle/>
+          <a:p>
+            <a:pPr algn="l">
+              <a:spcAft>
+                <a:spcPts val="585"/>
+              </a:spcAft>
+            </a:pPr>
+            <a:r>
+              <a:rPr sz="1500" b="1" i="0">
+                <a:solidFill>
+                  <a:srgbClr val="1C1B19"/>
+                </a:solidFill>
+                <a:latin typeface="Source Serif 4"/>
+              </a:rPr>
+              <a:t>Don't make the boys the problem and the girls the audience.</a:t>
+            </a:r>
+          </a:p>
+          <a:p>
+            <a:pPr algn="l">
+              <a:spcAft>
+                <a:spcPts val="585"/>
+              </a:spcAft>
+            </a:pPr>
+            <a:r>
+              <a:rPr sz="1300" b="0" i="0">
+                <a:solidFill>
+                  <a:srgbClr val="1C1B19"/>
+                </a:solidFill>
+                <a:latin typeface="Source Serif 4"/>
+              </a:rPr>
+              <a:t>Most guys are less into this than they seem, and that's the core of the lesson. Girls, nonbinary students and boys all get pulled by feeds, and anyone can be the one who says "nah." Boys can be scared, lonely and tender; girls can be ambitious and loud. Keep examples off stereotypes in both directions.</a:t>
+            </a:r>
+          </a:p>
+          <a:p>
+            <a:pPr algn="l">
+              <a:spcAft>
+                <a:spcPts val="585"/>
+              </a:spcAft>
+            </a:pPr>
+            <a:r>
+              <a:rPr sz="1300" b="0" i="0">
+                <a:solidFill>
+                  <a:srgbClr val="1C1B19"/>
+                </a:solidFill>
+                <a:latin typeface="Source Serif 4"/>
+              </a:rPr>
+              <a:t/>
+            </a:r>
+          </a:p>
+          <a:p>
+            <a:pPr algn="l">
+              <a:spcAft>
+                <a:spcPts val="585"/>
+              </a:spcAft>
+            </a:pPr>
+            <a:r>
+              <a:rPr sz="1500" b="1" i="0">
+                <a:solidFill>
+                  <a:srgbClr val="1C1B19"/>
+                </a:solidFill>
+                <a:latin typeface="Source Serif 4"/>
+              </a:rPr>
+              <a:t>"Soft," "simp" and anti-gay jokes police every guy.</a:t>
+            </a:r>
+          </a:p>
+          <a:p>
+            <a:pPr algn="l">
+              <a:spcAft>
+                <a:spcPts val="585"/>
+              </a:spcAft>
+            </a:pPr>
+            <a:r>
+              <a:rPr sz="1300" b="0" i="0">
+                <a:solidFill>
+                  <a:srgbClr val="1C1B19"/>
+                </a:solidFill>
+                <a:latin typeface="Source Serif 4"/>
+              </a:rPr>
+              <a:t>Gay, bi, trans and questioning students hear these words as being about them, and straight guys get boxed in by them too. Name them as pressure. Partners in examples can be anyone; the Aaliyah card is one example, not the only kind of relationship. Know where to point students: a counselor and The Trevor Project (call 1-866-488-7386 or text START to 678-678).</a:t>
+            </a:r>
+          </a:p>
+          <a:p>
+            <a:pPr algn="l">
+              <a:spcAft>
+                <a:spcPts val="585"/>
+              </a:spcAft>
+            </a:pPr>
+            <a:r>
+              <a:rPr sz="1300" b="0" i="0">
+                <a:solidFill>
+                  <a:srgbClr val="1C1B19"/>
+                </a:solidFill>
+                <a:latin typeface="Source Serif 4"/>
+              </a:rPr>
+              <a:t/>
+            </a:r>
+          </a:p>
+          <a:p>
+            <a:pPr algn="l">
+              <a:spcAft>
+                <a:spcPts val="585"/>
+              </a:spcAft>
+            </a:pPr>
+            <a:r>
+              <a:rPr sz="1500" b="1" i="0">
+                <a:solidFill>
+                  <a:srgbClr val="1C1B19"/>
+                </a:solidFill>
+                <a:latin typeface="Source Serif 4"/>
+              </a:rPr>
+              <a:t>Family, culture and faith shape what "being a man" means.</a:t>
+            </a:r>
+          </a:p>
+          <a:p>
+            <a:pPr algn="l">
+              <a:spcAft>
+                <a:spcPts val="585"/>
+              </a:spcAft>
+            </a:pPr>
+            <a:r>
+              <a:rPr sz="1300" b="0" i="0">
+                <a:solidFill>
+                  <a:srgbClr val="1C1B19"/>
+                </a:solidFill>
+                <a:latin typeface="Source Serif 4"/>
+              </a:rPr>
+              <a:t>People students respect may define it differently, and traditional roles are not the same thing as contempt for women. Avoid "In X families" generalizations. The closing question is private: which parts of what you were taught do you want to keep?</a:t>
+            </a:r>
+          </a:p>
+          <a:p>
+            <a:pPr algn="l">
+              <a:spcAft>
+                <a:spcPts val="585"/>
+              </a:spcAft>
+            </a:pPr>
+            <a:r>
+              <a:rPr sz="1300" b="0" i="0">
+                <a:solidFill>
+                  <a:srgbClr val="1C1B19"/>
+                </a:solidFill>
+                <a:latin typeface="Source Serif 4"/>
+              </a:rPr>
+              <a:t/>
+            </a:r>
+          </a:p>
+        </p:txBody>
+      </p:sp>
+      <p:sp>
+        <p:nvSpPr>
+          <p:cNvPr id="7" name="TextBox 6"/>
+          <p:cNvSpPr txBox="1"/>
+          <p:nvPr/>
+        </p:nvSpPr>
+        <p:spPr>
+          <a:xfrm>
+            <a:off x="6217920" y="1828800"/>
+            <a:ext cx="5394960" cy="4572000"/>
+          </a:xfrm>
+          <a:prstGeom prst="rect">
+            <a:avLst/>
+          </a:prstGeom>
+          <a:noFill/>
+        </p:spPr>
+        <p:txBody>
+          <a:bodyPr wrap="square" anchor="t" lIns="0" rIns="0" tIns="0" bIns="0">
+            <a:spAutoFit/>
+          </a:bodyPr>
+          <a:lstStyle/>
+          <a:p>
+            <a:pPr algn="l">
+              <a:spcAft>
+                <a:spcPts val="585"/>
+              </a:spcAft>
+            </a:pPr>
+            <a:r>
+              <a:rPr sz="1500" b="1" i="0">
+                <a:solidFill>
+                  <a:srgbClr val="1C1B19"/>
+                </a:solidFill>
+                <a:latin typeface="Source Serif 4"/>
+              </a:rPr>
+              <a:t>Not every student has a man at home.</a:t>
+            </a:r>
+          </a:p>
+          <a:p>
+            <a:pPr algn="l">
+              <a:spcAft>
+                <a:spcPts val="585"/>
+              </a:spcAft>
+            </a:pPr>
+            <a:r>
+              <a:rPr sz="1300" b="0" i="0">
+                <a:solidFill>
+                  <a:srgbClr val="1C1B19"/>
+                </a:solidFill>
+                <a:latin typeface="Source Serif 4"/>
+              </a:rPr>
+              <a:t>Some are raised by a single mom, grandparents, two moms, or in foster or kinship care. When you ask what they were taught about being a man, say "from anyone in your life": a coach, an uncle, an older cousin, a friend's dad, or nobody in particular.</a:t>
+            </a:r>
+          </a:p>
+          <a:p>
+            <a:pPr algn="l">
+              <a:spcAft>
+                <a:spcPts val="585"/>
+              </a:spcAft>
+            </a:pPr>
+            <a:r>
+              <a:rPr sz="1300" b="0" i="0">
+                <a:solidFill>
+                  <a:srgbClr val="1C1B19"/>
+                </a:solidFill>
+                <a:latin typeface="Source Serif 4"/>
+              </a:rPr>
+              <a:t/>
+            </a:r>
+          </a:p>
+          <a:p>
+            <a:pPr algn="l">
+              <a:spcAft>
+                <a:spcPts val="585"/>
+              </a:spcAft>
+            </a:pPr>
+            <a:r>
+              <a:rPr sz="1500" b="1" i="0">
+                <a:solidFill>
+                  <a:srgbClr val="1C1B19"/>
+                </a:solidFill>
+                <a:latin typeface="Source Serif 4"/>
+              </a:rPr>
+              <a:t>The money pitch lands harder when money is tight.</a:t>
+            </a:r>
+          </a:p>
+          <a:p>
+            <a:pPr algn="l">
+              <a:spcAft>
+                <a:spcPts val="585"/>
+              </a:spcAft>
+            </a:pPr>
+            <a:r>
+              <a:rPr sz="1300" b="0" i="0">
+                <a:solidFill>
+                  <a:srgbClr val="1C1B19"/>
+                </a:solidFill>
+                <a:latin typeface="Source Serif 4"/>
+              </a:rPr>
+              <a:t>Get-rich and "high-value" content can feel like a way out for students whose families are struggling, and the courses cost real money every month. Keep the good part: lift, study, save, build discipline. None of that costs anything or requires the package.</a:t>
+            </a:r>
+          </a:p>
+          <a:p>
+            <a:pPr algn="l">
+              <a:spcAft>
+                <a:spcPts val="585"/>
+              </a:spcAft>
+            </a:pPr>
+            <a:r>
+              <a:rPr sz="1300" b="0" i="0">
+                <a:solidFill>
+                  <a:srgbClr val="1C1B19"/>
+                </a:solidFill>
+                <a:latin typeface="Source Serif 4"/>
+              </a:rPr>
+              <a:t/>
+            </a:r>
+          </a:p>
+          <a:p>
+            <a:pPr algn="l">
+              <a:spcAft>
+                <a:spcPts val="585"/>
+              </a:spcAft>
+            </a:pPr>
+            <a:r>
+              <a:rPr sz="1500" b="1" i="0">
+                <a:solidFill>
+                  <a:srgbClr val="1C1B19"/>
+                </a:solidFill>
+                <a:latin typeface="Source Serif 4"/>
+              </a:rPr>
+              <a:t>Rules can feel like relief.</a:t>
+            </a:r>
+          </a:p>
+          <a:p>
+            <a:pPr algn="l">
+              <a:spcAft>
+                <a:spcPts val="585"/>
+              </a:spcAft>
+            </a:pPr>
+            <a:r>
+              <a:rPr sz="1300" b="0" i="0">
+                <a:solidFill>
+                  <a:srgbClr val="1C1B19"/>
+                </a:solidFill>
+                <a:latin typeface="Source Serif 4"/>
+              </a:rPr>
+              <a:t>Some students, including some autistic students, find unwritten social rules hard to read, and content that promises clear rules about dating and status can feel like help. Treat that want as fair and point to real support. For stand up, sit down, let students vote with a hand or thumb from their seat.</a:t>
+            </a:r>
+          </a:p>
+          <a:p>
+            <a:pPr algn="l">
+              <a:spcAft>
+                <a:spcPts val="585"/>
+              </a:spcAft>
+            </a:pPr>
+            <a:r>
+              <a:rPr sz="1300" b="0" i="0">
+                <a:solidFill>
+                  <a:srgbClr val="1C1B19"/>
+                </a:solidFill>
+                <a:latin typeface="Source Serif 4"/>
+              </a:rPr>
+              <a:t/>
+            </a:r>
+          </a:p>
+        </p:txBody>
+      </p:sp>
+    </p:spTree>
+  </p:cSld>
+  <p:clrMapOvr>
+    <a:masterClrMapping/>
+  </p:clrMapOvr>
+</p:sld>
+</file>
+
+<file path=ppt/slides/slide13.xml><?xml version="1.0" encoding="utf-8"?>
+<p:sld xmlns:a="http://schemas.openxmlformats.org/drawingml/2006/main" xmlns:p="http://schemas.openxmlformats.org/presentationml/2006/main" xmlns:r="http://schemas.openxmlformats.org/officeDocument/2006/relationships" show="0">
+  <p:cSld>
+    <p:bg>
+      <p:bgPr>
+        <a:solidFill>
+          <a:srgbClr val="EEEBE4"/>
+        </a:solidFill>
+        <a:effectLst/>
+      </p:bgPr>
+    </p:bg>
+    <p:spTree>
+      <p:nvGrpSpPr>
+        <p:cNvPr id="1" name=""/>
+        <p:cNvGrpSpPr/>
+        <p:nvPr/>
+      </p:nvGrpSpPr>
+      <p:grpSpPr/>
+      <p:sp>
+        <p:nvSpPr>
+          <p:cNvPr id="2" name="Rectangle 1"/>
+          <p:cNvSpPr/>
+          <p:nvPr/>
+        </p:nvSpPr>
+        <p:spPr>
+          <a:xfrm>
+            <a:off x="0" y="0"/>
+            <a:ext cx="12191695" cy="384048"/>
+          </a:xfrm>
+          <a:prstGeom prst="rect">
+            <a:avLst/>
+          </a:prstGeom>
+          <a:solidFill>
+            <a:srgbClr val="0B2D5B"/>
+          </a:solidFill>
+          <a:ln>
+            <a:noFill/>
+          </a:ln>
+          <a:effectLst/>
+        </p:spPr>
+        <p:style>
+          <a:lnRef idx="1">
+            <a:schemeClr val="accent1"/>
+          </a:lnRef>
+          <a:fillRef idx="3">
+            <a:schemeClr val="accent1"/>
+          </a:fillRef>
+          <a:effectRef idx="2">
+            <a:schemeClr val="accent1"/>
+          </a:effectRef>
+          <a:fontRef idx="minor">
+            <a:schemeClr val="lt1"/>
+          </a:fontRef>
+        </p:style>
+        <p:txBody>
+          <a:bodyPr rtlCol="0" anchor="ctr"/>
+          <a:lstStyle/>
+          <a:p>
+            <a:pPr algn="ctr"/>
+          </a:p>
+        </p:txBody>
+      </p:sp>
+      <p:sp>
+        <p:nvSpPr>
+          <p:cNvPr id="3" name="TextBox 2"/>
+          <p:cNvSpPr txBox="1"/>
+          <p:nvPr/>
+        </p:nvSpPr>
+        <p:spPr>
+          <a:xfrm>
+            <a:off x="548640" y="100584"/>
+            <a:ext cx="10972800" cy="274320"/>
+          </a:xfrm>
+          <a:prstGeom prst="rect">
+            <a:avLst/>
+          </a:prstGeom>
+          <a:noFill/>
+        </p:spPr>
+        <p:txBody>
+          <a:bodyPr wrap="square" anchor="t" lIns="0" rIns="0" tIns="0" bIns="0">
+            <a:spAutoFit/>
+          </a:bodyPr>
+          <a:lstStyle/>
+          <a:p>
+            <a:pPr algn="l">
+              <a:spcAft>
+                <a:spcPts val="495"/>
+              </a:spcAft>
+            </a:pPr>
+            <a:r>
+              <a:rPr sz="1100" b="1" i="0">
+                <a:solidFill>
+                  <a:srgbClr val="FFFFFF"/>
+                </a:solidFill>
+                <a:latin typeface="Inter Tight"/>
+              </a:rPr>
+              <a:t>TEACHER PAGE  ·  skipped when you present  ·  Background</a:t>
+            </a:r>
+          </a:p>
+        </p:txBody>
+      </p:sp>
+      <p:sp>
+        <p:nvSpPr>
+          <p:cNvPr id="4" name="TextBox 3"/>
+          <p:cNvSpPr txBox="1"/>
+          <p:nvPr/>
+        </p:nvSpPr>
+        <p:spPr>
+          <a:xfrm>
+            <a:off x="548640" y="685800"/>
+            <a:ext cx="10972800" cy="640080"/>
+          </a:xfrm>
+          <a:prstGeom prst="rect">
+            <a:avLst/>
+          </a:prstGeom>
+          <a:noFill/>
+        </p:spPr>
+        <p:txBody>
+          <a:bodyPr wrap="square" anchor="t" lIns="0" rIns="0" tIns="0" bIns="0">
+            <a:spAutoFit/>
+          </a:bodyPr>
+          <a:lstStyle/>
+          <a:p>
+            <a:pPr algn="l">
+              <a:spcAft>
+                <a:spcPts val="1350"/>
+              </a:spcAft>
+            </a:pPr>
+            <a:r>
+              <a:rPr sz="3000" b="1" i="0">
+                <a:solidFill>
+                  <a:srgbClr val="1C1B19"/>
+                </a:solidFill>
+                <a:latin typeface="Source Serif 4"/>
+              </a:rPr>
+              <a:t>What the research says</a:t>
+            </a:r>
+          </a:p>
+        </p:txBody>
+      </p:sp>
+      <p:sp>
+        <p:nvSpPr>
+          <p:cNvPr id="5" name="TextBox 4"/>
+          <p:cNvSpPr txBox="1"/>
+          <p:nvPr/>
+        </p:nvSpPr>
+        <p:spPr>
+          <a:xfrm>
+            <a:off x="548640" y="1463040"/>
+            <a:ext cx="5394960" cy="4937760"/>
+          </a:xfrm>
+          <a:prstGeom prst="rect">
+            <a:avLst/>
+          </a:prstGeom>
+          <a:noFill/>
+        </p:spPr>
+        <p:txBody>
+          <a:bodyPr wrap="square" anchor="t" lIns="0" rIns="0" tIns="0" bIns="0">
+            <a:spAutoFit/>
+          </a:bodyPr>
+          <a:lstStyle/>
+          <a:p>
+            <a:pPr algn="l">
+              <a:spcAft>
+                <a:spcPts val="585"/>
+              </a:spcAft>
+            </a:pPr>
+            <a:r>
+              <a:rPr sz="1300" b="0" i="0">
+                <a:solidFill>
+                  <a:srgbClr val="1C1B19"/>
+                </a:solidFill>
+                <a:latin typeface="Source Serif 4"/>
+              </a:rPr>
+              <a:t>Researchers set up ten fresh phones with accounts posing as 16- and 18-year-old boys. Some searched only for gym, sports and gaming. Every account was shown misogynistic or "alpha" content within 23 minutes.</a:t>
+            </a:r>
+          </a:p>
+          <a:p>
+            <a:pPr algn="l">
+              <a:spcAft>
+                <a:spcPts val="585"/>
+              </a:spcAft>
+            </a:pPr>
+            <a:r>
+              <a:rPr sz="1050" b="0" i="0">
+                <a:solidFill>
+                  <a:srgbClr val="5D5A54"/>
+                </a:solidFill>
+                <a:latin typeface="Inter Tight"/>
+              </a:rPr>
+              <a:t>Baker, Ging and Andreasen, Dublin City University, 2024</a:t>
+            </a:r>
+          </a:p>
+          <a:p>
+            <a:pPr algn="l">
+              <a:spcAft>
+                <a:spcPts val="585"/>
+              </a:spcAft>
+            </a:pPr>
+            <a:r>
+              <a:rPr sz="1300" b="0" i="0">
+                <a:solidFill>
+                  <a:srgbClr val="1C1B19"/>
+                </a:solidFill>
+                <a:latin typeface="Source Serif 4"/>
+              </a:rPr>
+              <a:t>In that study, toxic content meant alpha-male, anti-women, reactionary or conspiracy videos. It was a small study, but it matches what other researchers have found.</a:t>
+            </a:r>
+          </a:p>
+          <a:p>
+            <a:pPr algn="l">
+              <a:spcAft>
+                <a:spcPts val="585"/>
+              </a:spcAft>
+            </a:pPr>
+            <a:r>
+              <a:rPr sz="1050" b="0" i="0">
+                <a:solidFill>
+                  <a:srgbClr val="5D5A54"/>
+                </a:solidFill>
+                <a:latin typeface="Inter Tight"/>
+              </a:rPr>
+              <a:t>Baker, Ging and Andreasen, 2024</a:t>
+            </a:r>
+          </a:p>
+          <a:p>
+            <a:pPr algn="l">
+              <a:spcAft>
+                <a:spcPts val="585"/>
+              </a:spcAft>
+            </a:pPr>
+            <a:r>
+              <a:rPr sz="1300" b="0" i="0">
+                <a:solidFill>
+                  <a:srgbClr val="1C1B19"/>
+                </a:solidFill>
+                <a:latin typeface="Source Serif 4"/>
+              </a:rPr>
+              <a:t>The biologist who helped make "alpha wolf" famous studied wild wolves for 13 summers and concluded a typical pack is a family: two parents and their young. The ranking picture came mostly from unrelated wolves in captivity, and he has since called the term misleading.</a:t>
+            </a:r>
+          </a:p>
+          <a:p>
+            <a:pPr algn="l">
+              <a:spcAft>
+                <a:spcPts val="585"/>
+              </a:spcAft>
+            </a:pPr>
+            <a:r>
+              <a:rPr sz="1050" b="0" i="0">
+                <a:solidFill>
+                  <a:srgbClr val="5D5A54"/>
+                </a:solidFill>
+                <a:latin typeface="Inter Tight"/>
+              </a:rPr>
+              <a:t>Mech, Canadian Journal of Zoology, 1999</a:t>
+            </a:r>
+          </a:p>
+        </p:txBody>
+      </p:sp>
+      <p:sp>
+        <p:nvSpPr>
+          <p:cNvPr id="6" name="TextBox 5"/>
+          <p:cNvSpPr txBox="1"/>
+          <p:nvPr/>
+        </p:nvSpPr>
+        <p:spPr>
+          <a:xfrm>
+            <a:off x="6217920" y="1463040"/>
+            <a:ext cx="5394960" cy="4937760"/>
+          </a:xfrm>
+          <a:prstGeom prst="rect">
+            <a:avLst/>
+          </a:prstGeom>
+          <a:noFill/>
+        </p:spPr>
+        <p:txBody>
+          <a:bodyPr wrap="square" anchor="t" lIns="0" rIns="0" tIns="0" bIns="0">
+            <a:spAutoFit/>
+          </a:bodyPr>
+          <a:lstStyle/>
+          <a:p>
+            <a:pPr algn="l">
+              <a:spcAft>
+                <a:spcPts val="585"/>
+              </a:spcAft>
+            </a:pPr>
+            <a:r>
+              <a:rPr sz="1300" b="0" i="0">
+                <a:solidFill>
+                  <a:srgbClr val="1C1B19"/>
+                </a:solidFill>
+                <a:latin typeface="Source Serif 4"/>
+              </a:rPr>
+              <a:t>Across 10,047 people in 37 cultures, both men and women ranked "kind and understanding" and "intelligent" above earning power and good looks, in every sample.</a:t>
+            </a:r>
+          </a:p>
+          <a:p>
+            <a:pPr algn="l">
+              <a:spcAft>
+                <a:spcPts val="585"/>
+              </a:spcAft>
+            </a:pPr>
+            <a:r>
+              <a:rPr sz="1050" b="0" i="0">
+                <a:solidFill>
+                  <a:srgbClr val="5D5A54"/>
+                </a:solidFill>
+                <a:latin typeface="Inter Tight"/>
+              </a:rPr>
+              <a:t>Buss, Behavioral and Brain Sciences, 1989</a:t>
+            </a:r>
+          </a:p>
+          <a:p>
+            <a:pPr algn="l">
+              <a:spcAft>
+                <a:spcPts val="585"/>
+              </a:spcAft>
+            </a:pPr>
+            <a:r>
+              <a:rPr sz="1300" b="0" i="0">
+                <a:solidFill>
+                  <a:srgbClr val="1C1B19"/>
+                </a:solidFill>
+                <a:latin typeface="Source Serif 4"/>
+              </a:rPr>
+              <a:t>College men overestimated how sexist the other men in the room were. After seeing the real numbers, their estimates of other men's sexism were lower three weeks later.</a:t>
+            </a:r>
+          </a:p>
+          <a:p>
+            <a:pPr algn="l">
+              <a:spcAft>
+                <a:spcPts val="585"/>
+              </a:spcAft>
+            </a:pPr>
+            <a:r>
+              <a:rPr sz="1050" b="0" i="0">
+                <a:solidFill>
+                  <a:srgbClr val="5D5A54"/>
+                </a:solidFill>
+                <a:latin typeface="Inter Tight"/>
+              </a:rPr>
+              <a:t>Kilmartin et al., Sex Roles, 2008</a:t>
+            </a:r>
+          </a:p>
+          <a:p>
+            <a:pPr algn="l">
+              <a:spcAft>
+                <a:spcPts val="585"/>
+              </a:spcAft>
+            </a:pPr>
+            <a:r>
+              <a:rPr sz="1300" b="0" i="0">
+                <a:solidFill>
+                  <a:srgbClr val="1C1B19"/>
+                </a:solidFill>
+                <a:latin typeface="Source Serif 4"/>
+              </a:rPr>
+              <a:t>In a 2021 national survey, 15% of American men said they had no close friends, up from 3% in 1990.</a:t>
+            </a:r>
+          </a:p>
+          <a:p>
+            <a:pPr algn="l">
+              <a:spcAft>
+                <a:spcPts val="585"/>
+              </a:spcAft>
+            </a:pPr>
+            <a:r>
+              <a:rPr sz="1050" b="0" i="0">
+                <a:solidFill>
+                  <a:srgbClr val="5D5A54"/>
+                </a:solidFill>
+                <a:latin typeface="Inter Tight"/>
+              </a:rPr>
+              <a:t>Cox, Survey Center on American Life, 2021</a:t>
+            </a:r>
+          </a:p>
+        </p:txBody>
+      </p:sp>
+    </p:spTree>
+  </p:cSld>
+  <p:clrMapOvr>
+    <a:masterClrMapping/>
+  </p:clrMapOvr>
+</p:sld>
+</file>
+
+<file path=ppt/slides/slide2.xml><?xml version="1.0" encoding="utf-8"?>
+<p:sld xmlns:a="http://schemas.openxmlformats.org/drawingml/2006/main" xmlns:p="http://schemas.openxmlformats.org/presentationml/2006/main" xmlns:r="http://schemas.openxmlformats.org/officeDocument/2006/relationships">
+  <p:cSld>
+    <p:bg>
+      <p:bgPr>
+        <a:solidFill>
+          <a:srgbClr val="0B2D5B"/>
+        </a:solidFill>
+        <a:effectLst/>
+      </p:bgPr>
+    </p:bg>
+    <p:spTree>
+      <p:nvGrpSpPr>
+        <p:cNvPr id="1" name=""/>
+        <p:cNvGrpSpPr/>
+        <p:nvPr/>
+      </p:nvGrpSpPr>
+      <p:grpSpPr/>
+      <p:sp>
+        <p:nvSpPr>
+          <p:cNvPr id="2" name="Rectangle 1"/>
+          <p:cNvSpPr/>
+          <p:nvPr/>
+        </p:nvSpPr>
+        <p:spPr>
+          <a:xfrm>
+            <a:off x="548640" y="502920"/>
+            <a:ext cx="457200" cy="54864"/>
+          </a:xfrm>
+          <a:prstGeom prst="rect">
+            <a:avLst/>
+          </a:prstGeom>
+          <a:solidFill>
+            <a:srgbClr val="F47B20"/>
+          </a:solidFill>
+          <a:ln>
+            <a:noFill/>
+          </a:ln>
+          <a:effectLst/>
+        </p:spPr>
+        <p:style>
+          <a:lnRef idx="1">
+            <a:schemeClr val="accent1"/>
+          </a:lnRef>
+          <a:fillRef idx="3">
+            <a:schemeClr val="accent1"/>
+          </a:fillRef>
+          <a:effectRef idx="2">
+            <a:schemeClr val="accent1"/>
+          </a:effectRef>
+          <a:fontRef idx="minor">
+            <a:schemeClr val="lt1"/>
+          </a:fontRef>
+        </p:style>
+        <p:txBody>
+          <a:bodyPr rtlCol="0" anchor="ctr"/>
+          <a:lstStyle/>
+          <a:p>
+            <a:pPr algn="ctr"/>
+          </a:p>
+        </p:txBody>
+      </p:sp>
+      <p:sp>
+        <p:nvSpPr>
+          <p:cNvPr id="3" name="TextBox 2"/>
+          <p:cNvSpPr txBox="1"/>
+          <p:nvPr/>
+        </p:nvSpPr>
+        <p:spPr>
+          <a:xfrm>
+            <a:off x="1143000" y="393192"/>
+            <a:ext cx="8229600" cy="274320"/>
+          </a:xfrm>
+          <a:prstGeom prst="rect">
+            <a:avLst/>
+          </a:prstGeom>
+          <a:noFill/>
+        </p:spPr>
+        <p:txBody>
+          <a:bodyPr wrap="square" anchor="t" lIns="0" rIns="0" tIns="0" bIns="0">
+            <a:spAutoFit/>
+          </a:bodyPr>
+          <a:lstStyle/>
+          <a:p>
+            <a:pPr algn="l">
+              <a:spcAft>
+                <a:spcPts val="540"/>
+              </a:spcAft>
+            </a:pPr>
+            <a:r>
+              <a:rPr sz="1200" b="1" i="0">
+                <a:solidFill>
+                  <a:srgbClr val="5D5A54"/>
+                </a:solidFill>
+                <a:latin typeface="Inter Tight"/>
+              </a:rPr>
+              <a:t>THE BRO CODE</a:t>
+            </a:r>
+          </a:p>
+        </p:txBody>
+      </p:sp>
+      <p:sp>
+        <p:nvSpPr>
+          <p:cNvPr id="4" name="TextBox 3"/>
+          <p:cNvSpPr txBox="1"/>
+          <p:nvPr/>
+        </p:nvSpPr>
+        <p:spPr>
+          <a:xfrm>
+            <a:off x="8229600" y="6400800"/>
+            <a:ext cx="3410712" cy="274320"/>
+          </a:xfrm>
+          <a:prstGeom prst="rect">
+            <a:avLst/>
+          </a:prstGeom>
+          <a:noFill/>
+        </p:spPr>
+        <p:txBody>
+          <a:bodyPr wrap="square" anchor="t" lIns="0" rIns="0" tIns="0" bIns="0">
+            <a:spAutoFit/>
+          </a:bodyPr>
+          <a:lstStyle/>
+          <a:p>
+            <a:pPr algn="r">
+              <a:spcAft>
+                <a:spcPts val="450"/>
+              </a:spcAft>
+            </a:pPr>
+            <a:r>
+              <a:rPr sz="1000" b="0" i="0">
+                <a:solidFill>
+                  <a:srgbClr val="5D5A54"/>
+                </a:solidFill>
+                <a:latin typeface="Inter Tight"/>
+              </a:rPr>
+              <a:t>Beaver Counseling</a:t>
+            </a:r>
+          </a:p>
+        </p:txBody>
+      </p:sp>
+      <p:sp>
+        <p:nvSpPr>
+          <p:cNvPr id="5" name="TextBox 4"/>
+          <p:cNvSpPr txBox="1"/>
+          <p:nvPr/>
+        </p:nvSpPr>
+        <p:spPr>
+          <a:xfrm>
+            <a:off x="822960" y="2011680"/>
+            <a:ext cx="10515600" cy="1463040"/>
+          </a:xfrm>
+          <a:prstGeom prst="rect">
+            <a:avLst/>
+          </a:prstGeom>
+          <a:noFill/>
+        </p:spPr>
+        <p:txBody>
+          <a:bodyPr wrap="square" anchor="b" lIns="0" rIns="0" tIns="0" bIns="0">
+            <a:spAutoFit/>
+          </a:bodyPr>
+          <a:lstStyle/>
+          <a:p>
+            <a:pPr algn="l">
+              <a:spcAft>
+                <a:spcPts val="2700"/>
+              </a:spcAft>
+            </a:pPr>
+            <a:r>
+              <a:rPr sz="6000" b="1" i="0">
+                <a:solidFill>
+                  <a:srgbClr val="FFFFFF"/>
+                </a:solidFill>
+                <a:latin typeface="Source Serif 4"/>
+              </a:rPr>
+              <a:t>The Bro Code</a:t>
+            </a:r>
+          </a:p>
+        </p:txBody>
+      </p:sp>
+      <p:sp>
+        <p:nvSpPr>
+          <p:cNvPr id="6" name="TextBox 5"/>
+          <p:cNvSpPr txBox="1"/>
+          <p:nvPr/>
+        </p:nvSpPr>
+        <p:spPr>
+          <a:xfrm>
+            <a:off x="822960" y="3611880"/>
+            <a:ext cx="10515600" cy="914400"/>
+          </a:xfrm>
+          <a:prstGeom prst="rect">
+            <a:avLst/>
+          </a:prstGeom>
+          <a:noFill/>
+        </p:spPr>
+        <p:txBody>
+          <a:bodyPr wrap="square" anchor="t" lIns="0" rIns="0" tIns="0" bIns="0">
+            <a:spAutoFit/>
+          </a:bodyPr>
+          <a:lstStyle/>
+          <a:p>
+            <a:pPr algn="l">
+              <a:spcAft>
+                <a:spcPts val="1080"/>
+              </a:spcAft>
+            </a:pPr>
+            <a:r>
+              <a:rPr sz="2400" b="0" i="1">
+                <a:solidFill>
+                  <a:srgbClr val="E8E4DA"/>
+                </a:solidFill>
+                <a:latin typeface="Source Serif 4"/>
+              </a:rPr>
+              <a:t>You didn't search for it. It still showed up.</a:t>
+            </a:r>
+          </a:p>
+        </p:txBody>
+      </p:sp>
+      <p:sp>
+        <p:nvSpPr>
+          <p:cNvPr id="7" name="TextBox 6"/>
+          <p:cNvSpPr txBox="1"/>
+          <p:nvPr/>
+        </p:nvSpPr>
+        <p:spPr>
+          <a:xfrm>
+            <a:off x="822960" y="6035040"/>
+            <a:ext cx="7315200" cy="365760"/>
+          </a:xfrm>
+          <a:prstGeom prst="rect">
+            <a:avLst/>
+          </a:prstGeom>
+          <a:noFill/>
+        </p:spPr>
+        <p:txBody>
+          <a:bodyPr wrap="square" anchor="t" lIns="0" rIns="0" tIns="0" bIns="0">
+            <a:spAutoFit/>
+          </a:bodyPr>
+          <a:lstStyle/>
+          <a:p>
+            <a:pPr algn="l">
+              <a:spcAft>
+                <a:spcPts val="585"/>
+              </a:spcAft>
+            </a:pPr>
+            <a:r>
+              <a:rPr sz="1300" b="0" i="0">
+                <a:solidFill>
+                  <a:srgbClr val="E8E4DA"/>
+                </a:solidFill>
+                <a:latin typeface="Inter Tight"/>
+              </a:rPr>
+              <a:t>Beaver Upper School · Counseling</a:t>
+            </a:r>
+          </a:p>
+        </p:txBody>
+      </p:sp>
+    </p:spTree>
+  </p:cSld>
+  <p:clrMapOvr>
+    <a:masterClrMapping/>
+  </p:clrMapOvr>
+</p:sld>
+</file>
+
+<file path=ppt/slides/slide3.xml><?xml version="1.0" encoding="utf-8"?>
 <p:sld xmlns:a="http://schemas.openxmlformats.org/drawingml/2006/main" xmlns:p="http://schemas.openxmlformats.org/presentationml/2006/main" xmlns:r="http://schemas.openxmlformats.org/officeDocument/2006/relationships">
   <p:cSld>
     <p:bg>
@@ -4749,7 +6764,7 @@
                 </a:solidFill>
                 <a:latin typeface="Inter Tight"/>
               </a:rPr>
-              <a:t>SILENCE SOUNDS LIKE AGREEMENT</a:t>
+              <a:t>WRITE A GUESS</a:t>
             </a:r>
           </a:p>
         </p:txBody>
@@ -4795,14 +6810,97 @@
       </p:sp>
       <p:sp>
         <p:nvSpPr>
-          <p:cNvPr id="5" name="TextBox 4"/>
+          <p:cNvPr id="5" name="Rectangle 4"/>
+          <p:cNvSpPr/>
+          <p:nvPr/>
+        </p:nvSpPr>
+        <p:spPr>
+          <a:xfrm>
+            <a:off x="822960" y="1371600"/>
+            <a:ext cx="73152" cy="3566160"/>
+          </a:xfrm>
+          <a:prstGeom prst="rect">
+            <a:avLst/>
+          </a:prstGeom>
+          <a:solidFill>
+            <a:srgbClr val="F47B20"/>
+          </a:solidFill>
+          <a:ln>
+            <a:noFill/>
+          </a:ln>
+          <a:effectLst/>
+        </p:spPr>
+        <p:style>
+          <a:lnRef idx="1">
+            <a:schemeClr val="accent1"/>
+          </a:lnRef>
+          <a:fillRef idx="3">
+            <a:schemeClr val="accent1"/>
+          </a:fillRef>
+          <a:effectRef idx="2">
+            <a:schemeClr val="accent1"/>
+          </a:effectRef>
+          <a:fontRef idx="minor">
+            <a:schemeClr val="lt1"/>
+          </a:fontRef>
+        </p:style>
+        <p:txBody>
+          <a:bodyPr rtlCol="0" anchor="ctr"/>
+          <a:lstStyle/>
+          <a:p>
+            <a:pPr algn="ctr"/>
+          </a:p>
+        </p:txBody>
+      </p:sp>
+      <p:sp>
+        <p:nvSpPr>
+          <p:cNvPr id="6" name="TextBox 5"/>
           <p:cNvSpPr txBox="1"/>
           <p:nvPr/>
         </p:nvSpPr>
         <p:spPr>
           <a:xfrm>
-            <a:off x="822960" y="1005840"/>
-            <a:ext cx="10515600" cy="1097280"/>
+            <a:off x="1188720" y="1371600"/>
+            <a:ext cx="10058400" cy="3566160"/>
+          </a:xfrm>
+          <a:prstGeom prst="rect">
+            <a:avLst/>
+          </a:prstGeom>
+          <a:noFill/>
+        </p:spPr>
+        <p:txBody>
+          <a:bodyPr wrap="square" anchor="ctr" lIns="0" rIns="0" tIns="0" bIns="0">
+            <a:spAutoFit/>
+          </a:bodyPr>
+          <a:lstStyle/>
+          <a:p>
+            <a:pPr algn="l">
+              <a:spcAft>
+                <a:spcPts val="1800"/>
+              </a:spcAft>
+            </a:pPr>
+            <a:r>
+              <a:rPr sz="4000" b="0" i="1">
+                <a:solidFill>
+                  <a:srgbClr val="1C1B19"/>
+                </a:solidFill>
+                <a:latin typeface="Source Serif 4"/>
+              </a:rPr>
+              <a:t>A fresh phone. A teen boy's account. Gym and gaming only.</a:t>
+            </a:r>
+          </a:p>
+        </p:txBody>
+      </p:sp>
+      <p:sp>
+        <p:nvSpPr>
+          <p:cNvPr id="7" name="TextBox 6"/>
+          <p:cNvSpPr txBox="1"/>
+          <p:nvPr/>
+        </p:nvSpPr>
+        <p:spPr>
+          <a:xfrm>
+            <a:off x="1188720" y="5120640"/>
+            <a:ext cx="10058400" cy="914400"/>
           </a:xfrm>
           <a:prstGeom prst="rect">
             <a:avLst/>
@@ -4817,393 +6915,17 @@
           <a:p>
             <a:pPr algn="l">
               <a:spcAft>
-                <a:spcPts val="1620"/>
-              </a:spcAft>
-            </a:pPr>
-            <a:r>
-              <a:rPr sz="3600" b="1" i="0">
-                <a:solidFill>
-                  <a:srgbClr val="1C1B19"/>
-                </a:solidFill>
-                <a:latin typeface="Source Serif 4"/>
-              </a:rPr>
-              <a:t>One low-key "nah" goes a long way.</a:t>
-            </a:r>
-          </a:p>
-        </p:txBody>
-      </p:sp>
-      <p:sp>
-        <p:nvSpPr>
-          <p:cNvPr id="6" name="TextBox 5"/>
-          <p:cNvSpPr txBox="1"/>
-          <p:nvPr/>
-        </p:nvSpPr>
-        <p:spPr>
-          <a:xfrm>
-            <a:off x="822960" y="2194560"/>
-            <a:ext cx="548640" cy="1005840"/>
-          </a:xfrm>
-          <a:prstGeom prst="rect">
-            <a:avLst/>
-          </a:prstGeom>
-          <a:noFill/>
-        </p:spPr>
-        <p:txBody>
-          <a:bodyPr wrap="square" anchor="t" lIns="0" rIns="0" tIns="0" bIns="0">
-            <a:spAutoFit/>
-          </a:bodyPr>
-          <a:lstStyle/>
-          <a:p>
-            <a:pPr algn="l">
-              <a:spcAft>
-                <a:spcPts val="1170"/>
-              </a:spcAft>
-            </a:pPr>
-            <a:r>
-              <a:rPr sz="2600" b="1" i="0">
-                <a:solidFill>
-                  <a:srgbClr val="F47B20"/>
-                </a:solidFill>
-                <a:latin typeface="Source Serif 4"/>
-              </a:rPr>
-              <a:t>1</a:t>
-            </a:r>
-          </a:p>
-        </p:txBody>
-      </p:sp>
-      <p:sp>
-        <p:nvSpPr>
-          <p:cNvPr id="7" name="TextBox 6"/>
-          <p:cNvSpPr txBox="1"/>
-          <p:nvPr/>
-        </p:nvSpPr>
-        <p:spPr>
-          <a:xfrm>
-            <a:off x="1463040" y="2231136"/>
-            <a:ext cx="9875520" cy="1005840"/>
-          </a:xfrm>
-          <a:prstGeom prst="rect">
-            <a:avLst/>
-          </a:prstGeom>
-          <a:noFill/>
-        </p:spPr>
-        <p:txBody>
-          <a:bodyPr wrap="square" anchor="t" lIns="0" rIns="0" tIns="0" bIns="0">
-            <a:spAutoFit/>
-          </a:bodyPr>
-          <a:lstStyle/>
-          <a:p>
-            <a:pPr algn="l">
-              <a:spcAft>
-                <a:spcPts val="945"/>
-              </a:spcAft>
-            </a:pPr>
-            <a:r>
-              <a:rPr sz="2100" b="1" i="0">
-                <a:solidFill>
-                  <a:srgbClr val="1C1B19"/>
-                </a:solidFill>
-                <a:latin typeface="Source Serif 4"/>
-              </a:rPr>
-              <a:t>The low-key "nah."</a:t>
-            </a:r>
-          </a:p>
-          <a:p>
-            <a:pPr algn="l">
-              <a:spcAft>
-                <a:spcPts val="945"/>
-              </a:spcAft>
-            </a:pPr>
-            <a:r>
-              <a:rPr sz="1600" b="0" i="0">
+                <a:spcPts val="810"/>
+              </a:spcAft>
+            </a:pPr>
+            <a:r>
+              <a:rPr sz="1800" b="0" i="0">
                 <a:solidFill>
                   <a:srgbClr val="5D5A54"/>
                 </a:solidFill>
-                <a:latin typeface="Source Serif 4"/>
-              </a:rPr>
-              <a:t>"Bro, what." "That's weird." A flat look.</a:t>
-            </a:r>
-          </a:p>
-        </p:txBody>
-      </p:sp>
-      <p:sp>
-        <p:nvSpPr>
-          <p:cNvPr id="8" name="TextBox 7"/>
-          <p:cNvSpPr txBox="1"/>
-          <p:nvPr/>
-        </p:nvSpPr>
-        <p:spPr>
-          <a:xfrm>
-            <a:off x="822960" y="3200400"/>
-            <a:ext cx="548640" cy="1005840"/>
-          </a:xfrm>
-          <a:prstGeom prst="rect">
-            <a:avLst/>
-          </a:prstGeom>
-          <a:noFill/>
-        </p:spPr>
-        <p:txBody>
-          <a:bodyPr wrap="square" anchor="t" lIns="0" rIns="0" tIns="0" bIns="0">
-            <a:spAutoFit/>
-          </a:bodyPr>
-          <a:lstStyle/>
-          <a:p>
-            <a:pPr algn="l">
-              <a:spcAft>
-                <a:spcPts val="1170"/>
-              </a:spcAft>
-            </a:pPr>
-            <a:r>
-              <a:rPr sz="2600" b="1" i="0">
-                <a:solidFill>
-                  <a:srgbClr val="F47B20"/>
-                </a:solidFill>
-                <a:latin typeface="Source Serif 4"/>
-              </a:rPr>
-              <a:t>2</a:t>
-            </a:r>
-          </a:p>
-        </p:txBody>
-      </p:sp>
-      <p:sp>
-        <p:nvSpPr>
-          <p:cNvPr id="9" name="TextBox 8"/>
-          <p:cNvSpPr txBox="1"/>
-          <p:nvPr/>
-        </p:nvSpPr>
-        <p:spPr>
-          <a:xfrm>
-            <a:off x="1463040" y="3236976"/>
-            <a:ext cx="9875520" cy="1005840"/>
-          </a:xfrm>
-          <a:prstGeom prst="rect">
-            <a:avLst/>
-          </a:prstGeom>
-          <a:noFill/>
-        </p:spPr>
-        <p:txBody>
-          <a:bodyPr wrap="square" anchor="t" lIns="0" rIns="0" tIns="0" bIns="0">
-            <a:spAutoFit/>
-          </a:bodyPr>
-          <a:lstStyle/>
-          <a:p>
-            <a:pPr algn="l">
-              <a:spcAft>
-                <a:spcPts val="945"/>
-              </a:spcAft>
-            </a:pPr>
-            <a:r>
-              <a:rPr sz="2100" b="1" i="0">
-                <a:solidFill>
-                  <a:srgbClr val="1C1B19"/>
-                </a:solidFill>
-                <a:latin typeface="Source Serif 4"/>
-              </a:rPr>
-              <a:t>Change the subject.</a:t>
-            </a:r>
-          </a:p>
-          <a:p>
-            <a:pPr algn="l">
-              <a:spcAft>
-                <a:spcPts val="945"/>
-              </a:spcAft>
-            </a:pPr>
-            <a:r>
-              <a:rPr sz="1600" b="0" i="0">
-                <a:solidFill>
-                  <a:srgbClr val="5D5A54"/>
-                </a:solidFill>
-                <a:latin typeface="Source Serif 4"/>
-              </a:rPr>
-              <a:t>It works more often than people think.</a:t>
-            </a:r>
-          </a:p>
-        </p:txBody>
-      </p:sp>
-      <p:sp>
-        <p:nvSpPr>
-          <p:cNvPr id="10" name="TextBox 9"/>
-          <p:cNvSpPr txBox="1"/>
-          <p:nvPr/>
-        </p:nvSpPr>
-        <p:spPr>
-          <a:xfrm>
-            <a:off x="822960" y="4206240"/>
-            <a:ext cx="548640" cy="1005840"/>
-          </a:xfrm>
-          <a:prstGeom prst="rect">
-            <a:avLst/>
-          </a:prstGeom>
-          <a:noFill/>
-        </p:spPr>
-        <p:txBody>
-          <a:bodyPr wrap="square" anchor="t" lIns="0" rIns="0" tIns="0" bIns="0">
-            <a:spAutoFit/>
-          </a:bodyPr>
-          <a:lstStyle/>
-          <a:p>
-            <a:pPr algn="l">
-              <a:spcAft>
-                <a:spcPts val="1170"/>
-              </a:spcAft>
-            </a:pPr>
-            <a:r>
-              <a:rPr sz="2600" b="1" i="0">
-                <a:solidFill>
-                  <a:srgbClr val="F47B20"/>
-                </a:solidFill>
-                <a:latin typeface="Source Serif 4"/>
-              </a:rPr>
-              <a:t>3</a:t>
-            </a:r>
-          </a:p>
-        </p:txBody>
-      </p:sp>
-      <p:sp>
-        <p:nvSpPr>
-          <p:cNvPr id="11" name="TextBox 10"/>
-          <p:cNvSpPr txBox="1"/>
-          <p:nvPr/>
-        </p:nvSpPr>
-        <p:spPr>
-          <a:xfrm>
-            <a:off x="1463040" y="4242816"/>
-            <a:ext cx="9875520" cy="1005840"/>
-          </a:xfrm>
-          <a:prstGeom prst="rect">
-            <a:avLst/>
-          </a:prstGeom>
-          <a:noFill/>
-        </p:spPr>
-        <p:txBody>
-          <a:bodyPr wrap="square" anchor="t" lIns="0" rIns="0" tIns="0" bIns="0">
-            <a:spAutoFit/>
-          </a:bodyPr>
-          <a:lstStyle/>
-          <a:p>
-            <a:pPr algn="l">
-              <a:spcAft>
-                <a:spcPts val="945"/>
-              </a:spcAft>
-            </a:pPr>
-            <a:r>
-              <a:rPr sz="2100" b="1" i="0">
-                <a:solidFill>
-                  <a:srgbClr val="1C1B19"/>
-                </a:solidFill>
-                <a:latin typeface="Source Serif 4"/>
-              </a:rPr>
-              <a:t>Talk one on one later.</a:t>
-            </a:r>
-          </a:p>
-          <a:p>
-            <a:pPr algn="l">
-              <a:spcAft>
-                <a:spcPts val="945"/>
-              </a:spcAft>
-            </a:pPr>
-            <a:r>
-              <a:rPr sz="1600" b="0" i="0">
-                <a:solidFill>
-                  <a:srgbClr val="5D5A54"/>
-                </a:solidFill>
-                <a:latin typeface="Source Serif 4"/>
-              </a:rPr>
-              <a:t>"That stuff you said about her was a lot."</a:t>
-            </a:r>
-          </a:p>
-        </p:txBody>
-      </p:sp>
-      <p:sp>
-        <p:nvSpPr>
-          <p:cNvPr id="12" name="TextBox 11"/>
-          <p:cNvSpPr txBox="1"/>
-          <p:nvPr/>
-        </p:nvSpPr>
-        <p:spPr>
-          <a:xfrm>
-            <a:off x="822960" y="5212080"/>
-            <a:ext cx="548640" cy="1005840"/>
-          </a:xfrm>
-          <a:prstGeom prst="rect">
-            <a:avLst/>
-          </a:prstGeom>
-          <a:noFill/>
-        </p:spPr>
-        <p:txBody>
-          <a:bodyPr wrap="square" anchor="t" lIns="0" rIns="0" tIns="0" bIns="0">
-            <a:spAutoFit/>
-          </a:bodyPr>
-          <a:lstStyle/>
-          <a:p>
-            <a:pPr algn="l">
-              <a:spcAft>
-                <a:spcPts val="1170"/>
-              </a:spcAft>
-            </a:pPr>
-            <a:r>
-              <a:rPr sz="2600" b="1" i="0">
-                <a:solidFill>
-                  <a:srgbClr val="F47B20"/>
-                </a:solidFill>
-                <a:latin typeface="Source Serif 4"/>
-              </a:rPr>
-              <a:t>4</a:t>
-            </a:r>
-          </a:p>
-        </p:txBody>
-      </p:sp>
-      <p:sp>
-        <p:nvSpPr>
-          <p:cNvPr id="13" name="TextBox 12"/>
-          <p:cNvSpPr txBox="1"/>
-          <p:nvPr/>
-        </p:nvSpPr>
-        <p:spPr>
-          <a:xfrm>
-            <a:off x="1463040" y="5248656"/>
-            <a:ext cx="9875520" cy="1005840"/>
-          </a:xfrm>
-          <a:prstGeom prst="rect">
-            <a:avLst/>
-          </a:prstGeom>
-          <a:noFill/>
-        </p:spPr>
-        <p:txBody>
-          <a:bodyPr wrap="square" anchor="t" lIns="0" rIns="0" tIns="0" bIns="0">
-            <a:spAutoFit/>
-          </a:bodyPr>
-          <a:lstStyle/>
-          <a:p>
-            <a:pPr algn="l">
-              <a:spcAft>
-                <a:spcPts val="945"/>
-              </a:spcAft>
-            </a:pPr>
-            <a:r>
-              <a:rPr sz="2100" b="1" i="0">
-                <a:solidFill>
-                  <a:srgbClr val="1C1B19"/>
-                </a:solidFill>
-                <a:latin typeface="Source Serif 4"/>
-              </a:rPr>
-              <a:t>Check on the person it was about.</a:t>
-            </a:r>
-          </a:p>
-          <a:p>
-            <a:pPr algn="l">
-              <a:spcAft>
-                <a:spcPts val="945"/>
-              </a:spcAft>
-            </a:pPr>
-            <a:r>
-              <a:rPr sz="1600" b="0" i="0">
-                <a:solidFill>
-                  <a:srgbClr val="5D5A54"/>
-                </a:solidFill>
-                <a:latin typeface="Source Serif 4"/>
-              </a:rPr>
-              <a:t>"That wasn't cool. You okay?"</a:t>
+                <a:latin typeface="Inter Tight"/>
+              </a:rPr>
+              <a:t>It only searches gym, sports and gaming. How many minutes until it's shown "alpha" or anti-women content? Write a number.</a:t>
             </a:r>
           </a:p>
         </p:txBody>
@@ -5216,7 +6938,7 @@
 </p:sld>
 </file>
 
-<file path=ppt/slides/slide11.xml><?xml version="1.0" encoding="utf-8"?>
+<file path=ppt/slides/slide4.xml><?xml version="1.0" encoding="utf-8"?>
 <p:sld xmlns:a="http://schemas.openxmlformats.org/drawingml/2006/main" xmlns:p="http://schemas.openxmlformats.org/presentationml/2006/main" xmlns:r="http://schemas.openxmlformats.org/officeDocument/2006/relationships">
   <p:cSld>
     <p:bg>
@@ -5312,7 +7034,7 @@
                 </a:solidFill>
                 <a:latin typeface="Inter Tight"/>
               </a:rPr>
-              <a:t>THREE MOMENTS</a:t>
+              <a:t>HOW A FEED DRIFTS</a:t>
             </a:r>
           </a:p>
         </p:txBody>
@@ -5390,7 +7112,7 @@
                 </a:solidFill>
                 <a:latin typeface="Source Serif 4"/>
               </a:rPr>
-              <a:t>What's your move?</a:t>
+              <a:t>It starts with things worth wanting</a:t>
             </a:r>
           </a:p>
         </p:txBody>
@@ -5403,8 +7125,8 @@
         </p:nvSpPr>
         <p:spPr>
           <a:xfrm>
-            <a:off x="822960" y="2103120"/>
-            <a:ext cx="3322320" cy="3840480"/>
+            <a:off x="822960" y="2743200"/>
+            <a:ext cx="1874519" cy="1005840"/>
           </a:xfrm>
           <a:prstGeom prst="rect">
             <a:avLst/>
@@ -5414,7 +7136,7 @@
           </a:solidFill>
           <a:ln w="15875">
             <a:solidFill>
-              <a:srgbClr val="D8D2C6"/>
+              <a:srgbClr val="0B2D5B"/>
             </a:solidFill>
           </a:ln>
           <a:effectLst/>
@@ -5449,8 +7171,8 @@
         </p:nvSpPr>
         <p:spPr>
           <a:xfrm>
-            <a:off x="1051560" y="2286000"/>
-            <a:ext cx="2865120" cy="365760"/>
+            <a:off x="822960" y="2743200"/>
+            <a:ext cx="1874519" cy="1005840"/>
           </a:xfrm>
           <a:prstGeom prst="rect">
             <a:avLst/>
@@ -5458,67 +7180,64 @@
           <a:noFill/>
         </p:spPr>
         <p:txBody>
-          <a:bodyPr wrap="square" anchor="t" lIns="0" rIns="0" tIns="0" bIns="0">
+          <a:bodyPr wrap="square" anchor="ctr" lIns="0" rIns="0" tIns="0" bIns="0">
             <a:spAutoFit/>
           </a:bodyPr>
           <a:lstStyle/>
           <a:p>
-            <a:pPr algn="l">
-              <a:spcAft>
-                <a:spcPts val="585"/>
-              </a:spcAft>
-            </a:pPr>
-            <a:r>
-              <a:rPr sz="1300" b="1" i="0">
-                <a:solidFill>
-                  <a:srgbClr val="0B2D5B"/>
-                </a:solidFill>
-                <a:latin typeface="Inter Tight"/>
-              </a:rPr>
-              <a:t>THE TEAM BUS</a:t>
-            </a:r>
-          </a:p>
-        </p:txBody>
-      </p:sp>
-      <p:sp>
-        <p:nvSpPr>
-          <p:cNvPr id="8" name="TextBox 7"/>
-          <p:cNvSpPr txBox="1"/>
+            <a:pPr algn="ctr">
+              <a:spcAft>
+                <a:spcPts val="900"/>
+              </a:spcAft>
+            </a:pPr>
+            <a:r>
+              <a:rPr sz="2000" b="1" i="0">
+                <a:solidFill>
+                  <a:srgbClr val="1C1B19"/>
+                </a:solidFill>
+                <a:latin typeface="Source Serif 4"/>
+              </a:rPr>
+              <a:t>Real wants</a:t>
+            </a:r>
+          </a:p>
+        </p:txBody>
+      </p:sp>
+      <p:cxnSp>
+        <p:nvCxnSpPr>
+          <p:cNvPr id="8" name="Connector 7"/>
+          <p:cNvCxnSpPr/>
           <p:nvPr/>
-        </p:nvSpPr>
-        <p:spPr>
-          <a:xfrm>
-            <a:off x="1051560" y="2743200"/>
-            <a:ext cx="2865120" cy="3017520"/>
-          </a:xfrm>
-          <a:prstGeom prst="rect">
-            <a:avLst/>
-          </a:prstGeom>
-          <a:noFill/>
-        </p:spPr>
-        <p:txBody>
-          <a:bodyPr wrap="square" anchor="t" lIns="0" rIns="0" tIns="0" bIns="0">
-            <a:spAutoFit/>
-          </a:bodyPr>
-          <a:lstStyle/>
-          <a:p>
-            <a:pPr algn="l">
-              <a:spcAft>
-                <a:spcPts val="810"/>
-              </a:spcAft>
-            </a:pPr>
-            <a:r>
-              <a:rPr sz="1800" b="0" i="0">
-                <a:solidFill>
-                  <a:srgbClr val="1C1B19"/>
-                </a:solidFill>
-                <a:latin typeface="Source Serif 4"/>
-              </a:rPr>
-              <a:t>Someone plays a clip saying women over 25 have "no value." Half the bus laughs.</a:t>
-            </a:r>
-          </a:p>
-        </p:txBody>
-      </p:sp>
+        </p:nvCxnSpPr>
+        <p:spPr>
+          <a:xfrm>
+            <a:off x="2752344" y="3246120"/>
+            <a:ext cx="896112" cy="0"/>
+          </a:xfrm>
+          <a:prstGeom prst="line">
+            <a:avLst/>
+          </a:prstGeom>
+          <a:ln w="31750">
+            <a:solidFill>
+              <a:srgbClr val="F47B20"/>
+            </a:solidFill>
+            <a:tailEnd type="triangle"/>
+          </a:ln>
+        </p:spPr>
+        <p:style>
+          <a:lnRef idx="2">
+            <a:schemeClr val="accent1"/>
+          </a:lnRef>
+          <a:fillRef idx="0">
+            <a:schemeClr val="accent1"/>
+          </a:fillRef>
+          <a:effectRef idx="1">
+            <a:schemeClr val="accent1"/>
+          </a:effectRef>
+          <a:fontRef idx="minor">
+            <a:schemeClr val="tx1"/>
+          </a:fontRef>
+        </p:style>
+      </p:cxnSp>
       <p:sp>
         <p:nvSpPr>
           <p:cNvPr id="9" name="Rectangle 8"/>
@@ -5527,8 +7246,8 @@
         </p:nvSpPr>
         <p:spPr>
           <a:xfrm>
-            <a:off x="4419600" y="2103120"/>
-            <a:ext cx="3322320" cy="3840480"/>
+            <a:off x="3703320" y="2743200"/>
+            <a:ext cx="1874519" cy="1005840"/>
           </a:xfrm>
           <a:prstGeom prst="rect">
             <a:avLst/>
@@ -5538,7 +7257,7 @@
           </a:solidFill>
           <a:ln w="15875">
             <a:solidFill>
-              <a:srgbClr val="D8D2C6"/>
+              <a:srgbClr val="0B2D5B"/>
             </a:solidFill>
           </a:ln>
           <a:effectLst/>
@@ -5573,8 +7292,8 @@
         </p:nvSpPr>
         <p:spPr>
           <a:xfrm>
-            <a:off x="4648200" y="2286000"/>
-            <a:ext cx="2865120" cy="365760"/>
+            <a:off x="3703320" y="2743200"/>
+            <a:ext cx="1874519" cy="1005840"/>
           </a:xfrm>
           <a:prstGeom prst="rect">
             <a:avLst/>
@@ -5582,67 +7301,64 @@
           <a:noFill/>
         </p:spPr>
         <p:txBody>
-          <a:bodyPr wrap="square" anchor="t" lIns="0" rIns="0" tIns="0" bIns="0">
+          <a:bodyPr wrap="square" anchor="ctr" lIns="0" rIns="0" tIns="0" bIns="0">
             <a:spAutoFit/>
           </a:bodyPr>
           <a:lstStyle/>
           <a:p>
-            <a:pPr algn="l">
-              <a:spcAft>
-                <a:spcPts val="585"/>
-              </a:spcAft>
-            </a:pPr>
-            <a:r>
-              <a:rPr sz="1300" b="1" i="0">
-                <a:solidFill>
-                  <a:srgbClr val="0B2D5B"/>
-                </a:solidFill>
-                <a:latin typeface="Inter Tight"/>
-              </a:rPr>
-              <a:t>MARCO</a:t>
-            </a:r>
-          </a:p>
-        </p:txBody>
-      </p:sp>
-      <p:sp>
-        <p:nvSpPr>
-          <p:cNvPr id="11" name="TextBox 10"/>
-          <p:cNvSpPr txBox="1"/>
+            <a:pPr algn="ctr">
+              <a:spcAft>
+                <a:spcPts val="900"/>
+              </a:spcAft>
+            </a:pPr>
+            <a:r>
+              <a:rPr sz="2000" b="1" i="0">
+                <a:solidFill>
+                  <a:srgbClr val="1C1B19"/>
+                </a:solidFill>
+                <a:latin typeface="Source Serif 4"/>
+              </a:rPr>
+              <a:t>A package</a:t>
+            </a:r>
+          </a:p>
+        </p:txBody>
+      </p:sp>
+      <p:cxnSp>
+        <p:nvCxnSpPr>
+          <p:cNvPr id="11" name="Connector 10"/>
+          <p:cNvCxnSpPr/>
           <p:nvPr/>
-        </p:nvSpPr>
-        <p:spPr>
-          <a:xfrm>
-            <a:off x="4648200" y="2743200"/>
-            <a:ext cx="2865120" cy="3017520"/>
-          </a:xfrm>
-          <a:prstGeom prst="rect">
-            <a:avLst/>
-          </a:prstGeom>
-          <a:noFill/>
-        </p:spPr>
-        <p:txBody>
-          <a:bodyPr wrap="square" anchor="t" lIns="0" rIns="0" tIns="0" bIns="0">
-            <a:spAutoFit/>
-          </a:bodyPr>
-          <a:lstStyle/>
-          <a:p>
-            <a:pPr algn="l">
-              <a:spcAft>
-                <a:spcPts val="810"/>
-              </a:spcAft>
-            </a:pPr>
-            <a:r>
-              <a:rPr sz="1800" b="0" i="0">
-                <a:solidFill>
-                  <a:srgbClr val="1C1B19"/>
-                </a:solidFill>
-                <a:latin typeface="Source Serif 4"/>
-              </a:rPr>
-              <a:t>Since his breakup a month ago, he's been posting clips about how women "are all the same."</a:t>
-            </a:r>
-          </a:p>
-        </p:txBody>
-      </p:sp>
+        </p:nvCxnSpPr>
+        <p:spPr>
+          <a:xfrm>
+            <a:off x="5632704" y="3246120"/>
+            <a:ext cx="896112" cy="0"/>
+          </a:xfrm>
+          <a:prstGeom prst="line">
+            <a:avLst/>
+          </a:prstGeom>
+          <a:ln w="31750">
+            <a:solidFill>
+              <a:srgbClr val="F47B20"/>
+            </a:solidFill>
+            <a:tailEnd type="triangle"/>
+          </a:ln>
+        </p:spPr>
+        <p:style>
+          <a:lnRef idx="2">
+            <a:schemeClr val="accent1"/>
+          </a:lnRef>
+          <a:fillRef idx="0">
+            <a:schemeClr val="accent1"/>
+          </a:fillRef>
+          <a:effectRef idx="1">
+            <a:schemeClr val="accent1"/>
+          </a:effectRef>
+          <a:fontRef idx="minor">
+            <a:schemeClr val="tx1"/>
+          </a:fontRef>
+        </p:style>
+      </p:cxnSp>
       <p:sp>
         <p:nvSpPr>
           <p:cNvPr id="12" name="Rectangle 11"/>
@@ -5651,8 +7367,8 @@
         </p:nvSpPr>
         <p:spPr>
           <a:xfrm>
-            <a:off x="8016239" y="2103120"/>
-            <a:ext cx="3322320" cy="3840480"/>
+            <a:off x="6583680" y="2743200"/>
+            <a:ext cx="1874519" cy="1005840"/>
           </a:xfrm>
           <a:prstGeom prst="rect">
             <a:avLst/>
@@ -5662,7 +7378,7 @@
           </a:solidFill>
           <a:ln w="15875">
             <a:solidFill>
-              <a:srgbClr val="D8D2C6"/>
+              <a:srgbClr val="0B2D5B"/>
             </a:solidFill>
           </a:ln>
           <a:effectLst/>
@@ -5697,8 +7413,168 @@
         </p:nvSpPr>
         <p:spPr>
           <a:xfrm>
-            <a:off x="8244839" y="2286000"/>
-            <a:ext cx="2865120" cy="365760"/>
+            <a:off x="6583680" y="2743200"/>
+            <a:ext cx="1874519" cy="1005840"/>
+          </a:xfrm>
+          <a:prstGeom prst="rect">
+            <a:avLst/>
+          </a:prstGeom>
+          <a:noFill/>
+        </p:spPr>
+        <p:txBody>
+          <a:bodyPr wrap="square" anchor="ctr" lIns="0" rIns="0" tIns="0" bIns="0">
+            <a:spAutoFit/>
+          </a:bodyPr>
+          <a:lstStyle/>
+          <a:p>
+            <a:pPr algn="ctr">
+              <a:spcAft>
+                <a:spcPts val="900"/>
+              </a:spcAft>
+            </a:pPr>
+            <a:r>
+              <a:rPr sz="2000" b="1" i="0">
+                <a:solidFill>
+                  <a:srgbClr val="1C1B19"/>
+                </a:solidFill>
+                <a:latin typeface="Source Serif 4"/>
+              </a:rPr>
+              <a:t>A product</a:t>
+            </a:r>
+          </a:p>
+        </p:txBody>
+      </p:sp>
+      <p:cxnSp>
+        <p:nvCxnSpPr>
+          <p:cNvPr id="14" name="Connector 13"/>
+          <p:cNvCxnSpPr/>
+          <p:nvPr/>
+        </p:nvCxnSpPr>
+        <p:spPr>
+          <a:xfrm>
+            <a:off x="8513064" y="3246120"/>
+            <a:ext cx="896112" cy="0"/>
+          </a:xfrm>
+          <a:prstGeom prst="line">
+            <a:avLst/>
+          </a:prstGeom>
+          <a:ln w="31750">
+            <a:solidFill>
+              <a:srgbClr val="F47B20"/>
+            </a:solidFill>
+            <a:tailEnd type="triangle"/>
+          </a:ln>
+        </p:spPr>
+        <p:style>
+          <a:lnRef idx="2">
+            <a:schemeClr val="accent1"/>
+          </a:lnRef>
+          <a:fillRef idx="0">
+            <a:schemeClr val="accent1"/>
+          </a:fillRef>
+          <a:effectRef idx="1">
+            <a:schemeClr val="accent1"/>
+          </a:effectRef>
+          <a:fontRef idx="minor">
+            <a:schemeClr val="tx1"/>
+          </a:fontRef>
+        </p:style>
+      </p:cxnSp>
+      <p:sp>
+        <p:nvSpPr>
+          <p:cNvPr id="15" name="Rectangle 14"/>
+          <p:cNvSpPr/>
+          <p:nvPr/>
+        </p:nvSpPr>
+        <p:spPr>
+          <a:xfrm>
+            <a:off x="9464040" y="2743200"/>
+            <a:ext cx="1874519" cy="1005840"/>
+          </a:xfrm>
+          <a:prstGeom prst="rect">
+            <a:avLst/>
+          </a:prstGeom>
+          <a:solidFill>
+            <a:srgbClr val="FFFFFF"/>
+          </a:solidFill>
+          <a:ln w="15875">
+            <a:solidFill>
+              <a:srgbClr val="0B2D5B"/>
+            </a:solidFill>
+          </a:ln>
+          <a:effectLst/>
+        </p:spPr>
+        <p:style>
+          <a:lnRef idx="1">
+            <a:schemeClr val="accent1"/>
+          </a:lnRef>
+          <a:fillRef idx="3">
+            <a:schemeClr val="accent1"/>
+          </a:fillRef>
+          <a:effectRef idx="2">
+            <a:schemeClr val="accent1"/>
+          </a:effectRef>
+          <a:fontRef idx="minor">
+            <a:schemeClr val="lt1"/>
+          </a:fontRef>
+        </p:style>
+        <p:txBody>
+          <a:bodyPr rtlCol="0" anchor="ctr"/>
+          <a:lstStyle/>
+          <a:p>
+            <a:pPr algn="ctr"/>
+          </a:p>
+        </p:txBody>
+      </p:sp>
+      <p:sp>
+        <p:nvSpPr>
+          <p:cNvPr id="16" name="TextBox 15"/>
+          <p:cNvSpPr txBox="1"/>
+          <p:nvPr/>
+        </p:nvSpPr>
+        <p:spPr>
+          <a:xfrm>
+            <a:off x="9464040" y="2743200"/>
+            <a:ext cx="1874519" cy="1005840"/>
+          </a:xfrm>
+          <a:prstGeom prst="rect">
+            <a:avLst/>
+          </a:prstGeom>
+          <a:noFill/>
+        </p:spPr>
+        <p:txBody>
+          <a:bodyPr wrap="square" anchor="ctr" lIns="0" rIns="0" tIns="0" bIns="0">
+            <a:spAutoFit/>
+          </a:bodyPr>
+          <a:lstStyle/>
+          <a:p>
+            <a:pPr algn="ctr">
+              <a:spcAft>
+                <a:spcPts val="900"/>
+              </a:spcAft>
+            </a:pPr>
+            <a:r>
+              <a:rPr sz="2000" b="1" i="0">
+                <a:solidFill>
+                  <a:srgbClr val="1C1B19"/>
+                </a:solidFill>
+                <a:latin typeface="Source Serif 4"/>
+              </a:rPr>
+              <a:t>Leaving costs you</a:t>
+            </a:r>
+          </a:p>
+        </p:txBody>
+      </p:sp>
+      <p:sp>
+        <p:nvSpPr>
+          <p:cNvPr id="17" name="TextBox 16"/>
+          <p:cNvSpPr txBox="1"/>
+          <p:nvPr/>
+        </p:nvSpPr>
+        <p:spPr>
+          <a:xfrm>
+            <a:off x="822960" y="4160520"/>
+            <a:ext cx="10515600" cy="457200"/>
           </a:xfrm>
           <a:prstGeom prst="rect">
             <a:avLst/>
@@ -5711,33 +7587,33 @@
           </a:bodyPr>
           <a:lstStyle/>
           <a:p>
-            <a:pPr algn="l">
-              <a:spcAft>
-                <a:spcPts val="585"/>
-              </a:spcAft>
-            </a:pPr>
-            <a:r>
-              <a:rPr sz="1300" b="1" i="0">
-                <a:solidFill>
-                  <a:srgbClr val="0B2D5B"/>
+            <a:pPr algn="ctr">
+              <a:spcAft>
+                <a:spcPts val="810"/>
+              </a:spcAft>
+            </a:pPr>
+            <a:r>
+              <a:rPr sz="1800" b="1" i="0">
+                <a:solidFill>
+                  <a:srgbClr val="F47B20"/>
                 </a:solidFill>
                 <a:latin typeface="Inter Tight"/>
               </a:rPr>
-              <a:t>AALIYAH</a:t>
-            </a:r>
-          </a:p>
-        </p:txBody>
-      </p:sp>
-      <p:sp>
-        <p:nvSpPr>
-          <p:cNvPr id="14" name="TextBox 13"/>
+              <a:t>and it keeps you watching</a:t>
+            </a:r>
+          </a:p>
+        </p:txBody>
+      </p:sp>
+      <p:sp>
+        <p:nvSpPr>
+          <p:cNvPr id="18" name="TextBox 17"/>
           <p:cNvSpPr txBox="1"/>
           <p:nvPr/>
         </p:nvSpPr>
         <p:spPr>
           <a:xfrm>
-            <a:off x="8244839" y="2743200"/>
-            <a:ext cx="2865120" cy="3017520"/>
+            <a:off x="822960" y="4846320"/>
+            <a:ext cx="10515600" cy="1188720"/>
           </a:xfrm>
           <a:prstGeom prst="rect">
             <a:avLst/>
@@ -5750,19 +7626,19 @@
           </a:bodyPr>
           <a:lstStyle/>
           <a:p>
-            <a:pPr algn="l">
-              <a:spcAft>
-                <a:spcPts val="810"/>
-              </a:spcAft>
-            </a:pPr>
-            <a:r>
-              <a:rPr sz="1800" b="0" i="0">
-                <a:solidFill>
-                  <a:srgbClr val="1C1B19"/>
+            <a:pPr algn="ctr">
+              <a:spcAft>
+                <a:spcPts val="900"/>
+              </a:spcAft>
+            </a:pPr>
+            <a:r>
+              <a:rPr sz="2000" b="0" i="1">
+                <a:solidFill>
+                  <a:srgbClr val="5D5A54"/>
                 </a:solidFill>
                 <a:latin typeface="Source Serif 4"/>
               </a:rPr>
-              <a:t>A guy she's been talking to keeps sending her "high-value man" videos and wants her to agree.</a:t>
+              <a:t>Confidence and respect are good to want. The package and the monthly fee are the catch.</a:t>
             </a:r>
           </a:p>
         </p:txBody>
@@ -5775,7 +7651,7 @@
 </p:sld>
 </file>
 
-<file path=ppt/slides/slide12.xml><?xml version="1.0" encoding="utf-8"?>
+<file path=ppt/slides/slide5.xml><?xml version="1.0" encoding="utf-8"?>
 <p:sld xmlns:a="http://schemas.openxmlformats.org/drawingml/2006/main" xmlns:p="http://schemas.openxmlformats.org/presentationml/2006/main" xmlns:r="http://schemas.openxmlformats.org/officeDocument/2006/relationships">
   <p:cSld>
     <p:bg>
@@ -5871,7 +7747,7 @@
                 </a:solidFill>
                 <a:latin typeface="Inter Tight"/>
               </a:rPr>
-              <a:t>BEFORE YOU GO</a:t>
+              <a:t>STAND UP, SIT DOWN</a:t>
             </a:r>
           </a:p>
         </p:txBody>
@@ -5923,8 +7799,8 @@
         </p:nvSpPr>
         <p:spPr>
           <a:xfrm>
-            <a:off x="822960" y="1188720"/>
-            <a:ext cx="10515600" cy="914400"/>
+            <a:off x="822960" y="1005840"/>
+            <a:ext cx="10515600" cy="1097280"/>
           </a:xfrm>
           <a:prstGeom prst="rect">
             <a:avLst/>
@@ -5949,7 +7825,7 @@
                 </a:solidFill>
                 <a:latin typeface="Source Serif 4"/>
               </a:rPr>
-              <a:t>What do you want to keep?</a:t>
+              <a:t>Stand up if you think it's true.</a:t>
             </a:r>
           </a:p>
         </p:txBody>
@@ -5962,8 +7838,8 @@
         </p:nvSpPr>
         <p:spPr>
           <a:xfrm>
-            <a:off x="822960" y="2286000"/>
-            <a:ext cx="10515600" cy="1463040"/>
+            <a:off x="822960" y="2194560"/>
+            <a:ext cx="548640" cy="1051560"/>
           </a:xfrm>
           <a:prstGeom prst="rect">
             <a:avLst/>
@@ -5978,64 +7854,57 @@
           <a:p>
             <a:pPr algn="l">
               <a:spcAft>
-                <a:spcPts val="1080"/>
-              </a:spcAft>
-            </a:pPr>
-            <a:r>
-              <a:rPr sz="2400" b="0" i="0">
+                <a:spcPts val="1170"/>
+              </a:spcAft>
+            </a:pPr>
+            <a:r>
+              <a:rPr sz="2600" b="1" i="0">
+                <a:solidFill>
+                  <a:srgbClr val="F47B20"/>
+                </a:solidFill>
+                <a:latin typeface="Source Serif 4"/>
+              </a:rPr>
+              <a:t>1</a:t>
+            </a:r>
+          </a:p>
+        </p:txBody>
+      </p:sp>
+      <p:sp>
+        <p:nvSpPr>
+          <p:cNvPr id="7" name="TextBox 6"/>
+          <p:cNvSpPr txBox="1"/>
+          <p:nvPr/>
+        </p:nvSpPr>
+        <p:spPr>
+          <a:xfrm>
+            <a:off x="1463040" y="2231136"/>
+            <a:ext cx="9875520" cy="1051560"/>
+          </a:xfrm>
+          <a:prstGeom prst="rect">
+            <a:avLst/>
+          </a:prstGeom>
+          <a:noFill/>
+        </p:spPr>
+        <p:txBody>
+          <a:bodyPr wrap="square" anchor="t" lIns="0" rIns="0" tIns="0" bIns="0">
+            <a:spAutoFit/>
+          </a:bodyPr>
+          <a:lstStyle/>
+          <a:p>
+            <a:pPr algn="l">
+              <a:spcAft>
+                <a:spcPts val="945"/>
+              </a:spcAft>
+            </a:pPr>
+            <a:r>
+              <a:rPr sz="2100" b="1" i="0">
                 <a:solidFill>
                   <a:srgbClr val="1C1B19"/>
                 </a:solidFill>
                 <a:latin typeface="Source Serif 4"/>
               </a:rPr>
-              <a:t>Privately: what did people in your life teach you about being a man? Which parts do you want to keep?</a:t>
-            </a:r>
-          </a:p>
-        </p:txBody>
-      </p:sp>
-      <p:sp>
-        <p:nvSpPr>
-          <p:cNvPr id="7" name="Rectangle 6"/>
-          <p:cNvSpPr/>
-          <p:nvPr/>
-        </p:nvSpPr>
-        <p:spPr>
-          <a:xfrm>
-            <a:off x="822960" y="4023360"/>
-            <a:ext cx="10515600" cy="1371600"/>
-          </a:xfrm>
-          <a:prstGeom prst="rect">
-            <a:avLst/>
-          </a:prstGeom>
-          <a:solidFill>
-            <a:srgbClr val="FFFFFF"/>
-          </a:solidFill>
-          <a:ln w="15875">
-            <a:solidFill>
-              <a:srgbClr val="1C1B19"/>
-            </a:solidFill>
-          </a:ln>
-          <a:effectLst/>
-        </p:spPr>
-        <p:style>
-          <a:lnRef idx="1">
-            <a:schemeClr val="accent1"/>
-          </a:lnRef>
-          <a:fillRef idx="3">
-            <a:schemeClr val="accent1"/>
-          </a:fillRef>
-          <a:effectRef idx="2">
-            <a:schemeClr val="accent1"/>
-          </a:effectRef>
-          <a:fontRef idx="minor">
-            <a:schemeClr val="lt1"/>
-          </a:fontRef>
-        </p:style>
-        <p:txBody>
-          <a:bodyPr rtlCol="0" anchor="ctr"/>
-          <a:lstStyle/>
-          <a:p>
-            <a:pPr algn="ctr"/>
+              <a:t>"Alpha wolves prove there's a natural ranking of guys."</a:t>
+            </a:r>
           </a:p>
         </p:txBody>
       </p:sp>
@@ -6047,8 +7916,8 @@
         </p:nvSpPr>
         <p:spPr>
           <a:xfrm>
-            <a:off x="1097280" y="4206240"/>
-            <a:ext cx="10058400" cy="365760"/>
+            <a:off x="822960" y="3246120"/>
+            <a:ext cx="548640" cy="1051560"/>
           </a:xfrm>
           <a:prstGeom prst="rect">
             <a:avLst/>
@@ -6063,17 +7932,17 @@
           <a:p>
             <a:pPr algn="l">
               <a:spcAft>
-                <a:spcPts val="540"/>
-              </a:spcAft>
-            </a:pPr>
-            <a:r>
-              <a:rPr sz="1200" b="1" i="0">
-                <a:solidFill>
-                  <a:srgbClr val="0B2D5B"/>
-                </a:solidFill>
-                <a:latin typeface="Inter Tight"/>
-              </a:rPr>
-              <a:t>STUDENT PAGE</a:t>
+                <a:spcPts val="1170"/>
+              </a:spcAft>
+            </a:pPr>
+            <a:r>
+              <a:rPr sz="2600" b="1" i="0">
+                <a:solidFill>
+                  <a:srgbClr val="F47B20"/>
+                </a:solidFill>
+                <a:latin typeface="Source Serif 4"/>
+              </a:rPr>
+              <a:t>2</a:t>
             </a:r>
           </a:p>
         </p:txBody>
@@ -6086,8 +7955,8 @@
         </p:nvSpPr>
         <p:spPr>
           <a:xfrm>
-            <a:off x="1097280" y="4617720"/>
-            <a:ext cx="10058400" cy="640080"/>
+            <a:off x="1463040" y="3282696"/>
+            <a:ext cx="9875520" cy="1051560"/>
           </a:xfrm>
           <a:prstGeom prst="rect">
             <a:avLst/>
@@ -6102,101 +7971,31 @@
           <a:p>
             <a:pPr algn="l">
               <a:spcAft>
-                <a:spcPts val="900"/>
-              </a:spcAft>
-            </a:pPr>
-            <a:r>
-              <a:rPr sz="2000" b="0" i="0">
+                <a:spcPts val="945"/>
+              </a:spcAft>
+            </a:pPr>
+            <a:r>
+              <a:rPr sz="2100" b="1" i="0">
                 <a:solidFill>
                   <a:srgbClr val="1C1B19"/>
                 </a:solidFill>
-                <a:latin typeface="Inter Tight"/>
-              </a:rPr>
-              <a:t>https://rmwtoolkit.github.io/bcds-toolkit/the-bro-code-high-school.html</a:t>
-            </a:r>
-          </a:p>
-        </p:txBody>
-      </p:sp>
-    </p:spTree>
-  </p:cSld>
-  <p:clrMapOvr>
-    <a:masterClrMapping/>
-  </p:clrMapOvr>
-</p:sld>
-</file>
-
-<file path=ppt/slides/slide2.xml><?xml version="1.0" encoding="utf-8"?>
-<p:sld xmlns:a="http://schemas.openxmlformats.org/drawingml/2006/main" xmlns:p="http://schemas.openxmlformats.org/presentationml/2006/main" xmlns:r="http://schemas.openxmlformats.org/officeDocument/2006/relationships" show="0">
-  <p:cSld>
-    <p:bg>
-      <p:bgPr>
-        <a:solidFill>
-          <a:srgbClr val="EEEBE4"/>
-        </a:solidFill>
-        <a:effectLst/>
-      </p:bgPr>
-    </p:bg>
-    <p:spTree>
-      <p:nvGrpSpPr>
-        <p:cNvPr id="1" name=""/>
-        <p:cNvGrpSpPr/>
-        <p:nvPr/>
-      </p:nvGrpSpPr>
-      <p:grpSpPr/>
-      <p:sp>
-        <p:nvSpPr>
-          <p:cNvPr id="2" name="Rectangle 1"/>
-          <p:cNvSpPr/>
-          <p:nvPr/>
-        </p:nvSpPr>
-        <p:spPr>
-          <a:xfrm>
-            <a:off x="0" y="0"/>
-            <a:ext cx="12191695" cy="384048"/>
-          </a:xfrm>
-          <a:prstGeom prst="rect">
-            <a:avLst/>
-          </a:prstGeom>
-          <a:solidFill>
-            <a:srgbClr val="0B2D5B"/>
-          </a:solidFill>
-          <a:ln>
-            <a:noFill/>
-          </a:ln>
-          <a:effectLst/>
-        </p:spPr>
-        <p:style>
-          <a:lnRef idx="1">
-            <a:schemeClr val="accent1"/>
-          </a:lnRef>
-          <a:fillRef idx="3">
-            <a:schemeClr val="accent1"/>
-          </a:fillRef>
-          <a:effectRef idx="2">
-            <a:schemeClr val="accent1"/>
-          </a:effectRef>
-          <a:fontRef idx="minor">
-            <a:schemeClr val="lt1"/>
-          </a:fontRef>
-        </p:style>
-        <p:txBody>
-          <a:bodyPr rtlCol="0" anchor="ctr"/>
-          <a:lstStyle/>
-          <a:p>
-            <a:pPr algn="ctr"/>
-          </a:p>
-        </p:txBody>
-      </p:sp>
-      <p:sp>
-        <p:nvSpPr>
-          <p:cNvPr id="3" name="TextBox 2"/>
+                <a:latin typeface="Source Serif 4"/>
+              </a:rPr>
+              <a:t>"Being nice makes a guy less attractive."</a:t>
+            </a:r>
+          </a:p>
+        </p:txBody>
+      </p:sp>
+      <p:sp>
+        <p:nvSpPr>
+          <p:cNvPr id="10" name="TextBox 9"/>
           <p:cNvSpPr txBox="1"/>
           <p:nvPr/>
         </p:nvSpPr>
         <p:spPr>
           <a:xfrm>
-            <a:off x="548640" y="100584"/>
-            <a:ext cx="10972800" cy="274320"/>
+            <a:off x="822960" y="4297679"/>
+            <a:ext cx="548640" cy="1051560"/>
           </a:xfrm>
           <a:prstGeom prst="rect">
             <a:avLst/>
@@ -6211,31 +8010,31 @@
           <a:p>
             <a:pPr algn="l">
               <a:spcAft>
-                <a:spcPts val="495"/>
-              </a:spcAft>
-            </a:pPr>
-            <a:r>
-              <a:rPr sz="1100" b="1" i="0">
-                <a:solidFill>
-                  <a:srgbClr val="FFFFFF"/>
-                </a:solidFill>
-                <a:latin typeface="Inter Tight"/>
-              </a:rPr>
-              <a:t>TEACHER PAGE  ·  skipped when you present  ·  Before you teach</a:t>
-            </a:r>
-          </a:p>
-        </p:txBody>
-      </p:sp>
-      <p:sp>
-        <p:nvSpPr>
-          <p:cNvPr id="4" name="TextBox 3"/>
+                <a:spcPts val="1170"/>
+              </a:spcAft>
+            </a:pPr>
+            <a:r>
+              <a:rPr sz="2600" b="1" i="0">
+                <a:solidFill>
+                  <a:srgbClr val="F47B20"/>
+                </a:solidFill>
+                <a:latin typeface="Source Serif 4"/>
+              </a:rPr>
+              <a:t>3</a:t>
+            </a:r>
+          </a:p>
+        </p:txBody>
+      </p:sp>
+      <p:sp>
+        <p:nvSpPr>
+          <p:cNvPr id="11" name="TextBox 10"/>
           <p:cNvSpPr txBox="1"/>
           <p:nvPr/>
         </p:nvSpPr>
         <p:spPr>
           <a:xfrm>
-            <a:off x="548640" y="685800"/>
-            <a:ext cx="10972800" cy="640080"/>
+            <a:off x="1463040" y="4334255"/>
+            <a:ext cx="9875520" cy="1051560"/>
           </a:xfrm>
           <a:prstGeom prst="rect">
             <a:avLst/>
@@ -6250,1523 +8049,17 @@
           <a:p>
             <a:pPr algn="l">
               <a:spcAft>
-                <a:spcPts val="1350"/>
-              </a:spcAft>
-            </a:pPr>
-            <a:r>
-              <a:rPr sz="3000" b="1" i="0">
+                <a:spcPts val="945"/>
+              </a:spcAft>
+            </a:pPr>
+            <a:r>
+              <a:rPr sz="2100" b="1" i="0">
                 <a:solidFill>
                   <a:srgbClr val="1C1B19"/>
                 </a:solidFill>
                 <a:latin typeface="Source Serif 4"/>
               </a:rPr>
-              <a:t>Before you teach</a:t>
-            </a:r>
-          </a:p>
-        </p:txBody>
-      </p:sp>
-      <p:sp>
-        <p:nvSpPr>
-          <p:cNvPr id="5" name="TextBox 4"/>
-          <p:cNvSpPr txBox="1"/>
-          <p:nvPr/>
-        </p:nvSpPr>
-        <p:spPr>
-          <a:xfrm>
-            <a:off x="548640" y="1463040"/>
-            <a:ext cx="5394960" cy="4937760"/>
-          </a:xfrm>
-          <a:prstGeom prst="rect">
-            <a:avLst/>
-          </a:prstGeom>
-          <a:noFill/>
-        </p:spPr>
-        <p:txBody>
-          <a:bodyPr wrap="square" anchor="t" lIns="0" rIns="0" tIns="0" bIns="0">
-            <a:spAutoFit/>
-          </a:bodyPr>
-          <a:lstStyle/>
-          <a:p>
-            <a:pPr algn="l">
-              <a:spcAft>
-                <a:spcPts val="585"/>
-              </a:spcAft>
-            </a:pPr>
-            <a:r>
-              <a:rPr sz="1500" b="1" i="0">
-                <a:solidFill>
-                  <a:srgbClr val="1C1B19"/>
-                </a:solidFill>
-                <a:latin typeface="Source Serif 4"/>
-              </a:rPr>
-              <a:t>Respect the want.</a:t>
-            </a:r>
-          </a:p>
-          <a:p>
-            <a:pPr algn="l">
-              <a:spcAft>
-                <a:spcPts val="585"/>
-              </a:spcAft>
-            </a:pPr>
-            <a:r>
-              <a:rPr sz="1300" b="0" i="0">
-                <a:solidFill>
-                  <a:srgbClr val="1C1B19"/>
-                </a:solidFill>
-                <a:latin typeface="Source Serif 4"/>
-              </a:rPr>
-              <a:t>Confidence, strength, money, respect and not being lonely are good things to want, and that's how this content gets in. If a student gets defensive or quotes a creator, stay steady: "Wanting confidence and respect makes total sense. The question is what gets you there." Students who feel lectured stop listening.</a:t>
-            </a:r>
-          </a:p>
-          <a:p>
-            <a:pPr algn="l">
-              <a:spcAft>
-                <a:spcPts val="585"/>
-              </a:spcAft>
-            </a:pPr>
-            <a:r>
-              <a:rPr sz="1300" b="0" i="0">
-                <a:solidFill>
-                  <a:srgbClr val="1C1B19"/>
-                </a:solidFill>
-                <a:latin typeface="Source Serif 4"/>
-              </a:rPr>
-              <a:t/>
-            </a:r>
-          </a:p>
-          <a:p>
-            <a:pPr algn="l">
-              <a:spcAft>
-                <a:spcPts val="585"/>
-              </a:spcAft>
-            </a:pPr>
-            <a:r>
-              <a:rPr sz="1500" b="1" i="0">
-                <a:solidFill>
-                  <a:srgbClr val="1C1B19"/>
-                </a:solidFill>
-                <a:latin typeface="Source Serif 4"/>
-              </a:rPr>
-              <a:t>Don't play clips in class.</a:t>
-            </a:r>
-          </a:p>
-          <a:p>
-            <a:pPr algn="l">
-              <a:spcAft>
-                <a:spcPts val="585"/>
-              </a:spcAft>
-            </a:pPr>
-            <a:r>
-              <a:rPr sz="1300" b="0" i="0">
-                <a:solidFill>
-                  <a:srgbClr val="1C1B19"/>
-                </a:solidFill>
-                <a:latin typeface="Source Serif 4"/>
-              </a:rPr>
-              <a:t>Describe the content; don't show it. Keep the talk about content and situations, never named students. Some students in the circle follow these creators, and some have friends who do.</a:t>
-            </a:r>
-          </a:p>
-          <a:p>
-            <a:pPr algn="l">
-              <a:spcAft>
-                <a:spcPts val="585"/>
-              </a:spcAft>
-            </a:pPr>
-            <a:r>
-              <a:rPr sz="1300" b="0" i="0">
-                <a:solidFill>
-                  <a:srgbClr val="1C1B19"/>
-                </a:solidFill>
-                <a:latin typeface="Source Serif 4"/>
-              </a:rPr>
-              <a:t/>
-            </a:r>
-          </a:p>
-          <a:p>
-            <a:pPr algn="l">
-              <a:spcAft>
-                <a:spcPts val="585"/>
-              </a:spcAft>
-            </a:pPr>
-            <a:r>
-              <a:rPr sz="1500" b="1" i="0">
-                <a:solidFill>
-                  <a:srgbClr val="1C1B19"/>
-                </a:solidFill>
-                <a:latin typeface="Source Serif 4"/>
-              </a:rPr>
-              <a:t>Girls and students of every gender are in the room.</a:t>
-            </a:r>
-          </a:p>
-          <a:p>
-            <a:pPr algn="l">
-              <a:spcAft>
-                <a:spcPts val="585"/>
-              </a:spcAft>
-            </a:pPr>
-            <a:r>
-              <a:rPr sz="1300" b="0" i="0">
-                <a:solidFill>
-                  <a:srgbClr val="1C1B19"/>
-                </a:solidFill>
-                <a:latin typeface="Source Serif 4"/>
-              </a:rPr>
-              <a:t>This content is about many of them. Don't ask girls to explain how it feels or to debate a guy who repeats it. Say plainly that muting and blocking are always okay, and that nobody owes anyone a debate.</a:t>
-            </a:r>
-          </a:p>
-          <a:p>
-            <a:pPr algn="l">
-              <a:spcAft>
-                <a:spcPts val="585"/>
-              </a:spcAft>
-            </a:pPr>
-            <a:r>
-              <a:rPr sz="1300" b="0" i="0">
-                <a:solidFill>
-                  <a:srgbClr val="1C1B19"/>
-                </a:solidFill>
-                <a:latin typeface="Source Serif 4"/>
-              </a:rPr>
-              <a:t/>
-            </a:r>
-          </a:p>
-        </p:txBody>
-      </p:sp>
-      <p:sp>
-        <p:nvSpPr>
-          <p:cNvPr id="6" name="TextBox 5"/>
-          <p:cNvSpPr txBox="1"/>
-          <p:nvPr/>
-        </p:nvSpPr>
-        <p:spPr>
-          <a:xfrm>
-            <a:off x="6217920" y="1463040"/>
-            <a:ext cx="5394960" cy="4937760"/>
-          </a:xfrm>
-          <a:prstGeom prst="rect">
-            <a:avLst/>
-          </a:prstGeom>
-          <a:noFill/>
-        </p:spPr>
-        <p:txBody>
-          <a:bodyPr wrap="square" anchor="t" lIns="0" rIns="0" tIns="0" bIns="0">
-            <a:spAutoFit/>
-          </a:bodyPr>
-          <a:lstStyle/>
-          <a:p>
-            <a:pPr algn="l">
-              <a:spcAft>
-                <a:spcPts val="585"/>
-              </a:spcAft>
-            </a:pPr>
-            <a:r>
-              <a:rPr sz="1500" b="1" i="0">
-                <a:solidFill>
-                  <a:srgbClr val="1C1B19"/>
-                </a:solidFill>
-                <a:latin typeface="Source Serif 4"/>
-              </a:rPr>
-              <a:t>Know what goes to an adult the same day.</a:t>
-            </a:r>
-          </a:p>
-          <a:p>
-            <a:pPr algn="l">
-              <a:spcAft>
-                <a:spcPts val="585"/>
-              </a:spcAft>
-            </a:pPr>
-            <a:r>
-              <a:rPr sz="1300" b="0" i="0">
-                <a:solidFill>
-                  <a:srgbClr val="1C1B19"/>
-                </a:solidFill>
-                <a:latin typeface="Source Serif 4"/>
-              </a:rPr>
-              <a:t>Someone sharing photos of a real person, real or AI-made. Threats. Talk about a girl that turns into a plan to hurt, follow or embarrass her. Don't ask about these in the circle. Know your dean's and counselor's protocol before advisory, and follow up that day.</a:t>
-            </a:r>
-          </a:p>
-          <a:p>
-            <a:pPr algn="l">
-              <a:spcAft>
-                <a:spcPts val="585"/>
-              </a:spcAft>
-            </a:pPr>
-            <a:r>
-              <a:rPr sz="1300" b="0" i="0">
-                <a:solidFill>
-                  <a:srgbClr val="1C1B19"/>
-                </a:solidFill>
-                <a:latin typeface="Source Serif 4"/>
-              </a:rPr>
-              <a:t/>
-            </a:r>
-          </a:p>
-          <a:p>
-            <a:pPr algn="l">
-              <a:spcAft>
-                <a:spcPts val="585"/>
-              </a:spcAft>
-            </a:pPr>
-            <a:r>
-              <a:rPr sz="1500" b="1" i="0">
-                <a:solidFill>
-                  <a:srgbClr val="1C1B19"/>
-                </a:solidFill>
-                <a:latin typeface="Source Serif 4"/>
-              </a:rPr>
-              <a:t>Watch for the student who seems alone.</a:t>
-            </a:r>
-          </a:p>
-          <a:p>
-            <a:pPr algn="l">
-              <a:spcAft>
-                <a:spcPts val="585"/>
-              </a:spcAft>
-            </a:pPr>
-            <a:r>
-              <a:rPr sz="1300" b="0" i="0">
-                <a:solidFill>
-                  <a:srgbClr val="1C1B19"/>
-                </a:solidFill>
-                <a:latin typeface="Source Serif 4"/>
-              </a:rPr>
-              <a:t>A student who seems much angrier lately, or who says these videos are the only place that gets him, may need a counselor more than a debate. Check in privately afterward. Don't ask self-harm questions in the circle; any disclosure goes to a counselor, and 988 (call or text) is open any time.</a:t>
-            </a:r>
-          </a:p>
-          <a:p>
-            <a:pPr algn="l">
-              <a:spcAft>
-                <a:spcPts val="585"/>
-              </a:spcAft>
-            </a:pPr>
-            <a:r>
-              <a:rPr sz="1300" b="0" i="0">
-                <a:solidFill>
-                  <a:srgbClr val="1C1B19"/>
-                </a:solidFill>
-                <a:latin typeface="Source Serif 4"/>
-              </a:rPr>
-              <a:t/>
-            </a:r>
-          </a:p>
-          <a:p>
-            <a:pPr algn="l">
-              <a:spcAft>
-                <a:spcPts val="585"/>
-              </a:spcAft>
-            </a:pPr>
-            <a:r>
-              <a:rPr sz="1500" b="1" i="0">
-                <a:solidFill>
-                  <a:srgbClr val="1C1B19"/>
-                </a:solidFill>
-                <a:latin typeface="Source Serif 4"/>
-              </a:rPr>
-              <a:t>Stay out of party politics.</a:t>
-            </a:r>
-          </a:p>
-          <a:p>
-            <a:pPr algn="l">
-              <a:spcAft>
-                <a:spcPts val="585"/>
-              </a:spcAft>
-            </a:pPr>
-            <a:r>
-              <a:rPr sz="1300" b="0" i="0">
-                <a:solidFill>
-                  <a:srgbClr val="1C1B19"/>
-                </a:solidFill>
-                <a:latin typeface="Source Serif 4"/>
-              </a:rPr>
-              <a:t>Families hold a wide range of views about men's and women's roles, often rooted in faith or culture. Keep the conversation on how feeds work and what the research says about specific claims, and leave room for students to respect the adults who raised them.</a:t>
-            </a:r>
-          </a:p>
-          <a:p>
-            <a:pPr algn="l">
-              <a:spcAft>
-                <a:spcPts val="585"/>
-              </a:spcAft>
-            </a:pPr>
-            <a:r>
-              <a:rPr sz="1300" b="0" i="0">
-                <a:solidFill>
-                  <a:srgbClr val="1C1B19"/>
-                </a:solidFill>
-                <a:latin typeface="Source Serif 4"/>
-              </a:rPr>
-              <a:t/>
-            </a:r>
-          </a:p>
-        </p:txBody>
-      </p:sp>
-    </p:spTree>
-  </p:cSld>
-  <p:clrMapOvr>
-    <a:masterClrMapping/>
-  </p:clrMapOvr>
-</p:sld>
-</file>
-
-<file path=ppt/slides/slide3.xml><?xml version="1.0" encoding="utf-8"?>
-<p:sld xmlns:a="http://schemas.openxmlformats.org/drawingml/2006/main" xmlns:p="http://schemas.openxmlformats.org/presentationml/2006/main" xmlns:r="http://schemas.openxmlformats.org/officeDocument/2006/relationships" show="0">
-  <p:cSld>
-    <p:bg>
-      <p:bgPr>
-        <a:solidFill>
-          <a:srgbClr val="EEEBE4"/>
-        </a:solidFill>
-        <a:effectLst/>
-      </p:bgPr>
-    </p:bg>
-    <p:spTree>
-      <p:nvGrpSpPr>
-        <p:cNvPr id="1" name=""/>
-        <p:cNvGrpSpPr/>
-        <p:nvPr/>
-      </p:nvGrpSpPr>
-      <p:grpSpPr/>
-      <p:sp>
-        <p:nvSpPr>
-          <p:cNvPr id="2" name="Rectangle 1"/>
-          <p:cNvSpPr/>
-          <p:nvPr/>
-        </p:nvSpPr>
-        <p:spPr>
-          <a:xfrm>
-            <a:off x="0" y="0"/>
-            <a:ext cx="12191695" cy="384048"/>
-          </a:xfrm>
-          <a:prstGeom prst="rect">
-            <a:avLst/>
-          </a:prstGeom>
-          <a:solidFill>
-            <a:srgbClr val="0B2D5B"/>
-          </a:solidFill>
-          <a:ln>
-            <a:noFill/>
-          </a:ln>
-          <a:effectLst/>
-        </p:spPr>
-        <p:style>
-          <a:lnRef idx="1">
-            <a:schemeClr val="accent1"/>
-          </a:lnRef>
-          <a:fillRef idx="3">
-            <a:schemeClr val="accent1"/>
-          </a:fillRef>
-          <a:effectRef idx="2">
-            <a:schemeClr val="accent1"/>
-          </a:effectRef>
-          <a:fontRef idx="minor">
-            <a:schemeClr val="lt1"/>
-          </a:fontRef>
-        </p:style>
-        <p:txBody>
-          <a:bodyPr rtlCol="0" anchor="ctr"/>
-          <a:lstStyle/>
-          <a:p>
-            <a:pPr algn="ctr"/>
-          </a:p>
-        </p:txBody>
-      </p:sp>
-      <p:sp>
-        <p:nvSpPr>
-          <p:cNvPr id="3" name="TextBox 2"/>
-          <p:cNvSpPr txBox="1"/>
-          <p:nvPr/>
-        </p:nvSpPr>
-        <p:spPr>
-          <a:xfrm>
-            <a:off x="548640" y="100584"/>
-            <a:ext cx="10972800" cy="274320"/>
-          </a:xfrm>
-          <a:prstGeom prst="rect">
-            <a:avLst/>
-          </a:prstGeom>
-          <a:noFill/>
-        </p:spPr>
-        <p:txBody>
-          <a:bodyPr wrap="square" anchor="t" lIns="0" rIns="0" tIns="0" bIns="0">
-            <a:spAutoFit/>
-          </a:bodyPr>
-          <a:lstStyle/>
-          <a:p>
-            <a:pPr algn="l">
-              <a:spcAft>
-                <a:spcPts val="495"/>
-              </a:spcAft>
-            </a:pPr>
-            <a:r>
-              <a:rPr sz="1100" b="1" i="0">
-                <a:solidFill>
-                  <a:srgbClr val="FFFFFF"/>
-                </a:solidFill>
-                <a:latin typeface="Inter Tight"/>
-              </a:rPr>
-              <a:t>TEACHER PAGE  ·  skipped when you present  ·  Every student in the room</a:t>
-            </a:r>
-          </a:p>
-        </p:txBody>
-      </p:sp>
-      <p:sp>
-        <p:nvSpPr>
-          <p:cNvPr id="4" name="TextBox 3"/>
-          <p:cNvSpPr txBox="1"/>
-          <p:nvPr/>
-        </p:nvSpPr>
-        <p:spPr>
-          <a:xfrm>
-            <a:off x="548640" y="685800"/>
-            <a:ext cx="10972800" cy="640080"/>
-          </a:xfrm>
-          <a:prstGeom prst="rect">
-            <a:avLst/>
-          </a:prstGeom>
-          <a:noFill/>
-        </p:spPr>
-        <p:txBody>
-          <a:bodyPr wrap="square" anchor="t" lIns="0" rIns="0" tIns="0" bIns="0">
-            <a:spAutoFit/>
-          </a:bodyPr>
-          <a:lstStyle/>
-          <a:p>
-            <a:pPr algn="l">
-              <a:spcAft>
-                <a:spcPts val="1350"/>
-              </a:spcAft>
-            </a:pPr>
-            <a:r>
-              <a:rPr sz="3000" b="1" i="0">
-                <a:solidFill>
-                  <a:srgbClr val="1C1B19"/>
-                </a:solidFill>
-                <a:latin typeface="Source Serif 4"/>
-              </a:rPr>
-              <a:t>Every student in the room</a:t>
-            </a:r>
-          </a:p>
-        </p:txBody>
-      </p:sp>
-      <p:sp>
-        <p:nvSpPr>
-          <p:cNvPr id="5" name="TextBox 4"/>
-          <p:cNvSpPr txBox="1"/>
-          <p:nvPr/>
-        </p:nvSpPr>
-        <p:spPr>
-          <a:xfrm>
-            <a:off x="548640" y="1325880"/>
-            <a:ext cx="10972800" cy="365760"/>
-          </a:xfrm>
-          <a:prstGeom prst="rect">
-            <a:avLst/>
-          </a:prstGeom>
-          <a:noFill/>
-        </p:spPr>
-        <p:txBody>
-          <a:bodyPr wrap="square" anchor="t" lIns="0" rIns="0" tIns="0" bIns="0">
-            <a:spAutoFit/>
-          </a:bodyPr>
-          <a:lstStyle/>
-          <a:p>
-            <a:pPr algn="l">
-              <a:spcAft>
-                <a:spcPts val="630"/>
-              </a:spcAft>
-            </a:pPr>
-            <a:r>
-              <a:rPr sz="1400" b="0" i="0">
-                <a:solidFill>
-                  <a:srgbClr val="5D5A54"/>
-                </a:solidFill>
-                <a:latin typeface="Inter Tight"/>
-              </a:rPr>
-              <a:t>Culture, family, identity, ability and money: what to keep in mind for this topic.</a:t>
-            </a:r>
-          </a:p>
-        </p:txBody>
-      </p:sp>
-      <p:sp>
-        <p:nvSpPr>
-          <p:cNvPr id="6" name="TextBox 5"/>
-          <p:cNvSpPr txBox="1"/>
-          <p:nvPr/>
-        </p:nvSpPr>
-        <p:spPr>
-          <a:xfrm>
-            <a:off x="548640" y="1828800"/>
-            <a:ext cx="5394960" cy="4572000"/>
-          </a:xfrm>
-          <a:prstGeom prst="rect">
-            <a:avLst/>
-          </a:prstGeom>
-          <a:noFill/>
-        </p:spPr>
-        <p:txBody>
-          <a:bodyPr wrap="square" anchor="t" lIns="0" rIns="0" tIns="0" bIns="0">
-            <a:spAutoFit/>
-          </a:bodyPr>
-          <a:lstStyle/>
-          <a:p>
-            <a:pPr algn="l">
-              <a:spcAft>
-                <a:spcPts val="585"/>
-              </a:spcAft>
-            </a:pPr>
-            <a:r>
-              <a:rPr sz="1500" b="1" i="0">
-                <a:solidFill>
-                  <a:srgbClr val="1C1B19"/>
-                </a:solidFill>
-                <a:latin typeface="Source Serif 4"/>
-              </a:rPr>
-              <a:t>Don't make the boys the problem and the girls the audience.</a:t>
-            </a:r>
-          </a:p>
-          <a:p>
-            <a:pPr algn="l">
-              <a:spcAft>
-                <a:spcPts val="585"/>
-              </a:spcAft>
-            </a:pPr>
-            <a:r>
-              <a:rPr sz="1300" b="0" i="0">
-                <a:solidFill>
-                  <a:srgbClr val="1C1B19"/>
-                </a:solidFill>
-                <a:latin typeface="Source Serif 4"/>
-              </a:rPr>
-              <a:t>Most guys are less into this than they seem, and that's the core of the lesson. Girls, nonbinary students and boys all get pulled by feeds, and anyone can be the one who says "nah." Boys can be scared, lonely and tender; girls can be ambitious and loud. Keep examples off stereotypes in both directions.</a:t>
-            </a:r>
-          </a:p>
-          <a:p>
-            <a:pPr algn="l">
-              <a:spcAft>
-                <a:spcPts val="585"/>
-              </a:spcAft>
-            </a:pPr>
-            <a:r>
-              <a:rPr sz="1300" b="0" i="0">
-                <a:solidFill>
-                  <a:srgbClr val="1C1B19"/>
-                </a:solidFill>
-                <a:latin typeface="Source Serif 4"/>
-              </a:rPr>
-              <a:t/>
-            </a:r>
-          </a:p>
-          <a:p>
-            <a:pPr algn="l">
-              <a:spcAft>
-                <a:spcPts val="585"/>
-              </a:spcAft>
-            </a:pPr>
-            <a:r>
-              <a:rPr sz="1500" b="1" i="0">
-                <a:solidFill>
-                  <a:srgbClr val="1C1B19"/>
-                </a:solidFill>
-                <a:latin typeface="Source Serif 4"/>
-              </a:rPr>
-              <a:t>"Soft," "simp" and anti-gay jokes police every guy.</a:t>
-            </a:r>
-          </a:p>
-          <a:p>
-            <a:pPr algn="l">
-              <a:spcAft>
-                <a:spcPts val="585"/>
-              </a:spcAft>
-            </a:pPr>
-            <a:r>
-              <a:rPr sz="1300" b="0" i="0">
-                <a:solidFill>
-                  <a:srgbClr val="1C1B19"/>
-                </a:solidFill>
-                <a:latin typeface="Source Serif 4"/>
-              </a:rPr>
-              <a:t>Gay, bi, trans and questioning students hear these words as being about them, and straight guys get boxed in by them too. Name them as pressure. Partners in examples can be anyone; the Aaliyah card is one example, not the only kind of relationship. Know where to point students: a counselor and The Trevor Project (call 1-866-488-7386 or text START to 678-678).</a:t>
-            </a:r>
-          </a:p>
-          <a:p>
-            <a:pPr algn="l">
-              <a:spcAft>
-                <a:spcPts val="585"/>
-              </a:spcAft>
-            </a:pPr>
-            <a:r>
-              <a:rPr sz="1300" b="0" i="0">
-                <a:solidFill>
-                  <a:srgbClr val="1C1B19"/>
-                </a:solidFill>
-                <a:latin typeface="Source Serif 4"/>
-              </a:rPr>
-              <a:t/>
-            </a:r>
-          </a:p>
-          <a:p>
-            <a:pPr algn="l">
-              <a:spcAft>
-                <a:spcPts val="585"/>
-              </a:spcAft>
-            </a:pPr>
-            <a:r>
-              <a:rPr sz="1500" b="1" i="0">
-                <a:solidFill>
-                  <a:srgbClr val="1C1B19"/>
-                </a:solidFill>
-                <a:latin typeface="Source Serif 4"/>
-              </a:rPr>
-              <a:t>Family, culture and faith shape what "being a man" means.</a:t>
-            </a:r>
-          </a:p>
-          <a:p>
-            <a:pPr algn="l">
-              <a:spcAft>
-                <a:spcPts val="585"/>
-              </a:spcAft>
-            </a:pPr>
-            <a:r>
-              <a:rPr sz="1300" b="0" i="0">
-                <a:solidFill>
-                  <a:srgbClr val="1C1B19"/>
-                </a:solidFill>
-                <a:latin typeface="Source Serif 4"/>
-              </a:rPr>
-              <a:t>People students respect may define it differently, and traditional roles are not the same thing as contempt for women. Avoid "In X families" generalizations. The closing question is private: which parts of what you were taught do you want to keep?</a:t>
-            </a:r>
-          </a:p>
-          <a:p>
-            <a:pPr algn="l">
-              <a:spcAft>
-                <a:spcPts val="585"/>
-              </a:spcAft>
-            </a:pPr>
-            <a:r>
-              <a:rPr sz="1300" b="0" i="0">
-                <a:solidFill>
-                  <a:srgbClr val="1C1B19"/>
-                </a:solidFill>
-                <a:latin typeface="Source Serif 4"/>
-              </a:rPr>
-              <a:t/>
-            </a:r>
-          </a:p>
-        </p:txBody>
-      </p:sp>
-      <p:sp>
-        <p:nvSpPr>
-          <p:cNvPr id="7" name="TextBox 6"/>
-          <p:cNvSpPr txBox="1"/>
-          <p:nvPr/>
-        </p:nvSpPr>
-        <p:spPr>
-          <a:xfrm>
-            <a:off x="6217920" y="1828800"/>
-            <a:ext cx="5394960" cy="4572000"/>
-          </a:xfrm>
-          <a:prstGeom prst="rect">
-            <a:avLst/>
-          </a:prstGeom>
-          <a:noFill/>
-        </p:spPr>
-        <p:txBody>
-          <a:bodyPr wrap="square" anchor="t" lIns="0" rIns="0" tIns="0" bIns="0">
-            <a:spAutoFit/>
-          </a:bodyPr>
-          <a:lstStyle/>
-          <a:p>
-            <a:pPr algn="l">
-              <a:spcAft>
-                <a:spcPts val="585"/>
-              </a:spcAft>
-            </a:pPr>
-            <a:r>
-              <a:rPr sz="1500" b="1" i="0">
-                <a:solidFill>
-                  <a:srgbClr val="1C1B19"/>
-                </a:solidFill>
-                <a:latin typeface="Source Serif 4"/>
-              </a:rPr>
-              <a:t>Not every student has a man at home.</a:t>
-            </a:r>
-          </a:p>
-          <a:p>
-            <a:pPr algn="l">
-              <a:spcAft>
-                <a:spcPts val="585"/>
-              </a:spcAft>
-            </a:pPr>
-            <a:r>
-              <a:rPr sz="1300" b="0" i="0">
-                <a:solidFill>
-                  <a:srgbClr val="1C1B19"/>
-                </a:solidFill>
-                <a:latin typeface="Source Serif 4"/>
-              </a:rPr>
-              <a:t>Some are raised by a single mom, grandparents, two moms, or in foster or kinship care. When you ask what they were taught about being a man, say "from anyone in your life": a coach, an uncle, an older cousin, a friend's dad, or nobody in particular.</a:t>
-            </a:r>
-          </a:p>
-          <a:p>
-            <a:pPr algn="l">
-              <a:spcAft>
-                <a:spcPts val="585"/>
-              </a:spcAft>
-            </a:pPr>
-            <a:r>
-              <a:rPr sz="1300" b="0" i="0">
-                <a:solidFill>
-                  <a:srgbClr val="1C1B19"/>
-                </a:solidFill>
-                <a:latin typeface="Source Serif 4"/>
-              </a:rPr>
-              <a:t/>
-            </a:r>
-          </a:p>
-          <a:p>
-            <a:pPr algn="l">
-              <a:spcAft>
-                <a:spcPts val="585"/>
-              </a:spcAft>
-            </a:pPr>
-            <a:r>
-              <a:rPr sz="1500" b="1" i="0">
-                <a:solidFill>
-                  <a:srgbClr val="1C1B19"/>
-                </a:solidFill>
-                <a:latin typeface="Source Serif 4"/>
-              </a:rPr>
-              <a:t>The money pitch lands harder when money is tight.</a:t>
-            </a:r>
-          </a:p>
-          <a:p>
-            <a:pPr algn="l">
-              <a:spcAft>
-                <a:spcPts val="585"/>
-              </a:spcAft>
-            </a:pPr>
-            <a:r>
-              <a:rPr sz="1300" b="0" i="0">
-                <a:solidFill>
-                  <a:srgbClr val="1C1B19"/>
-                </a:solidFill>
-                <a:latin typeface="Source Serif 4"/>
-              </a:rPr>
-              <a:t>Get-rich and "high-value" content can feel like a way out for students whose families are struggling, and the courses cost real money every month. Keep the good part: lift, study, save, build discipline. None of that costs anything or requires the package.</a:t>
-            </a:r>
-          </a:p>
-          <a:p>
-            <a:pPr algn="l">
-              <a:spcAft>
-                <a:spcPts val="585"/>
-              </a:spcAft>
-            </a:pPr>
-            <a:r>
-              <a:rPr sz="1300" b="0" i="0">
-                <a:solidFill>
-                  <a:srgbClr val="1C1B19"/>
-                </a:solidFill>
-                <a:latin typeface="Source Serif 4"/>
-              </a:rPr>
-              <a:t/>
-            </a:r>
-          </a:p>
-          <a:p>
-            <a:pPr algn="l">
-              <a:spcAft>
-                <a:spcPts val="585"/>
-              </a:spcAft>
-            </a:pPr>
-            <a:r>
-              <a:rPr sz="1500" b="1" i="0">
-                <a:solidFill>
-                  <a:srgbClr val="1C1B19"/>
-                </a:solidFill>
-                <a:latin typeface="Source Serif 4"/>
-              </a:rPr>
-              <a:t>Rules can feel like relief.</a:t>
-            </a:r>
-          </a:p>
-          <a:p>
-            <a:pPr algn="l">
-              <a:spcAft>
-                <a:spcPts val="585"/>
-              </a:spcAft>
-            </a:pPr>
-            <a:r>
-              <a:rPr sz="1300" b="0" i="0">
-                <a:solidFill>
-                  <a:srgbClr val="1C1B19"/>
-                </a:solidFill>
-                <a:latin typeface="Source Serif 4"/>
-              </a:rPr>
-              <a:t>Some students, including some autistic students, find unwritten social rules hard to read, and content that promises clear rules about dating and status can feel like help. Treat that want as fair and point to real support. For stand up, sit down, let students vote with a hand or thumb from their seat.</a:t>
-            </a:r>
-          </a:p>
-          <a:p>
-            <a:pPr algn="l">
-              <a:spcAft>
-                <a:spcPts val="585"/>
-              </a:spcAft>
-            </a:pPr>
-            <a:r>
-              <a:rPr sz="1300" b="0" i="0">
-                <a:solidFill>
-                  <a:srgbClr val="1C1B19"/>
-                </a:solidFill>
-                <a:latin typeface="Source Serif 4"/>
-              </a:rPr>
-              <a:t/>
-            </a:r>
-          </a:p>
-        </p:txBody>
-      </p:sp>
-    </p:spTree>
-  </p:cSld>
-  <p:clrMapOvr>
-    <a:masterClrMapping/>
-  </p:clrMapOvr>
-</p:sld>
-</file>
-
-<file path=ppt/slides/slide4.xml><?xml version="1.0" encoding="utf-8"?>
-<p:sld xmlns:a="http://schemas.openxmlformats.org/drawingml/2006/main" xmlns:p="http://schemas.openxmlformats.org/presentationml/2006/main" xmlns:r="http://schemas.openxmlformats.org/officeDocument/2006/relationships" show="0">
-  <p:cSld>
-    <p:bg>
-      <p:bgPr>
-        <a:solidFill>
-          <a:srgbClr val="EEEBE4"/>
-        </a:solidFill>
-        <a:effectLst/>
-      </p:bgPr>
-    </p:bg>
-    <p:spTree>
-      <p:nvGrpSpPr>
-        <p:cNvPr id="1" name=""/>
-        <p:cNvGrpSpPr/>
-        <p:nvPr/>
-      </p:nvGrpSpPr>
-      <p:grpSpPr/>
-      <p:sp>
-        <p:nvSpPr>
-          <p:cNvPr id="2" name="Rectangle 1"/>
-          <p:cNvSpPr/>
-          <p:nvPr/>
-        </p:nvSpPr>
-        <p:spPr>
-          <a:xfrm>
-            <a:off x="0" y="0"/>
-            <a:ext cx="12191695" cy="384048"/>
-          </a:xfrm>
-          <a:prstGeom prst="rect">
-            <a:avLst/>
-          </a:prstGeom>
-          <a:solidFill>
-            <a:srgbClr val="0B2D5B"/>
-          </a:solidFill>
-          <a:ln>
-            <a:noFill/>
-          </a:ln>
-          <a:effectLst/>
-        </p:spPr>
-        <p:style>
-          <a:lnRef idx="1">
-            <a:schemeClr val="accent1"/>
-          </a:lnRef>
-          <a:fillRef idx="3">
-            <a:schemeClr val="accent1"/>
-          </a:fillRef>
-          <a:effectRef idx="2">
-            <a:schemeClr val="accent1"/>
-          </a:effectRef>
-          <a:fontRef idx="minor">
-            <a:schemeClr val="lt1"/>
-          </a:fontRef>
-        </p:style>
-        <p:txBody>
-          <a:bodyPr rtlCol="0" anchor="ctr"/>
-          <a:lstStyle/>
-          <a:p>
-            <a:pPr algn="ctr"/>
-          </a:p>
-        </p:txBody>
-      </p:sp>
-      <p:sp>
-        <p:nvSpPr>
-          <p:cNvPr id="3" name="TextBox 2"/>
-          <p:cNvSpPr txBox="1"/>
-          <p:nvPr/>
-        </p:nvSpPr>
-        <p:spPr>
-          <a:xfrm>
-            <a:off x="548640" y="100584"/>
-            <a:ext cx="10972800" cy="274320"/>
-          </a:xfrm>
-          <a:prstGeom prst="rect">
-            <a:avLst/>
-          </a:prstGeom>
-          <a:noFill/>
-        </p:spPr>
-        <p:txBody>
-          <a:bodyPr wrap="square" anchor="t" lIns="0" rIns="0" tIns="0" bIns="0">
-            <a:spAutoFit/>
-          </a:bodyPr>
-          <a:lstStyle/>
-          <a:p>
-            <a:pPr algn="l">
-              <a:spcAft>
-                <a:spcPts val="495"/>
-              </a:spcAft>
-            </a:pPr>
-            <a:r>
-              <a:rPr sz="1100" b="1" i="0">
-                <a:solidFill>
-                  <a:srgbClr val="FFFFFF"/>
-                </a:solidFill>
-                <a:latin typeface="Inter Tight"/>
-              </a:rPr>
-              <a:t>TEACHER PAGE  ·  skipped when you present  ·  Background</a:t>
-            </a:r>
-          </a:p>
-        </p:txBody>
-      </p:sp>
-      <p:sp>
-        <p:nvSpPr>
-          <p:cNvPr id="4" name="TextBox 3"/>
-          <p:cNvSpPr txBox="1"/>
-          <p:nvPr/>
-        </p:nvSpPr>
-        <p:spPr>
-          <a:xfrm>
-            <a:off x="548640" y="685800"/>
-            <a:ext cx="10972800" cy="640080"/>
-          </a:xfrm>
-          <a:prstGeom prst="rect">
-            <a:avLst/>
-          </a:prstGeom>
-          <a:noFill/>
-        </p:spPr>
-        <p:txBody>
-          <a:bodyPr wrap="square" anchor="t" lIns="0" rIns="0" tIns="0" bIns="0">
-            <a:spAutoFit/>
-          </a:bodyPr>
-          <a:lstStyle/>
-          <a:p>
-            <a:pPr algn="l">
-              <a:spcAft>
-                <a:spcPts val="1350"/>
-              </a:spcAft>
-            </a:pPr>
-            <a:r>
-              <a:rPr sz="3000" b="1" i="0">
-                <a:solidFill>
-                  <a:srgbClr val="1C1B19"/>
-                </a:solidFill>
-                <a:latin typeface="Source Serif 4"/>
-              </a:rPr>
-              <a:t>What the research says</a:t>
-            </a:r>
-          </a:p>
-        </p:txBody>
-      </p:sp>
-      <p:sp>
-        <p:nvSpPr>
-          <p:cNvPr id="5" name="TextBox 4"/>
-          <p:cNvSpPr txBox="1"/>
-          <p:nvPr/>
-        </p:nvSpPr>
-        <p:spPr>
-          <a:xfrm>
-            <a:off x="548640" y="1463040"/>
-            <a:ext cx="5394960" cy="4937760"/>
-          </a:xfrm>
-          <a:prstGeom prst="rect">
-            <a:avLst/>
-          </a:prstGeom>
-          <a:noFill/>
-        </p:spPr>
-        <p:txBody>
-          <a:bodyPr wrap="square" anchor="t" lIns="0" rIns="0" tIns="0" bIns="0">
-            <a:spAutoFit/>
-          </a:bodyPr>
-          <a:lstStyle/>
-          <a:p>
-            <a:pPr algn="l">
-              <a:spcAft>
-                <a:spcPts val="585"/>
-              </a:spcAft>
-            </a:pPr>
-            <a:r>
-              <a:rPr sz="1300" b="0" i="0">
-                <a:solidFill>
-                  <a:srgbClr val="1C1B19"/>
-                </a:solidFill>
-                <a:latin typeface="Source Serif 4"/>
-              </a:rPr>
-              <a:t>Researchers set up ten fresh phones with accounts posing as 16- and 18-year-old boys. Some searched only for gym, sports and gaming. Every account was shown misogynistic or "alpha" content within 23 minutes.</a:t>
-            </a:r>
-          </a:p>
-          <a:p>
-            <a:pPr algn="l">
-              <a:spcAft>
-                <a:spcPts val="585"/>
-              </a:spcAft>
-            </a:pPr>
-            <a:r>
-              <a:rPr sz="1050" b="0" i="0">
-                <a:solidFill>
-                  <a:srgbClr val="5D5A54"/>
-                </a:solidFill>
-                <a:latin typeface="Inter Tight"/>
-              </a:rPr>
-              <a:t>Baker, Ging and Andreasen, Dublin City University, 2024</a:t>
-            </a:r>
-          </a:p>
-          <a:p>
-            <a:pPr algn="l">
-              <a:spcAft>
-                <a:spcPts val="585"/>
-              </a:spcAft>
-            </a:pPr>
-            <a:r>
-              <a:rPr sz="1300" b="0" i="0">
-                <a:solidFill>
-                  <a:srgbClr val="1C1B19"/>
-                </a:solidFill>
-                <a:latin typeface="Source Serif 4"/>
-              </a:rPr>
-              <a:t>In that study, toxic content meant alpha-male, anti-women, reactionary or conspiracy videos. It was a small study, but it matches what other researchers have found.</a:t>
-            </a:r>
-          </a:p>
-          <a:p>
-            <a:pPr algn="l">
-              <a:spcAft>
-                <a:spcPts val="585"/>
-              </a:spcAft>
-            </a:pPr>
-            <a:r>
-              <a:rPr sz="1050" b="0" i="0">
-                <a:solidFill>
-                  <a:srgbClr val="5D5A54"/>
-                </a:solidFill>
-                <a:latin typeface="Inter Tight"/>
-              </a:rPr>
-              <a:t>Baker, Ging and Andreasen, 2024</a:t>
-            </a:r>
-          </a:p>
-          <a:p>
-            <a:pPr algn="l">
-              <a:spcAft>
-                <a:spcPts val="585"/>
-              </a:spcAft>
-            </a:pPr>
-            <a:r>
-              <a:rPr sz="1300" b="0" i="0">
-                <a:solidFill>
-                  <a:srgbClr val="1C1B19"/>
-                </a:solidFill>
-                <a:latin typeface="Source Serif 4"/>
-              </a:rPr>
-              <a:t>The biologist who helped make "alpha wolf" famous studied wild wolves for 13 summers and concluded a typical pack is a family: two parents and their young. The ranking picture came mostly from unrelated wolves in captivity, and he has since called the term misleading.</a:t>
-            </a:r>
-          </a:p>
-          <a:p>
-            <a:pPr algn="l">
-              <a:spcAft>
-                <a:spcPts val="585"/>
-              </a:spcAft>
-            </a:pPr>
-            <a:r>
-              <a:rPr sz="1050" b="0" i="0">
-                <a:solidFill>
-                  <a:srgbClr val="5D5A54"/>
-                </a:solidFill>
-                <a:latin typeface="Inter Tight"/>
-              </a:rPr>
-              <a:t>Mech, Canadian Journal of Zoology, 1999</a:t>
-            </a:r>
-          </a:p>
-        </p:txBody>
-      </p:sp>
-      <p:sp>
-        <p:nvSpPr>
-          <p:cNvPr id="6" name="TextBox 5"/>
-          <p:cNvSpPr txBox="1"/>
-          <p:nvPr/>
-        </p:nvSpPr>
-        <p:spPr>
-          <a:xfrm>
-            <a:off x="6217920" y="1463040"/>
-            <a:ext cx="5394960" cy="4937760"/>
-          </a:xfrm>
-          <a:prstGeom prst="rect">
-            <a:avLst/>
-          </a:prstGeom>
-          <a:noFill/>
-        </p:spPr>
-        <p:txBody>
-          <a:bodyPr wrap="square" anchor="t" lIns="0" rIns="0" tIns="0" bIns="0">
-            <a:spAutoFit/>
-          </a:bodyPr>
-          <a:lstStyle/>
-          <a:p>
-            <a:pPr algn="l">
-              <a:spcAft>
-                <a:spcPts val="585"/>
-              </a:spcAft>
-            </a:pPr>
-            <a:r>
-              <a:rPr sz="1300" b="0" i="0">
-                <a:solidFill>
-                  <a:srgbClr val="1C1B19"/>
-                </a:solidFill>
-                <a:latin typeface="Source Serif 4"/>
-              </a:rPr>
-              <a:t>Across 10,047 people in 37 cultures, both men and women ranked "kind and understanding" and "intelligent" above earning power and good looks, in every sample.</a:t>
-            </a:r>
-          </a:p>
-          <a:p>
-            <a:pPr algn="l">
-              <a:spcAft>
-                <a:spcPts val="585"/>
-              </a:spcAft>
-            </a:pPr>
-            <a:r>
-              <a:rPr sz="1050" b="0" i="0">
-                <a:solidFill>
-                  <a:srgbClr val="5D5A54"/>
-                </a:solidFill>
-                <a:latin typeface="Inter Tight"/>
-              </a:rPr>
-              <a:t>Buss, Behavioral and Brain Sciences, 1989</a:t>
-            </a:r>
-          </a:p>
-          <a:p>
-            <a:pPr algn="l">
-              <a:spcAft>
-                <a:spcPts val="585"/>
-              </a:spcAft>
-            </a:pPr>
-            <a:r>
-              <a:rPr sz="1300" b="0" i="0">
-                <a:solidFill>
-                  <a:srgbClr val="1C1B19"/>
-                </a:solidFill>
-                <a:latin typeface="Source Serif 4"/>
-              </a:rPr>
-              <a:t>College men overestimated how sexist the other men in the room were. After seeing the real numbers, their estimates of other men's sexism were lower three weeks later.</a:t>
-            </a:r>
-          </a:p>
-          <a:p>
-            <a:pPr algn="l">
-              <a:spcAft>
-                <a:spcPts val="585"/>
-              </a:spcAft>
-            </a:pPr>
-            <a:r>
-              <a:rPr sz="1050" b="0" i="0">
-                <a:solidFill>
-                  <a:srgbClr val="5D5A54"/>
-                </a:solidFill>
-                <a:latin typeface="Inter Tight"/>
-              </a:rPr>
-              <a:t>Kilmartin et al., Sex Roles, 2008</a:t>
-            </a:r>
-          </a:p>
-          <a:p>
-            <a:pPr algn="l">
-              <a:spcAft>
-                <a:spcPts val="585"/>
-              </a:spcAft>
-            </a:pPr>
-            <a:r>
-              <a:rPr sz="1300" b="0" i="0">
-                <a:solidFill>
-                  <a:srgbClr val="1C1B19"/>
-                </a:solidFill>
-                <a:latin typeface="Source Serif 4"/>
-              </a:rPr>
-              <a:t>In a 2021 national survey, 15% of American men said they had no close friends, up from 3% in 1990.</a:t>
-            </a:r>
-          </a:p>
-          <a:p>
-            <a:pPr algn="l">
-              <a:spcAft>
-                <a:spcPts val="585"/>
-              </a:spcAft>
-            </a:pPr>
-            <a:r>
-              <a:rPr sz="1050" b="0" i="0">
-                <a:solidFill>
-                  <a:srgbClr val="5D5A54"/>
-                </a:solidFill>
-                <a:latin typeface="Inter Tight"/>
-              </a:rPr>
-              <a:t>Cox, Survey Center on American Life, 2021</a:t>
-            </a:r>
-          </a:p>
-        </p:txBody>
-      </p:sp>
-    </p:spTree>
-  </p:cSld>
-  <p:clrMapOvr>
-    <a:masterClrMapping/>
-  </p:clrMapOvr>
-</p:sld>
-</file>
-
-<file path=ppt/slides/slide5.xml><?xml version="1.0" encoding="utf-8"?>
-<p:sld xmlns:a="http://schemas.openxmlformats.org/drawingml/2006/main" xmlns:p="http://schemas.openxmlformats.org/presentationml/2006/main" xmlns:r="http://schemas.openxmlformats.org/officeDocument/2006/relationships">
-  <p:cSld>
-    <p:bg>
-      <p:bgPr>
-        <a:solidFill>
-          <a:srgbClr val="0B2D5B"/>
-        </a:solidFill>
-        <a:effectLst/>
-      </p:bgPr>
-    </p:bg>
-    <p:spTree>
-      <p:nvGrpSpPr>
-        <p:cNvPr id="1" name=""/>
-        <p:cNvGrpSpPr/>
-        <p:nvPr/>
-      </p:nvGrpSpPr>
-      <p:grpSpPr/>
-      <p:sp>
-        <p:nvSpPr>
-          <p:cNvPr id="2" name="Rectangle 1"/>
-          <p:cNvSpPr/>
-          <p:nvPr/>
-        </p:nvSpPr>
-        <p:spPr>
-          <a:xfrm>
-            <a:off x="548640" y="502920"/>
-            <a:ext cx="457200" cy="54864"/>
-          </a:xfrm>
-          <a:prstGeom prst="rect">
-            <a:avLst/>
-          </a:prstGeom>
-          <a:solidFill>
-            <a:srgbClr val="F47B20"/>
-          </a:solidFill>
-          <a:ln>
-            <a:noFill/>
-          </a:ln>
-          <a:effectLst/>
-        </p:spPr>
-        <p:style>
-          <a:lnRef idx="1">
-            <a:schemeClr val="accent1"/>
-          </a:lnRef>
-          <a:fillRef idx="3">
-            <a:schemeClr val="accent1"/>
-          </a:fillRef>
-          <a:effectRef idx="2">
-            <a:schemeClr val="accent1"/>
-          </a:effectRef>
-          <a:fontRef idx="minor">
-            <a:schemeClr val="lt1"/>
-          </a:fontRef>
-        </p:style>
-        <p:txBody>
-          <a:bodyPr rtlCol="0" anchor="ctr"/>
-          <a:lstStyle/>
-          <a:p>
-            <a:pPr algn="ctr"/>
-          </a:p>
-        </p:txBody>
-      </p:sp>
-      <p:sp>
-        <p:nvSpPr>
-          <p:cNvPr id="3" name="TextBox 2"/>
-          <p:cNvSpPr txBox="1"/>
-          <p:nvPr/>
-        </p:nvSpPr>
-        <p:spPr>
-          <a:xfrm>
-            <a:off x="1143000" y="393192"/>
-            <a:ext cx="8229600" cy="274320"/>
-          </a:xfrm>
-          <a:prstGeom prst="rect">
-            <a:avLst/>
-          </a:prstGeom>
-          <a:noFill/>
-        </p:spPr>
-        <p:txBody>
-          <a:bodyPr wrap="square" anchor="t" lIns="0" rIns="0" tIns="0" bIns="0">
-            <a:spAutoFit/>
-          </a:bodyPr>
-          <a:lstStyle/>
-          <a:p>
-            <a:pPr algn="l">
-              <a:spcAft>
-                <a:spcPts val="540"/>
-              </a:spcAft>
-            </a:pPr>
-            <a:r>
-              <a:rPr sz="1200" b="1" i="0">
-                <a:solidFill>
-                  <a:srgbClr val="5D5A54"/>
-                </a:solidFill>
-                <a:latin typeface="Inter Tight"/>
-              </a:rPr>
-              <a:t>THE BRO CODE</a:t>
-            </a:r>
-          </a:p>
-        </p:txBody>
-      </p:sp>
-      <p:sp>
-        <p:nvSpPr>
-          <p:cNvPr id="4" name="TextBox 3"/>
-          <p:cNvSpPr txBox="1"/>
-          <p:nvPr/>
-        </p:nvSpPr>
-        <p:spPr>
-          <a:xfrm>
-            <a:off x="8229600" y="6400800"/>
-            <a:ext cx="3410712" cy="274320"/>
-          </a:xfrm>
-          <a:prstGeom prst="rect">
-            <a:avLst/>
-          </a:prstGeom>
-          <a:noFill/>
-        </p:spPr>
-        <p:txBody>
-          <a:bodyPr wrap="square" anchor="t" lIns="0" rIns="0" tIns="0" bIns="0">
-            <a:spAutoFit/>
-          </a:bodyPr>
-          <a:lstStyle/>
-          <a:p>
-            <a:pPr algn="r">
-              <a:spcAft>
-                <a:spcPts val="450"/>
-              </a:spcAft>
-            </a:pPr>
-            <a:r>
-              <a:rPr sz="1000" b="0" i="0">
-                <a:solidFill>
-                  <a:srgbClr val="5D5A54"/>
-                </a:solidFill>
-                <a:latin typeface="Inter Tight"/>
-              </a:rPr>
-              <a:t>Beaver Counseling</a:t>
-            </a:r>
-          </a:p>
-        </p:txBody>
-      </p:sp>
-      <p:sp>
-        <p:nvSpPr>
-          <p:cNvPr id="5" name="TextBox 4"/>
-          <p:cNvSpPr txBox="1"/>
-          <p:nvPr/>
-        </p:nvSpPr>
-        <p:spPr>
-          <a:xfrm>
-            <a:off x="822960" y="2011680"/>
-            <a:ext cx="10515600" cy="1463040"/>
-          </a:xfrm>
-          <a:prstGeom prst="rect">
-            <a:avLst/>
-          </a:prstGeom>
-          <a:noFill/>
-        </p:spPr>
-        <p:txBody>
-          <a:bodyPr wrap="square" anchor="b" lIns="0" rIns="0" tIns="0" bIns="0">
-            <a:spAutoFit/>
-          </a:bodyPr>
-          <a:lstStyle/>
-          <a:p>
-            <a:pPr algn="l">
-              <a:spcAft>
-                <a:spcPts val="2700"/>
-              </a:spcAft>
-            </a:pPr>
-            <a:r>
-              <a:rPr sz="6000" b="1" i="0">
-                <a:solidFill>
-                  <a:srgbClr val="FFFFFF"/>
-                </a:solidFill>
-                <a:latin typeface="Source Serif 4"/>
-              </a:rPr>
-              <a:t>The Bro Code</a:t>
-            </a:r>
-          </a:p>
-        </p:txBody>
-      </p:sp>
-      <p:sp>
-        <p:nvSpPr>
-          <p:cNvPr id="6" name="TextBox 5"/>
-          <p:cNvSpPr txBox="1"/>
-          <p:nvPr/>
-        </p:nvSpPr>
-        <p:spPr>
-          <a:xfrm>
-            <a:off x="822960" y="3611880"/>
-            <a:ext cx="10515600" cy="914400"/>
-          </a:xfrm>
-          <a:prstGeom prst="rect">
-            <a:avLst/>
-          </a:prstGeom>
-          <a:noFill/>
-        </p:spPr>
-        <p:txBody>
-          <a:bodyPr wrap="square" anchor="t" lIns="0" rIns="0" tIns="0" bIns="0">
-            <a:spAutoFit/>
-          </a:bodyPr>
-          <a:lstStyle/>
-          <a:p>
-            <a:pPr algn="l">
-              <a:spcAft>
-                <a:spcPts val="1080"/>
-              </a:spcAft>
-            </a:pPr>
-            <a:r>
-              <a:rPr sz="2400" b="0" i="1">
-                <a:solidFill>
-                  <a:srgbClr val="E8E4DA"/>
-                </a:solidFill>
-                <a:latin typeface="Source Serif 4"/>
-              </a:rPr>
-              <a:t>You didn't search for it. It still showed up.</a:t>
-            </a:r>
-          </a:p>
-        </p:txBody>
-      </p:sp>
-      <p:sp>
-        <p:nvSpPr>
-          <p:cNvPr id="7" name="TextBox 6"/>
-          <p:cNvSpPr txBox="1"/>
-          <p:nvPr/>
-        </p:nvSpPr>
-        <p:spPr>
-          <a:xfrm>
-            <a:off x="822960" y="6035040"/>
-            <a:ext cx="7315200" cy="365760"/>
-          </a:xfrm>
-          <a:prstGeom prst="rect">
-            <a:avLst/>
-          </a:prstGeom>
-          <a:noFill/>
-        </p:spPr>
-        <p:txBody>
-          <a:bodyPr wrap="square" anchor="t" lIns="0" rIns="0" tIns="0" bIns="0">
-            <a:spAutoFit/>
-          </a:bodyPr>
-          <a:lstStyle/>
-          <a:p>
-            <a:pPr algn="l">
-              <a:spcAft>
-                <a:spcPts val="585"/>
-              </a:spcAft>
-            </a:pPr>
-            <a:r>
-              <a:rPr sz="1300" b="0" i="0">
-                <a:solidFill>
-                  <a:srgbClr val="E8E4DA"/>
-                </a:solidFill>
-                <a:latin typeface="Inter Tight"/>
-              </a:rPr>
-              <a:t>Beaver Upper School · Counseling</a:t>
+              <a:t>"Guys don't really need close friends."</a:t>
             </a:r>
           </a:p>
         </p:txBody>
@@ -7875,7 +8168,7 @@
                 </a:solidFill>
                 <a:latin typeface="Inter Tight"/>
               </a:rPr>
-              <a:t>WRITE A GUESS</a:t>
+              <a:t>ANONYMOUS CARDS</a:t>
             </a:r>
           </a:p>
         </p:txBody>
@@ -7997,7 +8290,7 @@
                 </a:solidFill>
                 <a:latin typeface="Source Serif 4"/>
               </a:rPr>
-              <a:t>A fresh phone. A teen boy's account. Gym and gaming only.</a:t>
+              <a:t>"Most guys at our school are fine with jokes that rate girls."</a:t>
             </a:r>
           </a:p>
         </p:txBody>
@@ -8036,7 +8329,7 @@
                 </a:solidFill>
                 <a:latin typeface="Inter Tight"/>
               </a:rPr>
-              <a:t>It only searches gym, sports and gaming. How many minutes until it's shown "alpha" or anti-women content? Write a number.</a:t>
+              <a:t>Write agree or disagree. Then write what you think yourself. Fold it. No names.</a:t>
             </a:r>
           </a:p>
         </p:txBody>
@@ -8145,7 +8438,7 @@
                 </a:solidFill>
                 <a:latin typeface="Inter Tight"/>
               </a:rPr>
-              <a:t>HOW A FEED DRIFTS</a:t>
+              <a:t>SILENCE SOUNDS LIKE AGREEMENT</a:t>
             </a:r>
           </a:p>
         </p:txBody>
@@ -8198,7 +8491,7 @@
         <p:spPr>
           <a:xfrm>
             <a:off x="822960" y="1005840"/>
-            <a:ext cx="10515600" cy="914400"/>
+            <a:ext cx="10515600" cy="1097280"/>
           </a:xfrm>
           <a:prstGeom prst="rect">
             <a:avLst/>
@@ -8213,64 +8506,57 @@
           <a:p>
             <a:pPr algn="l">
               <a:spcAft>
-                <a:spcPts val="1530"/>
-              </a:spcAft>
-            </a:pPr>
-            <a:r>
-              <a:rPr sz="3400" b="1" i="0">
+                <a:spcPts val="1620"/>
+              </a:spcAft>
+            </a:pPr>
+            <a:r>
+              <a:rPr sz="3600" b="1" i="0">
                 <a:solidFill>
                   <a:srgbClr val="1C1B19"/>
                 </a:solidFill>
                 <a:latin typeface="Source Serif 4"/>
               </a:rPr>
-              <a:t>It starts with things worth wanting</a:t>
-            </a:r>
-          </a:p>
-        </p:txBody>
-      </p:sp>
-      <p:sp>
-        <p:nvSpPr>
-          <p:cNvPr id="6" name="Rectangle 5"/>
-          <p:cNvSpPr/>
+              <a:t>One low-key "nah" goes a long way.</a:t>
+            </a:r>
+          </a:p>
+        </p:txBody>
+      </p:sp>
+      <p:sp>
+        <p:nvSpPr>
+          <p:cNvPr id="6" name="TextBox 5"/>
+          <p:cNvSpPr txBox="1"/>
           <p:nvPr/>
         </p:nvSpPr>
         <p:spPr>
           <a:xfrm>
-            <a:off x="822960" y="2743200"/>
-            <a:ext cx="1874519" cy="1005840"/>
-          </a:xfrm>
-          <a:prstGeom prst="rect">
-            <a:avLst/>
-          </a:prstGeom>
-          <a:solidFill>
-            <a:srgbClr val="FFFFFF"/>
-          </a:solidFill>
-          <a:ln w="15875">
-            <a:solidFill>
-              <a:srgbClr val="0B2D5B"/>
-            </a:solidFill>
-          </a:ln>
-          <a:effectLst/>
-        </p:spPr>
-        <p:style>
-          <a:lnRef idx="1">
-            <a:schemeClr val="accent1"/>
-          </a:lnRef>
-          <a:fillRef idx="3">
-            <a:schemeClr val="accent1"/>
-          </a:fillRef>
-          <a:effectRef idx="2">
-            <a:schemeClr val="accent1"/>
-          </a:effectRef>
-          <a:fontRef idx="minor">
-            <a:schemeClr val="lt1"/>
-          </a:fontRef>
-        </p:style>
-        <p:txBody>
-          <a:bodyPr rtlCol="0" anchor="ctr"/>
-          <a:lstStyle/>
-          <a:p>
-            <a:pPr algn="ctr"/>
+            <a:off x="822960" y="2194560"/>
+            <a:ext cx="548640" cy="1005840"/>
+          </a:xfrm>
+          <a:prstGeom prst="rect">
+            <a:avLst/>
+          </a:prstGeom>
+          <a:noFill/>
+        </p:spPr>
+        <p:txBody>
+          <a:bodyPr wrap="square" anchor="t" lIns="0" rIns="0" tIns="0" bIns="0">
+            <a:spAutoFit/>
+          </a:bodyPr>
+          <a:lstStyle/>
+          <a:p>
+            <a:pPr algn="l">
+              <a:spcAft>
+                <a:spcPts val="1170"/>
+              </a:spcAft>
+            </a:pPr>
+            <a:r>
+              <a:rPr sz="2600" b="1" i="0">
+                <a:solidFill>
+                  <a:srgbClr val="F47B20"/>
+                </a:solidFill>
+                <a:latin typeface="Source Serif 4"/>
+              </a:rPr>
+              <a:t>1</a:t>
+            </a:r>
           </a:p>
         </p:txBody>
       </p:sp>
@@ -8282,8 +8568,8 @@
         </p:nvSpPr>
         <p:spPr>
           <a:xfrm>
-            <a:off x="822960" y="2743200"/>
-            <a:ext cx="1874519" cy="1005840"/>
+            <a:off x="1463040" y="2231136"/>
+            <a:ext cx="9875520" cy="1005840"/>
           </a:xfrm>
           <a:prstGeom prst="rect">
             <a:avLst/>
@@ -8291,107 +8577,135 @@
           <a:noFill/>
         </p:spPr>
         <p:txBody>
-          <a:bodyPr wrap="square" anchor="ctr" lIns="0" rIns="0" tIns="0" bIns="0">
+          <a:bodyPr wrap="square" anchor="t" lIns="0" rIns="0" tIns="0" bIns="0">
             <a:spAutoFit/>
           </a:bodyPr>
           <a:lstStyle/>
           <a:p>
-            <a:pPr algn="ctr">
-              <a:spcAft>
-                <a:spcPts val="900"/>
-              </a:spcAft>
-            </a:pPr>
-            <a:r>
-              <a:rPr sz="2000" b="1" i="0">
+            <a:pPr algn="l">
+              <a:spcAft>
+                <a:spcPts val="945"/>
+              </a:spcAft>
+            </a:pPr>
+            <a:r>
+              <a:rPr sz="2100" b="1" i="0">
                 <a:solidFill>
                   <a:srgbClr val="1C1B19"/>
                 </a:solidFill>
                 <a:latin typeface="Source Serif 4"/>
               </a:rPr>
-              <a:t>Real wants</a:t>
-            </a:r>
-          </a:p>
-        </p:txBody>
-      </p:sp>
-      <p:cxnSp>
-        <p:nvCxnSpPr>
-          <p:cNvPr id="8" name="Connector 7"/>
-          <p:cNvCxnSpPr/>
+              <a:t>The low-key "nah."</a:t>
+            </a:r>
+          </a:p>
+          <a:p>
+            <a:pPr algn="l">
+              <a:spcAft>
+                <a:spcPts val="945"/>
+              </a:spcAft>
+            </a:pPr>
+            <a:r>
+              <a:rPr sz="1600" b="0" i="0">
+                <a:solidFill>
+                  <a:srgbClr val="5D5A54"/>
+                </a:solidFill>
+                <a:latin typeface="Source Serif 4"/>
+              </a:rPr>
+              <a:t>"Bro, what." "That's weird." A flat look.</a:t>
+            </a:r>
+          </a:p>
+        </p:txBody>
+      </p:sp>
+      <p:sp>
+        <p:nvSpPr>
+          <p:cNvPr id="8" name="TextBox 7"/>
+          <p:cNvSpPr txBox="1"/>
           <p:nvPr/>
-        </p:nvCxnSpPr>
-        <p:spPr>
-          <a:xfrm>
-            <a:off x="2752344" y="3246120"/>
-            <a:ext cx="896112" cy="0"/>
-          </a:xfrm>
-          <a:prstGeom prst="line">
-            <a:avLst/>
-          </a:prstGeom>
-          <a:ln w="31750">
-            <a:solidFill>
-              <a:srgbClr val="F47B20"/>
-            </a:solidFill>
-            <a:tailEnd type="triangle"/>
-          </a:ln>
-        </p:spPr>
-        <p:style>
-          <a:lnRef idx="2">
-            <a:schemeClr val="accent1"/>
-          </a:lnRef>
-          <a:fillRef idx="0">
-            <a:schemeClr val="accent1"/>
-          </a:fillRef>
-          <a:effectRef idx="1">
-            <a:schemeClr val="accent1"/>
-          </a:effectRef>
-          <a:fontRef idx="minor">
-            <a:schemeClr val="tx1"/>
-          </a:fontRef>
-        </p:style>
-      </p:cxnSp>
-      <p:sp>
-        <p:nvSpPr>
-          <p:cNvPr id="9" name="Rectangle 8"/>
-          <p:cNvSpPr/>
+        </p:nvSpPr>
+        <p:spPr>
+          <a:xfrm>
+            <a:off x="822960" y="3200400"/>
+            <a:ext cx="548640" cy="1005840"/>
+          </a:xfrm>
+          <a:prstGeom prst="rect">
+            <a:avLst/>
+          </a:prstGeom>
+          <a:noFill/>
+        </p:spPr>
+        <p:txBody>
+          <a:bodyPr wrap="square" anchor="t" lIns="0" rIns="0" tIns="0" bIns="0">
+            <a:spAutoFit/>
+          </a:bodyPr>
+          <a:lstStyle/>
+          <a:p>
+            <a:pPr algn="l">
+              <a:spcAft>
+                <a:spcPts val="1170"/>
+              </a:spcAft>
+            </a:pPr>
+            <a:r>
+              <a:rPr sz="2600" b="1" i="0">
+                <a:solidFill>
+                  <a:srgbClr val="F47B20"/>
+                </a:solidFill>
+                <a:latin typeface="Source Serif 4"/>
+              </a:rPr>
+              <a:t>2</a:t>
+            </a:r>
+          </a:p>
+        </p:txBody>
+      </p:sp>
+      <p:sp>
+        <p:nvSpPr>
+          <p:cNvPr id="9" name="TextBox 8"/>
+          <p:cNvSpPr txBox="1"/>
           <p:nvPr/>
         </p:nvSpPr>
         <p:spPr>
           <a:xfrm>
-            <a:off x="3703320" y="2743200"/>
-            <a:ext cx="1874519" cy="1005840"/>
-          </a:xfrm>
-          <a:prstGeom prst="rect">
-            <a:avLst/>
-          </a:prstGeom>
-          <a:solidFill>
-            <a:srgbClr val="FFFFFF"/>
-          </a:solidFill>
-          <a:ln w="15875">
-            <a:solidFill>
-              <a:srgbClr val="0B2D5B"/>
-            </a:solidFill>
-          </a:ln>
-          <a:effectLst/>
-        </p:spPr>
-        <p:style>
-          <a:lnRef idx="1">
-            <a:schemeClr val="accent1"/>
-          </a:lnRef>
-          <a:fillRef idx="3">
-            <a:schemeClr val="accent1"/>
-          </a:fillRef>
-          <a:effectRef idx="2">
-            <a:schemeClr val="accent1"/>
-          </a:effectRef>
-          <a:fontRef idx="minor">
-            <a:schemeClr val="lt1"/>
-          </a:fontRef>
-        </p:style>
-        <p:txBody>
-          <a:bodyPr rtlCol="0" anchor="ctr"/>
-          <a:lstStyle/>
-          <a:p>
-            <a:pPr algn="ctr"/>
+            <a:off x="1463040" y="3236976"/>
+            <a:ext cx="9875520" cy="1005840"/>
+          </a:xfrm>
+          <a:prstGeom prst="rect">
+            <a:avLst/>
+          </a:prstGeom>
+          <a:noFill/>
+        </p:spPr>
+        <p:txBody>
+          <a:bodyPr wrap="square" anchor="t" lIns="0" rIns="0" tIns="0" bIns="0">
+            <a:spAutoFit/>
+          </a:bodyPr>
+          <a:lstStyle/>
+          <a:p>
+            <a:pPr algn="l">
+              <a:spcAft>
+                <a:spcPts val="945"/>
+              </a:spcAft>
+            </a:pPr>
+            <a:r>
+              <a:rPr sz="2100" b="1" i="0">
+                <a:solidFill>
+                  <a:srgbClr val="1C1B19"/>
+                </a:solidFill>
+                <a:latin typeface="Source Serif 4"/>
+              </a:rPr>
+              <a:t>Change the subject.</a:t>
+            </a:r>
+          </a:p>
+          <a:p>
+            <a:pPr algn="l">
+              <a:spcAft>
+                <a:spcPts val="945"/>
+              </a:spcAft>
+            </a:pPr>
+            <a:r>
+              <a:rPr sz="1600" b="0" i="0">
+                <a:solidFill>
+                  <a:srgbClr val="5D5A54"/>
+                </a:solidFill>
+                <a:latin typeface="Source Serif 4"/>
+              </a:rPr>
+              <a:t>It works more often than people think.</a:t>
+            </a:r>
           </a:p>
         </p:txBody>
       </p:sp>
@@ -8403,8 +8717,8 @@
         </p:nvSpPr>
         <p:spPr>
           <a:xfrm>
-            <a:off x="3703320" y="2743200"/>
-            <a:ext cx="1874519" cy="1005840"/>
+            <a:off x="822960" y="4206240"/>
+            <a:ext cx="548640" cy="1005840"/>
           </a:xfrm>
           <a:prstGeom prst="rect">
             <a:avLst/>
@@ -8412,107 +8726,119 @@
           <a:noFill/>
         </p:spPr>
         <p:txBody>
-          <a:bodyPr wrap="square" anchor="ctr" lIns="0" rIns="0" tIns="0" bIns="0">
+          <a:bodyPr wrap="square" anchor="t" lIns="0" rIns="0" tIns="0" bIns="0">
             <a:spAutoFit/>
           </a:bodyPr>
           <a:lstStyle/>
           <a:p>
-            <a:pPr algn="ctr">
-              <a:spcAft>
-                <a:spcPts val="900"/>
-              </a:spcAft>
-            </a:pPr>
-            <a:r>
-              <a:rPr sz="2000" b="1" i="0">
+            <a:pPr algn="l">
+              <a:spcAft>
+                <a:spcPts val="1170"/>
+              </a:spcAft>
+            </a:pPr>
+            <a:r>
+              <a:rPr sz="2600" b="1" i="0">
+                <a:solidFill>
+                  <a:srgbClr val="F47B20"/>
+                </a:solidFill>
+                <a:latin typeface="Source Serif 4"/>
+              </a:rPr>
+              <a:t>3</a:t>
+            </a:r>
+          </a:p>
+        </p:txBody>
+      </p:sp>
+      <p:sp>
+        <p:nvSpPr>
+          <p:cNvPr id="11" name="TextBox 10"/>
+          <p:cNvSpPr txBox="1"/>
+          <p:nvPr/>
+        </p:nvSpPr>
+        <p:spPr>
+          <a:xfrm>
+            <a:off x="1463040" y="4242816"/>
+            <a:ext cx="9875520" cy="1005840"/>
+          </a:xfrm>
+          <a:prstGeom prst="rect">
+            <a:avLst/>
+          </a:prstGeom>
+          <a:noFill/>
+        </p:spPr>
+        <p:txBody>
+          <a:bodyPr wrap="square" anchor="t" lIns="0" rIns="0" tIns="0" bIns="0">
+            <a:spAutoFit/>
+          </a:bodyPr>
+          <a:lstStyle/>
+          <a:p>
+            <a:pPr algn="l">
+              <a:spcAft>
+                <a:spcPts val="945"/>
+              </a:spcAft>
+            </a:pPr>
+            <a:r>
+              <a:rPr sz="2100" b="1" i="0">
                 <a:solidFill>
                   <a:srgbClr val="1C1B19"/>
                 </a:solidFill>
                 <a:latin typeface="Source Serif 4"/>
               </a:rPr>
-              <a:t>A package</a:t>
-            </a:r>
-          </a:p>
-        </p:txBody>
-      </p:sp>
-      <p:cxnSp>
-        <p:nvCxnSpPr>
-          <p:cNvPr id="11" name="Connector 10"/>
-          <p:cNvCxnSpPr/>
+              <a:t>Talk one on one later.</a:t>
+            </a:r>
+          </a:p>
+          <a:p>
+            <a:pPr algn="l">
+              <a:spcAft>
+                <a:spcPts val="945"/>
+              </a:spcAft>
+            </a:pPr>
+            <a:r>
+              <a:rPr sz="1600" b="0" i="0">
+                <a:solidFill>
+                  <a:srgbClr val="5D5A54"/>
+                </a:solidFill>
+                <a:latin typeface="Source Serif 4"/>
+              </a:rPr>
+              <a:t>"That stuff you said about her was a lot."</a:t>
+            </a:r>
+          </a:p>
+        </p:txBody>
+      </p:sp>
+      <p:sp>
+        <p:nvSpPr>
+          <p:cNvPr id="12" name="TextBox 11"/>
+          <p:cNvSpPr txBox="1"/>
           <p:nvPr/>
-        </p:nvCxnSpPr>
-        <p:spPr>
-          <a:xfrm>
-            <a:off x="5632704" y="3246120"/>
-            <a:ext cx="896112" cy="0"/>
-          </a:xfrm>
-          <a:prstGeom prst="line">
-            <a:avLst/>
-          </a:prstGeom>
-          <a:ln w="31750">
-            <a:solidFill>
-              <a:srgbClr val="F47B20"/>
-            </a:solidFill>
-            <a:tailEnd type="triangle"/>
-          </a:ln>
-        </p:spPr>
-        <p:style>
-          <a:lnRef idx="2">
-            <a:schemeClr val="accent1"/>
-          </a:lnRef>
-          <a:fillRef idx="0">
-            <a:schemeClr val="accent1"/>
-          </a:fillRef>
-          <a:effectRef idx="1">
-            <a:schemeClr val="accent1"/>
-          </a:effectRef>
-          <a:fontRef idx="minor">
-            <a:schemeClr val="tx1"/>
-          </a:fontRef>
-        </p:style>
-      </p:cxnSp>
-      <p:sp>
-        <p:nvSpPr>
-          <p:cNvPr id="12" name="Rectangle 11"/>
-          <p:cNvSpPr/>
-          <p:nvPr/>
-        </p:nvSpPr>
-        <p:spPr>
-          <a:xfrm>
-            <a:off x="6583680" y="2743200"/>
-            <a:ext cx="1874519" cy="1005840"/>
-          </a:xfrm>
-          <a:prstGeom prst="rect">
-            <a:avLst/>
-          </a:prstGeom>
-          <a:solidFill>
-            <a:srgbClr val="FFFFFF"/>
-          </a:solidFill>
-          <a:ln w="15875">
-            <a:solidFill>
-              <a:srgbClr val="0B2D5B"/>
-            </a:solidFill>
-          </a:ln>
-          <a:effectLst/>
-        </p:spPr>
-        <p:style>
-          <a:lnRef idx="1">
-            <a:schemeClr val="accent1"/>
-          </a:lnRef>
-          <a:fillRef idx="3">
-            <a:schemeClr val="accent1"/>
-          </a:fillRef>
-          <a:effectRef idx="2">
-            <a:schemeClr val="accent1"/>
-          </a:effectRef>
-          <a:fontRef idx="minor">
-            <a:schemeClr val="lt1"/>
-          </a:fontRef>
-        </p:style>
-        <p:txBody>
-          <a:bodyPr rtlCol="0" anchor="ctr"/>
-          <a:lstStyle/>
-          <a:p>
-            <a:pPr algn="ctr"/>
+        </p:nvSpPr>
+        <p:spPr>
+          <a:xfrm>
+            <a:off x="822960" y="5212080"/>
+            <a:ext cx="548640" cy="1005840"/>
+          </a:xfrm>
+          <a:prstGeom prst="rect">
+            <a:avLst/>
+          </a:prstGeom>
+          <a:noFill/>
+        </p:spPr>
+        <p:txBody>
+          <a:bodyPr wrap="square" anchor="t" lIns="0" rIns="0" tIns="0" bIns="0">
+            <a:spAutoFit/>
+          </a:bodyPr>
+          <a:lstStyle/>
+          <a:p>
+            <a:pPr algn="l">
+              <a:spcAft>
+                <a:spcPts val="1170"/>
+              </a:spcAft>
+            </a:pPr>
+            <a:r>
+              <a:rPr sz="2600" b="1" i="0">
+                <a:solidFill>
+                  <a:srgbClr val="F47B20"/>
+                </a:solidFill>
+                <a:latin typeface="Source Serif 4"/>
+              </a:rPr>
+              <a:t>4</a:t>
+            </a:r>
           </a:p>
         </p:txBody>
       </p:sp>
@@ -8524,168 +8850,8 @@
         </p:nvSpPr>
         <p:spPr>
           <a:xfrm>
-            <a:off x="6583680" y="2743200"/>
-            <a:ext cx="1874519" cy="1005840"/>
-          </a:xfrm>
-          <a:prstGeom prst="rect">
-            <a:avLst/>
-          </a:prstGeom>
-          <a:noFill/>
-        </p:spPr>
-        <p:txBody>
-          <a:bodyPr wrap="square" anchor="ctr" lIns="0" rIns="0" tIns="0" bIns="0">
-            <a:spAutoFit/>
-          </a:bodyPr>
-          <a:lstStyle/>
-          <a:p>
-            <a:pPr algn="ctr">
-              <a:spcAft>
-                <a:spcPts val="900"/>
-              </a:spcAft>
-            </a:pPr>
-            <a:r>
-              <a:rPr sz="2000" b="1" i="0">
-                <a:solidFill>
-                  <a:srgbClr val="1C1B19"/>
-                </a:solidFill>
-                <a:latin typeface="Source Serif 4"/>
-              </a:rPr>
-              <a:t>A product</a:t>
-            </a:r>
-          </a:p>
-        </p:txBody>
-      </p:sp>
-      <p:cxnSp>
-        <p:nvCxnSpPr>
-          <p:cNvPr id="14" name="Connector 13"/>
-          <p:cNvCxnSpPr/>
-          <p:nvPr/>
-        </p:nvCxnSpPr>
-        <p:spPr>
-          <a:xfrm>
-            <a:off x="8513064" y="3246120"/>
-            <a:ext cx="896112" cy="0"/>
-          </a:xfrm>
-          <a:prstGeom prst="line">
-            <a:avLst/>
-          </a:prstGeom>
-          <a:ln w="31750">
-            <a:solidFill>
-              <a:srgbClr val="F47B20"/>
-            </a:solidFill>
-            <a:tailEnd type="triangle"/>
-          </a:ln>
-        </p:spPr>
-        <p:style>
-          <a:lnRef idx="2">
-            <a:schemeClr val="accent1"/>
-          </a:lnRef>
-          <a:fillRef idx="0">
-            <a:schemeClr val="accent1"/>
-          </a:fillRef>
-          <a:effectRef idx="1">
-            <a:schemeClr val="accent1"/>
-          </a:effectRef>
-          <a:fontRef idx="minor">
-            <a:schemeClr val="tx1"/>
-          </a:fontRef>
-        </p:style>
-      </p:cxnSp>
-      <p:sp>
-        <p:nvSpPr>
-          <p:cNvPr id="15" name="Rectangle 14"/>
-          <p:cNvSpPr/>
-          <p:nvPr/>
-        </p:nvSpPr>
-        <p:spPr>
-          <a:xfrm>
-            <a:off x="9464040" y="2743200"/>
-            <a:ext cx="1874519" cy="1005840"/>
-          </a:xfrm>
-          <a:prstGeom prst="rect">
-            <a:avLst/>
-          </a:prstGeom>
-          <a:solidFill>
-            <a:srgbClr val="FFFFFF"/>
-          </a:solidFill>
-          <a:ln w="15875">
-            <a:solidFill>
-              <a:srgbClr val="0B2D5B"/>
-            </a:solidFill>
-          </a:ln>
-          <a:effectLst/>
-        </p:spPr>
-        <p:style>
-          <a:lnRef idx="1">
-            <a:schemeClr val="accent1"/>
-          </a:lnRef>
-          <a:fillRef idx="3">
-            <a:schemeClr val="accent1"/>
-          </a:fillRef>
-          <a:effectRef idx="2">
-            <a:schemeClr val="accent1"/>
-          </a:effectRef>
-          <a:fontRef idx="minor">
-            <a:schemeClr val="lt1"/>
-          </a:fontRef>
-        </p:style>
-        <p:txBody>
-          <a:bodyPr rtlCol="0" anchor="ctr"/>
-          <a:lstStyle/>
-          <a:p>
-            <a:pPr algn="ctr"/>
-          </a:p>
-        </p:txBody>
-      </p:sp>
-      <p:sp>
-        <p:nvSpPr>
-          <p:cNvPr id="16" name="TextBox 15"/>
-          <p:cNvSpPr txBox="1"/>
-          <p:nvPr/>
-        </p:nvSpPr>
-        <p:spPr>
-          <a:xfrm>
-            <a:off x="9464040" y="2743200"/>
-            <a:ext cx="1874519" cy="1005840"/>
-          </a:xfrm>
-          <a:prstGeom prst="rect">
-            <a:avLst/>
-          </a:prstGeom>
-          <a:noFill/>
-        </p:spPr>
-        <p:txBody>
-          <a:bodyPr wrap="square" anchor="ctr" lIns="0" rIns="0" tIns="0" bIns="0">
-            <a:spAutoFit/>
-          </a:bodyPr>
-          <a:lstStyle/>
-          <a:p>
-            <a:pPr algn="ctr">
-              <a:spcAft>
-                <a:spcPts val="900"/>
-              </a:spcAft>
-            </a:pPr>
-            <a:r>
-              <a:rPr sz="2000" b="1" i="0">
-                <a:solidFill>
-                  <a:srgbClr val="1C1B19"/>
-                </a:solidFill>
-                <a:latin typeface="Source Serif 4"/>
-              </a:rPr>
-              <a:t>Leaving costs you</a:t>
-            </a:r>
-          </a:p>
-        </p:txBody>
-      </p:sp>
-      <p:sp>
-        <p:nvSpPr>
-          <p:cNvPr id="17" name="TextBox 16"/>
-          <p:cNvSpPr txBox="1"/>
-          <p:nvPr/>
-        </p:nvSpPr>
-        <p:spPr>
-          <a:xfrm>
-            <a:off x="822960" y="4160520"/>
-            <a:ext cx="10515600" cy="457200"/>
+            <a:off x="1463040" y="5248656"/>
+            <a:ext cx="9875520" cy="1005840"/>
           </a:xfrm>
           <a:prstGeom prst="rect">
             <a:avLst/>
@@ -8698,58 +8864,35 @@
           </a:bodyPr>
           <a:lstStyle/>
           <a:p>
-            <a:pPr algn="ctr">
-              <a:spcAft>
-                <a:spcPts val="810"/>
-              </a:spcAft>
-            </a:pPr>
-            <a:r>
-              <a:rPr sz="1800" b="1" i="0">
-                <a:solidFill>
-                  <a:srgbClr val="F47B20"/>
-                </a:solidFill>
-                <a:latin typeface="Inter Tight"/>
-              </a:rPr>
-              <a:t>and it keeps you watching</a:t>
-            </a:r>
-          </a:p>
-        </p:txBody>
-      </p:sp>
-      <p:sp>
-        <p:nvSpPr>
-          <p:cNvPr id="18" name="TextBox 17"/>
-          <p:cNvSpPr txBox="1"/>
-          <p:nvPr/>
-        </p:nvSpPr>
-        <p:spPr>
-          <a:xfrm>
-            <a:off x="822960" y="4846320"/>
-            <a:ext cx="10515600" cy="1188720"/>
-          </a:xfrm>
-          <a:prstGeom prst="rect">
-            <a:avLst/>
-          </a:prstGeom>
-          <a:noFill/>
-        </p:spPr>
-        <p:txBody>
-          <a:bodyPr wrap="square" anchor="t" lIns="0" rIns="0" tIns="0" bIns="0">
-            <a:spAutoFit/>
-          </a:bodyPr>
-          <a:lstStyle/>
-          <a:p>
-            <a:pPr algn="ctr">
-              <a:spcAft>
-                <a:spcPts val="900"/>
-              </a:spcAft>
-            </a:pPr>
-            <a:r>
-              <a:rPr sz="2000" b="0" i="1">
+            <a:pPr algn="l">
+              <a:spcAft>
+                <a:spcPts val="945"/>
+              </a:spcAft>
+            </a:pPr>
+            <a:r>
+              <a:rPr sz="2100" b="1" i="0">
+                <a:solidFill>
+                  <a:srgbClr val="1C1B19"/>
+                </a:solidFill>
+                <a:latin typeface="Source Serif 4"/>
+              </a:rPr>
+              <a:t>Check on the person it was about.</a:t>
+            </a:r>
+          </a:p>
+          <a:p>
+            <a:pPr algn="l">
+              <a:spcAft>
+                <a:spcPts val="945"/>
+              </a:spcAft>
+            </a:pPr>
+            <a:r>
+              <a:rPr sz="1600" b="0" i="0">
                 <a:solidFill>
                   <a:srgbClr val="5D5A54"/>
                 </a:solidFill>
                 <a:latin typeface="Source Serif 4"/>
               </a:rPr>
-              <a:t>Confidence and respect are good to want. The package and the monthly fee are the catch.</a:t>
+              <a:t>"That wasn't cool. You okay?"</a:t>
             </a:r>
           </a:p>
         </p:txBody>
@@ -8858,7 +9001,7 @@
                 </a:solidFill>
                 <a:latin typeface="Inter Tight"/>
               </a:rPr>
-              <a:t>STAND UP, SIT DOWN</a:t>
+              <a:t>THREE MOMENTS</a:t>
             </a:r>
           </a:p>
         </p:txBody>
@@ -8911,7 +9054,7 @@
         <p:spPr>
           <a:xfrm>
             <a:off x="822960" y="1005840"/>
-            <a:ext cx="10515600" cy="1097280"/>
+            <a:ext cx="10515600" cy="914400"/>
           </a:xfrm>
           <a:prstGeom prst="rect">
             <a:avLst/>
@@ -8926,31 +9069,77 @@
           <a:p>
             <a:pPr algn="l">
               <a:spcAft>
-                <a:spcPts val="1620"/>
-              </a:spcAft>
-            </a:pPr>
-            <a:r>
-              <a:rPr sz="3600" b="1" i="0">
+                <a:spcPts val="1530"/>
+              </a:spcAft>
+            </a:pPr>
+            <a:r>
+              <a:rPr sz="3400" b="1" i="0">
                 <a:solidFill>
                   <a:srgbClr val="1C1B19"/>
                 </a:solidFill>
                 <a:latin typeface="Source Serif 4"/>
               </a:rPr>
-              <a:t>Stand up if you think it's true.</a:t>
-            </a:r>
-          </a:p>
-        </p:txBody>
-      </p:sp>
-      <p:sp>
-        <p:nvSpPr>
-          <p:cNvPr id="6" name="TextBox 5"/>
+              <a:t>What's your move?</a:t>
+            </a:r>
+          </a:p>
+        </p:txBody>
+      </p:sp>
+      <p:sp>
+        <p:nvSpPr>
+          <p:cNvPr id="6" name="Rectangle 5"/>
+          <p:cNvSpPr/>
+          <p:nvPr/>
+        </p:nvSpPr>
+        <p:spPr>
+          <a:xfrm>
+            <a:off x="822960" y="2103120"/>
+            <a:ext cx="3322320" cy="3840480"/>
+          </a:xfrm>
+          <a:prstGeom prst="rect">
+            <a:avLst/>
+          </a:prstGeom>
+          <a:solidFill>
+            <a:srgbClr val="FFFFFF"/>
+          </a:solidFill>
+          <a:ln w="15875">
+            <a:solidFill>
+              <a:srgbClr val="D8D2C6"/>
+            </a:solidFill>
+          </a:ln>
+          <a:effectLst/>
+        </p:spPr>
+        <p:style>
+          <a:lnRef idx="1">
+            <a:schemeClr val="accent1"/>
+          </a:lnRef>
+          <a:fillRef idx="3">
+            <a:schemeClr val="accent1"/>
+          </a:fillRef>
+          <a:effectRef idx="2">
+            <a:schemeClr val="accent1"/>
+          </a:effectRef>
+          <a:fontRef idx="minor">
+            <a:schemeClr val="lt1"/>
+          </a:fontRef>
+        </p:style>
+        <p:txBody>
+          <a:bodyPr rtlCol="0" anchor="ctr"/>
+          <a:lstStyle/>
+          <a:p>
+            <a:pPr algn="ctr"/>
+          </a:p>
+        </p:txBody>
+      </p:sp>
+      <p:sp>
+        <p:nvSpPr>
+          <p:cNvPr id="7" name="TextBox 6"/>
           <p:cNvSpPr txBox="1"/>
           <p:nvPr/>
         </p:nvSpPr>
         <p:spPr>
           <a:xfrm>
-            <a:off x="822960" y="2194560"/>
-            <a:ext cx="548640" cy="1051560"/>
+            <a:off x="1051560" y="2286000"/>
+            <a:ext cx="2865120" cy="365760"/>
           </a:xfrm>
           <a:prstGeom prst="rect">
             <a:avLst/>
@@ -8965,31 +9154,31 @@
           <a:p>
             <a:pPr algn="l">
               <a:spcAft>
-                <a:spcPts val="1170"/>
-              </a:spcAft>
-            </a:pPr>
-            <a:r>
-              <a:rPr sz="2600" b="1" i="0">
-                <a:solidFill>
-                  <a:srgbClr val="F47B20"/>
-                </a:solidFill>
-                <a:latin typeface="Source Serif 4"/>
-              </a:rPr>
-              <a:t>1</a:t>
-            </a:r>
-          </a:p>
-        </p:txBody>
-      </p:sp>
-      <p:sp>
-        <p:nvSpPr>
-          <p:cNvPr id="7" name="TextBox 6"/>
+                <a:spcPts val="585"/>
+              </a:spcAft>
+            </a:pPr>
+            <a:r>
+              <a:rPr sz="1300" b="1" i="0">
+                <a:solidFill>
+                  <a:srgbClr val="0B2D5B"/>
+                </a:solidFill>
+                <a:latin typeface="Inter Tight"/>
+              </a:rPr>
+              <a:t>THE TEAM BUS</a:t>
+            </a:r>
+          </a:p>
+        </p:txBody>
+      </p:sp>
+      <p:sp>
+        <p:nvSpPr>
+          <p:cNvPr id="8" name="TextBox 7"/>
           <p:cNvSpPr txBox="1"/>
           <p:nvPr/>
         </p:nvSpPr>
         <p:spPr>
           <a:xfrm>
-            <a:off x="1463040" y="2231136"/>
-            <a:ext cx="9875520" cy="1051560"/>
+            <a:off x="1051560" y="2743200"/>
+            <a:ext cx="2865120" cy="3017520"/>
           </a:xfrm>
           <a:prstGeom prst="rect">
             <a:avLst/>
@@ -9004,31 +9193,77 @@
           <a:p>
             <a:pPr algn="l">
               <a:spcAft>
-                <a:spcPts val="945"/>
-              </a:spcAft>
-            </a:pPr>
-            <a:r>
-              <a:rPr sz="2100" b="1" i="0">
+                <a:spcPts val="810"/>
+              </a:spcAft>
+            </a:pPr>
+            <a:r>
+              <a:rPr sz="1800" b="0" i="0">
                 <a:solidFill>
                   <a:srgbClr val="1C1B19"/>
                 </a:solidFill>
                 <a:latin typeface="Source Serif 4"/>
               </a:rPr>
-              <a:t>"Alpha wolves prove there's a natural ranking of guys."</a:t>
-            </a:r>
-          </a:p>
-        </p:txBody>
-      </p:sp>
-      <p:sp>
-        <p:nvSpPr>
-          <p:cNvPr id="8" name="TextBox 7"/>
+              <a:t>Someone plays a clip saying women over 25 have "no value." Half the bus laughs.</a:t>
+            </a:r>
+          </a:p>
+        </p:txBody>
+      </p:sp>
+      <p:sp>
+        <p:nvSpPr>
+          <p:cNvPr id="9" name="Rectangle 8"/>
+          <p:cNvSpPr/>
+          <p:nvPr/>
+        </p:nvSpPr>
+        <p:spPr>
+          <a:xfrm>
+            <a:off x="4419600" y="2103120"/>
+            <a:ext cx="3322320" cy="3840480"/>
+          </a:xfrm>
+          <a:prstGeom prst="rect">
+            <a:avLst/>
+          </a:prstGeom>
+          <a:solidFill>
+            <a:srgbClr val="FFFFFF"/>
+          </a:solidFill>
+          <a:ln w="15875">
+            <a:solidFill>
+              <a:srgbClr val="D8D2C6"/>
+            </a:solidFill>
+          </a:ln>
+          <a:effectLst/>
+        </p:spPr>
+        <p:style>
+          <a:lnRef idx="1">
+            <a:schemeClr val="accent1"/>
+          </a:lnRef>
+          <a:fillRef idx="3">
+            <a:schemeClr val="accent1"/>
+          </a:fillRef>
+          <a:effectRef idx="2">
+            <a:schemeClr val="accent1"/>
+          </a:effectRef>
+          <a:fontRef idx="minor">
+            <a:schemeClr val="lt1"/>
+          </a:fontRef>
+        </p:style>
+        <p:txBody>
+          <a:bodyPr rtlCol="0" anchor="ctr"/>
+          <a:lstStyle/>
+          <a:p>
+            <a:pPr algn="ctr"/>
+          </a:p>
+        </p:txBody>
+      </p:sp>
+      <p:sp>
+        <p:nvSpPr>
+          <p:cNvPr id="10" name="TextBox 9"/>
           <p:cNvSpPr txBox="1"/>
           <p:nvPr/>
         </p:nvSpPr>
         <p:spPr>
           <a:xfrm>
-            <a:off x="822960" y="3246120"/>
-            <a:ext cx="548640" cy="1051560"/>
+            <a:off x="4648200" y="2286000"/>
+            <a:ext cx="2865120" cy="365760"/>
           </a:xfrm>
           <a:prstGeom prst="rect">
             <a:avLst/>
@@ -9043,31 +9278,31 @@
           <a:p>
             <a:pPr algn="l">
               <a:spcAft>
-                <a:spcPts val="1170"/>
-              </a:spcAft>
-            </a:pPr>
-            <a:r>
-              <a:rPr sz="2600" b="1" i="0">
-                <a:solidFill>
-                  <a:srgbClr val="F47B20"/>
-                </a:solidFill>
-                <a:latin typeface="Source Serif 4"/>
-              </a:rPr>
-              <a:t>2</a:t>
-            </a:r>
-          </a:p>
-        </p:txBody>
-      </p:sp>
-      <p:sp>
-        <p:nvSpPr>
-          <p:cNvPr id="9" name="TextBox 8"/>
+                <a:spcPts val="585"/>
+              </a:spcAft>
+            </a:pPr>
+            <a:r>
+              <a:rPr sz="1300" b="1" i="0">
+                <a:solidFill>
+                  <a:srgbClr val="0B2D5B"/>
+                </a:solidFill>
+                <a:latin typeface="Inter Tight"/>
+              </a:rPr>
+              <a:t>MARCO</a:t>
+            </a:r>
+          </a:p>
+        </p:txBody>
+      </p:sp>
+      <p:sp>
+        <p:nvSpPr>
+          <p:cNvPr id="11" name="TextBox 10"/>
           <p:cNvSpPr txBox="1"/>
           <p:nvPr/>
         </p:nvSpPr>
         <p:spPr>
           <a:xfrm>
-            <a:off x="1463040" y="3282696"/>
-            <a:ext cx="9875520" cy="1051560"/>
+            <a:off x="4648200" y="2743200"/>
+            <a:ext cx="2865120" cy="3017520"/>
           </a:xfrm>
           <a:prstGeom prst="rect">
             <a:avLst/>
@@ -9082,31 +9317,77 @@
           <a:p>
             <a:pPr algn="l">
               <a:spcAft>
-                <a:spcPts val="945"/>
-              </a:spcAft>
-            </a:pPr>
-            <a:r>
-              <a:rPr sz="2100" b="1" i="0">
+                <a:spcPts val="810"/>
+              </a:spcAft>
+            </a:pPr>
+            <a:r>
+              <a:rPr sz="1800" b="0" i="0">
                 <a:solidFill>
                   <a:srgbClr val="1C1B19"/>
                 </a:solidFill>
                 <a:latin typeface="Source Serif 4"/>
               </a:rPr>
-              <a:t>"Being nice makes a guy less attractive."</a:t>
-            </a:r>
-          </a:p>
-        </p:txBody>
-      </p:sp>
-      <p:sp>
-        <p:nvSpPr>
-          <p:cNvPr id="10" name="TextBox 9"/>
+              <a:t>Since his breakup a month ago, he's been posting clips about how women "are all the same."</a:t>
+            </a:r>
+          </a:p>
+        </p:txBody>
+      </p:sp>
+      <p:sp>
+        <p:nvSpPr>
+          <p:cNvPr id="12" name="Rectangle 11"/>
+          <p:cNvSpPr/>
+          <p:nvPr/>
+        </p:nvSpPr>
+        <p:spPr>
+          <a:xfrm>
+            <a:off x="8016239" y="2103120"/>
+            <a:ext cx="3322320" cy="3840480"/>
+          </a:xfrm>
+          <a:prstGeom prst="rect">
+            <a:avLst/>
+          </a:prstGeom>
+          <a:solidFill>
+            <a:srgbClr val="FFFFFF"/>
+          </a:solidFill>
+          <a:ln w="15875">
+            <a:solidFill>
+              <a:srgbClr val="D8D2C6"/>
+            </a:solidFill>
+          </a:ln>
+          <a:effectLst/>
+        </p:spPr>
+        <p:style>
+          <a:lnRef idx="1">
+            <a:schemeClr val="accent1"/>
+          </a:lnRef>
+          <a:fillRef idx="3">
+            <a:schemeClr val="accent1"/>
+          </a:fillRef>
+          <a:effectRef idx="2">
+            <a:schemeClr val="accent1"/>
+          </a:effectRef>
+          <a:fontRef idx="minor">
+            <a:schemeClr val="lt1"/>
+          </a:fontRef>
+        </p:style>
+        <p:txBody>
+          <a:bodyPr rtlCol="0" anchor="ctr"/>
+          <a:lstStyle/>
+          <a:p>
+            <a:pPr algn="ctr"/>
+          </a:p>
+        </p:txBody>
+      </p:sp>
+      <p:sp>
+        <p:nvSpPr>
+          <p:cNvPr id="13" name="TextBox 12"/>
           <p:cNvSpPr txBox="1"/>
           <p:nvPr/>
         </p:nvSpPr>
         <p:spPr>
           <a:xfrm>
-            <a:off x="822960" y="4297679"/>
-            <a:ext cx="548640" cy="1051560"/>
+            <a:off x="8244839" y="2286000"/>
+            <a:ext cx="2865120" cy="365760"/>
           </a:xfrm>
           <a:prstGeom prst="rect">
             <a:avLst/>
@@ -9121,31 +9402,31 @@
           <a:p>
             <a:pPr algn="l">
               <a:spcAft>
-                <a:spcPts val="1170"/>
-              </a:spcAft>
-            </a:pPr>
-            <a:r>
-              <a:rPr sz="2600" b="1" i="0">
-                <a:solidFill>
-                  <a:srgbClr val="F47B20"/>
-                </a:solidFill>
-                <a:latin typeface="Source Serif 4"/>
-              </a:rPr>
-              <a:t>3</a:t>
-            </a:r>
-          </a:p>
-        </p:txBody>
-      </p:sp>
-      <p:sp>
-        <p:nvSpPr>
-          <p:cNvPr id="11" name="TextBox 10"/>
+                <a:spcPts val="585"/>
+              </a:spcAft>
+            </a:pPr>
+            <a:r>
+              <a:rPr sz="1300" b="1" i="0">
+                <a:solidFill>
+                  <a:srgbClr val="0B2D5B"/>
+                </a:solidFill>
+                <a:latin typeface="Inter Tight"/>
+              </a:rPr>
+              <a:t>AALIYAH</a:t>
+            </a:r>
+          </a:p>
+        </p:txBody>
+      </p:sp>
+      <p:sp>
+        <p:nvSpPr>
+          <p:cNvPr id="14" name="TextBox 13"/>
           <p:cNvSpPr txBox="1"/>
           <p:nvPr/>
         </p:nvSpPr>
         <p:spPr>
           <a:xfrm>
-            <a:off x="1463040" y="4334255"/>
-            <a:ext cx="9875520" cy="1051560"/>
+            <a:off x="8244839" y="2743200"/>
+            <a:ext cx="2865120" cy="3017520"/>
           </a:xfrm>
           <a:prstGeom prst="rect">
             <a:avLst/>
@@ -9160,17 +9441,17 @@
           <a:p>
             <a:pPr algn="l">
               <a:spcAft>
-                <a:spcPts val="945"/>
-              </a:spcAft>
-            </a:pPr>
-            <a:r>
-              <a:rPr sz="2100" b="1" i="0">
+                <a:spcPts val="810"/>
+              </a:spcAft>
+            </a:pPr>
+            <a:r>
+              <a:rPr sz="1800" b="0" i="0">
                 <a:solidFill>
                   <a:srgbClr val="1C1B19"/>
                 </a:solidFill>
                 <a:latin typeface="Source Serif 4"/>
               </a:rPr>
-              <a:t>"Guys don't really need close friends."</a:t>
+              <a:t>A guy she's been talking to keeps sending her "high-value man" videos and wants her to agree.</a:t>
             </a:r>
           </a:p>
         </p:txBody>
@@ -9279,7 +9560,7 @@
                 </a:solidFill>
                 <a:latin typeface="Inter Tight"/>
               </a:rPr>
-              <a:t>ANONYMOUS CARDS</a:t>
+              <a:t>BEFORE YOU GO</a:t>
             </a:r>
           </a:p>
         </p:txBody>
@@ -9325,23 +9606,103 @@
       </p:sp>
       <p:sp>
         <p:nvSpPr>
-          <p:cNvPr id="5" name="Rectangle 4"/>
+          <p:cNvPr id="5" name="TextBox 4"/>
+          <p:cNvSpPr txBox="1"/>
+          <p:nvPr/>
+        </p:nvSpPr>
+        <p:spPr>
+          <a:xfrm>
+            <a:off x="822960" y="1188720"/>
+            <a:ext cx="10515600" cy="914400"/>
+          </a:xfrm>
+          <a:prstGeom prst="rect">
+            <a:avLst/>
+          </a:prstGeom>
+          <a:noFill/>
+        </p:spPr>
+        <p:txBody>
+          <a:bodyPr wrap="square" anchor="t" lIns="0" rIns="0" tIns="0" bIns="0">
+            <a:spAutoFit/>
+          </a:bodyPr>
+          <a:lstStyle/>
+          <a:p>
+            <a:pPr algn="l">
+              <a:spcAft>
+                <a:spcPts val="1620"/>
+              </a:spcAft>
+            </a:pPr>
+            <a:r>
+              <a:rPr sz="3600" b="1" i="0">
+                <a:solidFill>
+                  <a:srgbClr val="1C1B19"/>
+                </a:solidFill>
+                <a:latin typeface="Source Serif 4"/>
+              </a:rPr>
+              <a:t>What do you want to keep?</a:t>
+            </a:r>
+          </a:p>
+        </p:txBody>
+      </p:sp>
+      <p:sp>
+        <p:nvSpPr>
+          <p:cNvPr id="6" name="TextBox 5"/>
+          <p:cNvSpPr txBox="1"/>
+          <p:nvPr/>
+        </p:nvSpPr>
+        <p:spPr>
+          <a:xfrm>
+            <a:off x="822960" y="2286000"/>
+            <a:ext cx="10515600" cy="1463040"/>
+          </a:xfrm>
+          <a:prstGeom prst="rect">
+            <a:avLst/>
+          </a:prstGeom>
+          <a:noFill/>
+        </p:spPr>
+        <p:txBody>
+          <a:bodyPr wrap="square" anchor="t" lIns="0" rIns="0" tIns="0" bIns="0">
+            <a:spAutoFit/>
+          </a:bodyPr>
+          <a:lstStyle/>
+          <a:p>
+            <a:pPr algn="l">
+              <a:spcAft>
+                <a:spcPts val="1080"/>
+              </a:spcAft>
+            </a:pPr>
+            <a:r>
+              <a:rPr sz="2400" b="0" i="0">
+                <a:solidFill>
+                  <a:srgbClr val="1C1B19"/>
+                </a:solidFill>
+                <a:latin typeface="Source Serif 4"/>
+              </a:rPr>
+              <a:t>Privately: what did people in your life teach you about being a man? Which parts do you want to keep?</a:t>
+            </a:r>
+          </a:p>
+        </p:txBody>
+      </p:sp>
+      <p:sp>
+        <p:nvSpPr>
+          <p:cNvPr id="7" name="Rectangle 6"/>
           <p:cNvSpPr/>
           <p:nvPr/>
         </p:nvSpPr>
         <p:spPr>
           <a:xfrm>
-            <a:off x="822960" y="1371600"/>
-            <a:ext cx="73152" cy="3566160"/>
+            <a:off x="822960" y="4023360"/>
+            <a:ext cx="10515600" cy="1371600"/>
           </a:xfrm>
           <a:prstGeom prst="rect">
             <a:avLst/>
           </a:prstGeom>
           <a:solidFill>
-            <a:srgbClr val="F47B20"/>
+            <a:srgbClr val="FFFFFF"/>
           </a:solidFill>
-          <a:ln>
-            <a:noFill/>
+          <a:ln w="15875">
+            <a:solidFill>
+              <a:srgbClr val="1C1B19"/>
+            </a:solidFill>
           </a:ln>
           <a:effectLst/>
         </p:spPr>
@@ -9369,53 +9730,14 @@
       </p:sp>
       <p:sp>
         <p:nvSpPr>
-          <p:cNvPr id="6" name="TextBox 5"/>
+          <p:cNvPr id="8" name="TextBox 7"/>
           <p:cNvSpPr txBox="1"/>
           <p:nvPr/>
         </p:nvSpPr>
         <p:spPr>
           <a:xfrm>
-            <a:off x="1188720" y="1371600"/>
-            <a:ext cx="10058400" cy="3566160"/>
-          </a:xfrm>
-          <a:prstGeom prst="rect">
-            <a:avLst/>
-          </a:prstGeom>
-          <a:noFill/>
-        </p:spPr>
-        <p:txBody>
-          <a:bodyPr wrap="square" anchor="ctr" lIns="0" rIns="0" tIns="0" bIns="0">
-            <a:spAutoFit/>
-          </a:bodyPr>
-          <a:lstStyle/>
-          <a:p>
-            <a:pPr algn="l">
-              <a:spcAft>
-                <a:spcPts val="1800"/>
-              </a:spcAft>
-            </a:pPr>
-            <a:r>
-              <a:rPr sz="4000" b="0" i="1">
-                <a:solidFill>
-                  <a:srgbClr val="1C1B19"/>
-                </a:solidFill>
-                <a:latin typeface="Source Serif 4"/>
-              </a:rPr>
-              <a:t>"Most guys at our school are fine with jokes that rate girls."</a:t>
-            </a:r>
-          </a:p>
-        </p:txBody>
-      </p:sp>
-      <p:sp>
-        <p:nvSpPr>
-          <p:cNvPr id="7" name="TextBox 6"/>
-          <p:cNvSpPr txBox="1"/>
-          <p:nvPr/>
-        </p:nvSpPr>
-        <p:spPr>
-          <a:xfrm>
-            <a:off x="1188720" y="5120640"/>
-            <a:ext cx="10058400" cy="914400"/>
+            <a:off x="1097280" y="4206240"/>
+            <a:ext cx="10058400" cy="365760"/>
           </a:xfrm>
           <a:prstGeom prst="rect">
             <a:avLst/>
@@ -9430,17 +9752,56 @@
           <a:p>
             <a:pPr algn="l">
               <a:spcAft>
-                <a:spcPts val="810"/>
-              </a:spcAft>
-            </a:pPr>
-            <a:r>
-              <a:rPr sz="1800" b="0" i="0">
-                <a:solidFill>
-                  <a:srgbClr val="5D5A54"/>
+                <a:spcPts val="540"/>
+              </a:spcAft>
+            </a:pPr>
+            <a:r>
+              <a:rPr sz="1200" b="1" i="0">
+                <a:solidFill>
+                  <a:srgbClr val="0B2D5B"/>
                 </a:solidFill>
                 <a:latin typeface="Inter Tight"/>
               </a:rPr>
-              <a:t>Write agree or disagree. Then write what you think yourself. Fold it. No names.</a:t>
+              <a:t>STUDENT PAGE</a:t>
+            </a:r>
+          </a:p>
+        </p:txBody>
+      </p:sp>
+      <p:sp>
+        <p:nvSpPr>
+          <p:cNvPr id="9" name="TextBox 8"/>
+          <p:cNvSpPr txBox="1"/>
+          <p:nvPr/>
+        </p:nvSpPr>
+        <p:spPr>
+          <a:xfrm>
+            <a:off x="1097280" y="4617720"/>
+            <a:ext cx="10058400" cy="640080"/>
+          </a:xfrm>
+          <a:prstGeom prst="rect">
+            <a:avLst/>
+          </a:prstGeom>
+          <a:noFill/>
+        </p:spPr>
+        <p:txBody>
+          <a:bodyPr wrap="square" anchor="t" lIns="0" rIns="0" tIns="0" bIns="0">
+            <a:spAutoFit/>
+          </a:bodyPr>
+          <a:lstStyle/>
+          <a:p>
+            <a:pPr algn="l">
+              <a:spcAft>
+                <a:spcPts val="900"/>
+              </a:spcAft>
+            </a:pPr>
+            <a:r>
+              <a:rPr sz="2000" b="0" i="0">
+                <a:solidFill>
+                  <a:srgbClr val="1C1B19"/>
+                </a:solidFill>
+                <a:latin typeface="Inter Tight"/>
+              </a:rPr>
+              <a:t>https://rmwtoolkit.github.io/bcds-toolkit/the-bro-code-high-school.html</a:t>
             </a:r>
           </a:p>
         </p:txBody>

--- a/decks/the-bro-code-lesson-v2.pptx
+++ b/decks/the-bro-code-lesson-v2.pptx
@@ -5371,7 +5371,7 @@
                 </a:solidFill>
                 <a:latin typeface="Source Serif 4"/>
               </a:rPr>
-              <a:t>Someone sharing photos of a real person, real or AI-made. Threats. Talk about a girl that turns into a plan to hurt, follow or embarrass her. Don't ask about these in the circle. Know your dean's and counselor's protocol before advisory, and follow up that day.</a:t>
+              <a:t>Someone sharing photos of a real person, real or AI-made. Threats. Talk about a girl that turns into a plan to hurt, follow or embarrass her. Don't ask about these in the circle. Follow up with a counselor or dean that day.</a:t>
             </a:r>
           </a:p>
           <a:p>
@@ -6656,6 +6656,45 @@
                 <a:latin typeface="Inter Tight"/>
               </a:rPr>
               <a:t>Beaver Upper School · Counseling</a:t>
+            </a:r>
+          </a:p>
+        </p:txBody>
+      </p:sp>
+      <p:sp>
+        <p:nvSpPr>
+          <p:cNvPr id="8" name="TextBox 7"/>
+          <p:cNvSpPr txBox="1"/>
+          <p:nvPr/>
+        </p:nvSpPr>
+        <p:spPr>
+          <a:xfrm>
+            <a:off x="6766560" y="5897880"/>
+            <a:ext cx="4846320" cy="640080"/>
+          </a:xfrm>
+          <a:prstGeom prst="rect">
+            <a:avLst/>
+          </a:prstGeom>
+          <a:noFill/>
+        </p:spPr>
+        <p:txBody>
+          <a:bodyPr wrap="square" anchor="t" lIns="0" rIns="0" tIns="0" bIns="0">
+            <a:spAutoFit/>
+          </a:bodyPr>
+          <a:lstStyle/>
+          <a:p>
+            <a:pPr algn="r">
+              <a:spcAft>
+                <a:spcPts val="495"/>
+              </a:spcAft>
+            </a:pPr>
+            <a:r>
+              <a:rPr sz="1100" b="0" i="0">
+                <a:solidFill>
+                  <a:srgbClr val="E8E4DA"/>
+                </a:solidFill>
+                <a:latin typeface="Inter Tight"/>
+              </a:rPr>
+              <a:t>Written by Dr. Rick Wilson, with AI-assisted drafting. Every lesson is reviewed and edited by Dr. Wilson.</a:t>
             </a:r>
           </a:p>
         </p:txBody>
